--- a/output/wordlabs-work-3day.pptx
+++ b/output/wordlabs-work-3day.pptx
@@ -4240,7 +4240,7 @@
                 <a:ea typeface="Calibri" pitchFamily="34" charset="-122"/>
                 <a:cs typeface="Calibri" pitchFamily="34" charset="-120"/>
               </a:rPr>
-              <a:t>"to do effort or labour"</a:t>
+              <a:t>"to do or make effort"</a:t>
             </a:r>
             <a:endParaRPr lang="en-US" sz="2200" dirty="0"/>
           </a:p>
@@ -5288,7 +5288,7 @@
                 <a:ea typeface="Calibri" pitchFamily="34" charset="-122"/>
                 <a:cs typeface="Calibri" pitchFamily="34" charset="-120"/>
               </a:rPr>
-              <a:t>Word Labs  •  wordlabs.app  •  Root: 'work' = to do effort or labour</a:t>
+              <a:t>Word Labs  •  wordlabs.app  •  Root: 'work' = to do or make effort</a:t>
             </a:r>
             <a:endParaRPr lang="en-US" sz="800" dirty="0"/>
           </a:p>
@@ -5928,7 +5928,7 @@
                 <a:ea typeface="Calibri" pitchFamily="34" charset="-122"/>
                 <a:cs typeface="Calibri" pitchFamily="34" charset="-120"/>
               </a:rPr>
-              <a:t>Word Labs  •  wordlabs.app  •  Root: 'work' = to do effort or labour</a:t>
+              <a:t>Word Labs  •  wordlabs.app  •  Root: 'work' = to do or make effort</a:t>
             </a:r>
             <a:endParaRPr lang="en-US" sz="800" dirty="0"/>
           </a:p>
@@ -6071,7 +6071,7 @@
                 <a:ea typeface="Calibri" pitchFamily="34" charset="-122"/>
                 <a:cs typeface="Calibri" pitchFamily="34" charset="-120"/>
               </a:rPr>
-              <a:t> in the classroom means that </a:t>
+              <a:t> and a clear </a:t>
             </a:r>
             <a:pPr algn="l" indent="0" marL="0">
               <a:buNone/>
@@ -6088,7 +6088,7 @@
                 <a:ea typeface="Calibri" pitchFamily="34" charset="-122"/>
                 <a:cs typeface="Calibri" pitchFamily="34" charset="-120"/>
               </a:rPr>
-              <a:t>workers</a:t>
+              <a:t>framework</a:t>
             </a:r>
             <a:pPr algn="l" indent="0" marL="0">
               <a:buNone/>
@@ -6102,7 +6102,7 @@
                 <a:ea typeface="Calibri" pitchFamily="34" charset="-122"/>
                 <a:cs typeface="Calibri" pitchFamily="34" charset="-120"/>
               </a:rPr>
-              <a:t> help each other every day.</a:t>
+              <a:t> helped the group finish their project on time.</a:t>
             </a:r>
             <a:endParaRPr lang="en-US" sz="1800" dirty="0"/>
           </a:p>
@@ -6385,7 +6385,7 @@
                 <a:ea typeface="Trebuchet MS" pitchFamily="34" charset="-122"/>
                 <a:cs typeface="Trebuchet MS" pitchFamily="34" charset="-120"/>
               </a:rPr>
-              <a:t>workers</a:t>
+              <a:t>framework</a:t>
             </a:r>
             <a:endParaRPr lang="en-US" sz="1400" dirty="0"/>
           </a:p>
@@ -6716,7 +6716,7 @@
                 <a:ea typeface="Calibri" pitchFamily="34" charset="-122"/>
                 <a:cs typeface="Calibri" pitchFamily="34" charset="-120"/>
               </a:rPr>
-              <a:t>Word Labs  •  wordlabs.app  •  Root: 'work' = to do effort or labour</a:t>
+              <a:t>Word Labs  •  wordlabs.app  •  Root: 'work' = to do or make effort</a:t>
             </a:r>
             <a:endParaRPr lang="en-US" sz="800" dirty="0"/>
           </a:p>
@@ -7543,7 +7543,7 @@
                 <a:ea typeface="Calibri" pitchFamily="34" charset="-122"/>
                 <a:cs typeface="Calibri" pitchFamily="34" charset="-120"/>
               </a:rPr>
-              <a:t>Word Labs  •  wordlabs.app  •  Root: 'work' = to do effort or labour</a:t>
+              <a:t>Word Labs  •  wordlabs.app  •  Root: 'work' = to do or make effort</a:t>
             </a:r>
             <a:endParaRPr lang="en-US" sz="800" dirty="0"/>
           </a:p>
@@ -7972,7 +7972,7 @@
                 <a:ea typeface="Calibri" pitchFamily="34" charset="-122"/>
                 <a:cs typeface="Calibri" pitchFamily="34" charset="-120"/>
               </a:rPr>
-              <a:t>effort or labour</a:t>
+              <a:t>to do or make effort</a:t>
             </a:r>
             <a:endParaRPr lang="en-US" sz="850" dirty="0"/>
           </a:p>
@@ -8528,7 +8528,7 @@
                 <a:ea typeface="Calibri" pitchFamily="34" charset="-122"/>
                 <a:cs typeface="Calibri" pitchFamily="34" charset="-120"/>
               </a:rPr>
-              <a:t>Word Labs  •  wordlabs.app  •  Root: 'work' = to do effort or labour</a:t>
+              <a:t>Word Labs  •  wordlabs.app  •  Root: 'work' = to do or make effort</a:t>
             </a:r>
             <a:endParaRPr lang="en-US" sz="800" dirty="0"/>
           </a:p>
@@ -8957,7 +8957,7 @@
                 <a:ea typeface="Calibri" pitchFamily="34" charset="-122"/>
                 <a:cs typeface="Calibri" pitchFamily="34" charset="-120"/>
               </a:rPr>
-              <a:t>effort or labour</a:t>
+              <a:t>to do or make effort</a:t>
             </a:r>
             <a:endParaRPr lang="en-US" sz="850" dirty="0"/>
           </a:p>
@@ -9645,7 +9645,7 @@
                 <a:ea typeface="Calibri" pitchFamily="34" charset="-122"/>
                 <a:cs typeface="Calibri" pitchFamily="34" charset="-120"/>
               </a:rPr>
-              <a:t>Word Labs  •  wordlabs.app  •  Root: 'work' = to do effort or labour</a:t>
+              <a:t>Word Labs  •  wordlabs.app  •  Root: 'work' = to do or make effort</a:t>
             </a:r>
             <a:endParaRPr lang="en-US" sz="800" dirty="0"/>
           </a:p>
@@ -10074,7 +10074,7 @@
                 <a:ea typeface="Calibri" pitchFamily="34" charset="-122"/>
                 <a:cs typeface="Calibri" pitchFamily="34" charset="-120"/>
               </a:rPr>
-              <a:t>effort or labour</a:t>
+              <a:t>to do or make effort</a:t>
             </a:r>
             <a:endParaRPr lang="en-US" sz="850" dirty="0"/>
           </a:p>
@@ -11119,7 +11119,7 @@
                 <a:ea typeface="Calibri" pitchFamily="34" charset="-122"/>
                 <a:cs typeface="Calibri" pitchFamily="34" charset="-120"/>
               </a:rPr>
-              <a:t>Word Labs  •  wordlabs.app  •  Root: 'work' = to do effort or labour</a:t>
+              <a:t>Word Labs  •  wordlabs.app  •  Root: 'work' = to do or make effort</a:t>
             </a:r>
             <a:endParaRPr lang="en-US" sz="800" dirty="0"/>
           </a:p>
@@ -11258,7 +11258,7 @@
                 <a:ea typeface="Trebuchet MS" pitchFamily="34" charset="-122"/>
                 <a:cs typeface="Trebuchet MS" pitchFamily="34" charset="-120"/>
               </a:rPr>
-              <a:t>workers</a:t>
+              <a:t>framework</a:t>
             </a:r>
             <a:endParaRPr lang="en-US" sz="2800" dirty="0"/>
           </a:p>
@@ -11946,7 +11946,7 @@
                 <a:ea typeface="Calibri" pitchFamily="34" charset="-122"/>
                 <a:cs typeface="Calibri" pitchFamily="34" charset="-120"/>
               </a:rPr>
-              <a:t>Word Labs  •  wordlabs.app  •  Root: 'work' = to do effort or labour</a:t>
+              <a:t>Word Labs  •  wordlabs.app  •  Root: 'work' = to do or make effort</a:t>
             </a:r>
             <a:endParaRPr lang="en-US" sz="800" dirty="0"/>
           </a:p>
@@ -12085,7 +12085,7 @@
                 <a:ea typeface="Trebuchet MS" pitchFamily="34" charset="-122"/>
                 <a:cs typeface="Trebuchet MS" pitchFamily="34" charset="-120"/>
               </a:rPr>
-              <a:t>workers</a:t>
+              <a:t>framework</a:t>
             </a:r>
             <a:endParaRPr lang="en-US" sz="2800" dirty="0"/>
           </a:p>
@@ -12165,7 +12165,7 @@
         </p:nvSpPr>
         <p:spPr>
           <a:xfrm>
-            <a:off x="2221992" y="2258568"/>
+            <a:off x="2938272" y="2258568"/>
             <a:ext cx="1828800" cy="292608"/>
           </a:xfrm>
           <a:prstGeom prst="rect">
@@ -12174,11 +12174,11 @@
             </a:avLst>
           </a:prstGeom>
           <a:solidFill>
-            <a:srgbClr val="CCFBF1"/>
+            <a:srgbClr val="DDD6FE"/>
           </a:solidFill>
           <a:ln w="19050">
             <a:solidFill>
-              <a:srgbClr val="0D9488"/>
+              <a:srgbClr val="7C3AED"/>
             </a:solidFill>
             <a:prstDash val="solid"/>
           </a:ln>
@@ -12199,7 +12199,7 @@
         </p:nvSpPr>
         <p:spPr>
           <a:xfrm>
-            <a:off x="2221992" y="2258568"/>
+            <a:off x="2938272" y="2258568"/>
             <a:ext cx="1828800" cy="292608"/>
           </a:xfrm>
           <a:prstGeom prst="rect">
@@ -12218,13 +12218,13 @@
             <a:r>
               <a:rPr lang="en-US" sz="1300" b="1" dirty="0">
                 <a:solidFill>
-                  <a:srgbClr val="0F766E"/>
+                  <a:srgbClr val="4C1D95"/>
                 </a:solidFill>
                 <a:latin typeface="Trebuchet MS" pitchFamily="34" charset="0"/>
                 <a:ea typeface="Trebuchet MS" pitchFamily="34" charset="-122"/>
                 <a:cs typeface="Trebuchet MS" pitchFamily="34" charset="-120"/>
               </a:rPr>
-              <a:t>work</a:t>
+              <a:t>frame</a:t>
             </a:r>
             <a:endParaRPr lang="en-US" sz="1300" dirty="0"/>
           </a:p>
@@ -12238,7 +12238,7 @@
         </p:nvSpPr>
         <p:spPr>
           <a:xfrm>
-            <a:off x="2221992" y="2569464"/>
+            <a:off x="2938272" y="2569464"/>
             <a:ext cx="1828800" cy="201168"/>
           </a:xfrm>
           <a:prstGeom prst="rect">
@@ -12263,7 +12263,7 @@
                 <a:ea typeface="Calibri" pitchFamily="34" charset="-122"/>
                 <a:cs typeface="Calibri" pitchFamily="34" charset="-120"/>
               </a:rPr>
-              <a:t>effort or labour</a:t>
+              <a:t>a structure that holds things</a:t>
             </a:r>
             <a:endParaRPr lang="en-US" sz="850" dirty="0"/>
           </a:p>
@@ -12277,7 +12277,7 @@
         </p:nvSpPr>
         <p:spPr>
           <a:xfrm>
-            <a:off x="4370832" y="2258568"/>
+            <a:off x="5803392" y="2258568"/>
             <a:ext cx="1828800" cy="292608"/>
           </a:xfrm>
           <a:prstGeom prst="rect">
@@ -12286,11 +12286,11 @@
             </a:avLst>
           </a:prstGeom>
           <a:solidFill>
-            <a:srgbClr val="FCE7F3"/>
+            <a:srgbClr val="CCFBF1"/>
           </a:solidFill>
           <a:ln w="19050">
             <a:solidFill>
-              <a:srgbClr val="DB2777"/>
+              <a:srgbClr val="0D9488"/>
             </a:solidFill>
             <a:prstDash val="solid"/>
           </a:ln>
@@ -12311,7 +12311,7 @@
         </p:nvSpPr>
         <p:spPr>
           <a:xfrm>
-            <a:off x="4370832" y="2258568"/>
+            <a:off x="5803392" y="2258568"/>
             <a:ext cx="1828800" cy="292608"/>
           </a:xfrm>
           <a:prstGeom prst="rect">
@@ -12330,13 +12330,13 @@
             <a:r>
               <a:rPr lang="en-US" sz="1300" b="1" dirty="0">
                 <a:solidFill>
-                  <a:srgbClr val="9D174D"/>
+                  <a:srgbClr val="0F766E"/>
                 </a:solidFill>
                 <a:latin typeface="Trebuchet MS" pitchFamily="34" charset="0"/>
                 <a:ea typeface="Trebuchet MS" pitchFamily="34" charset="-122"/>
                 <a:cs typeface="Trebuchet MS" pitchFamily="34" charset="-120"/>
               </a:rPr>
-              <a:t>er</a:t>
+              <a:t>work</a:t>
             </a:r>
             <a:endParaRPr lang="en-US" sz="1300" dirty="0"/>
           </a:p>
@@ -12350,7 +12350,7 @@
         </p:nvSpPr>
         <p:spPr>
           <a:xfrm>
-            <a:off x="4370832" y="2569464"/>
+            <a:off x="5803392" y="2569464"/>
             <a:ext cx="1828800" cy="201168"/>
           </a:xfrm>
           <a:prstGeom prst="rect">
@@ -12375,7 +12375,7 @@
                 <a:ea typeface="Calibri" pitchFamily="34" charset="-122"/>
                 <a:cs typeface="Calibri" pitchFamily="34" charset="-120"/>
               </a:rPr>
-              <a:t>person who does</a:t>
+              <a:t>to do or make effort</a:t>
             </a:r>
             <a:endParaRPr lang="en-US" sz="850" dirty="0"/>
           </a:p>
@@ -12389,30 +12389,23 @@
         </p:nvSpPr>
         <p:spPr>
           <a:xfrm>
-            <a:off x="6519672" y="2258568"/>
-            <a:ext cx="1828800" cy="292608"/>
+            <a:off x="365760" y="3273552"/>
+            <a:ext cx="1371600" cy="658368"/>
           </a:xfrm>
           <a:prstGeom prst="rect">
             <a:avLst>
-              <a:gd name="adj" fmla="val 25000"/>
+              <a:gd name="adj" fmla="val 8333"/>
             </a:avLst>
           </a:prstGeom>
           <a:solidFill>
-            <a:srgbClr val="FCE7F3"/>
-          </a:solidFill>
-          <a:ln w="19050">
-            <a:solidFill>
-              <a:srgbClr val="DB2777"/>
-            </a:solidFill>
-            <a:prstDash val="solid"/>
-          </a:ln>
-          <a:effectLst>
-            <a:outerShdw sx="100000" sy="100000" kx="0" ky="0" algn="bl" rotWithShape="0" blurRad="101600" dist="38100" dir="8100000">
-              <a:srgbClr val="000000">
-                <a:alpha val="12000"/>
-              </a:srgbClr>
-            </a:outerShdw>
-          </a:effectLst>
+            <a:srgbClr val="E2E8F0"/>
+          </a:solidFill>
+          <a:ln w="12700">
+            <a:solidFill>
+              <a:srgbClr val="E2E8F0"/>
+            </a:solidFill>
+            <a:prstDash val="solid"/>
+          </a:ln>
         </p:spPr>
       </p:sp>
       <p:sp>
@@ -12423,8 +12416,8 @@
         </p:nvSpPr>
         <p:spPr>
           <a:xfrm>
-            <a:off x="6519672" y="2258568"/>
-            <a:ext cx="1828800" cy="292608"/>
+            <a:off x="365760" y="3273552"/>
+            <a:ext cx="1371600" cy="658368"/>
           </a:xfrm>
           <a:prstGeom prst="rect">
             <a:avLst/>
@@ -12440,73 +12433,100 @@
               <a:buNone/>
             </a:pPr>
             <a:r>
-              <a:rPr lang="en-US" sz="1300" b="1" dirty="0">
-                <a:solidFill>
-                  <a:srgbClr val="9D174D"/>
+              <a:rPr lang="en-US" sz="1100" b="1" dirty="0">
+                <a:solidFill>
+                  <a:srgbClr val="475569"/>
                 </a:solidFill>
                 <a:latin typeface="Trebuchet MS" pitchFamily="34" charset="0"/>
                 <a:ea typeface="Trebuchet MS" pitchFamily="34" charset="-122"/>
                 <a:cs typeface="Trebuchet MS" pitchFamily="34" charset="-120"/>
               </a:rPr>
-              <a:t>s</a:t>
-            </a:r>
-            <a:endParaRPr lang="en-US" sz="1300" dirty="0"/>
-          </a:p>
-        </p:txBody>
-      </p:sp>
-      <p:sp>
-        <p:nvSpPr>
-          <p:cNvPr id="24" name="Text 22"/>
-          <p:cNvSpPr/>
-          <p:nvPr/>
-        </p:nvSpPr>
-        <p:spPr>
-          <a:xfrm>
-            <a:off x="6519672" y="2569464"/>
-            <a:ext cx="1828800" cy="201168"/>
-          </a:xfrm>
-          <a:prstGeom prst="rect">
-            <a:avLst/>
-          </a:prstGeom>
-          <a:noFill/>
-          <a:ln/>
-        </p:spPr>
-        <p:txBody>
-          <a:bodyPr wrap="square" lIns="0" tIns="0" rIns="0" bIns="0" rtlCol="0" anchor="t"/>
-          <a:lstStyle/>
-          <a:p>
-            <a:pPr algn="ctr" indent="0" marL="0">
-              <a:buNone/>
-            </a:pPr>
-            <a:r>
-              <a:rPr lang="en-US" sz="850" dirty="0">
-                <a:solidFill>
-                  <a:srgbClr val="475569"/>
+              <a:t>Syllables</a:t>
+            </a:r>
+            <a:endParaRPr lang="en-US" sz="1100" dirty="0"/>
+          </a:p>
+        </p:txBody>
+      </p:sp>
+      <p:sp>
+        <p:nvSpPr>
+          <p:cNvPr id="24" name="Shape 22"/>
+          <p:cNvSpPr/>
+          <p:nvPr/>
+        </p:nvSpPr>
+        <p:spPr>
+          <a:xfrm>
+            <a:off x="1874520" y="3273552"/>
+            <a:ext cx="6903720" cy="658368"/>
+          </a:xfrm>
+          <a:prstGeom prst="rect">
+            <a:avLst>
+              <a:gd name="adj" fmla="val 8333"/>
+            </a:avLst>
+          </a:prstGeom>
+          <a:solidFill>
+            <a:srgbClr val="F8FAFC"/>
+          </a:solidFill>
+          <a:ln w="12700">
+            <a:solidFill>
+              <a:srgbClr val="E2E8F0"/>
+            </a:solidFill>
+            <a:prstDash val="dash"/>
+          </a:ln>
+        </p:spPr>
+      </p:sp>
+      <p:sp>
+        <p:nvSpPr>
+          <p:cNvPr id="25" name="Text 23"/>
+          <p:cNvSpPr/>
+          <p:nvPr/>
+        </p:nvSpPr>
+        <p:spPr>
+          <a:xfrm>
+            <a:off x="1874520" y="3273552"/>
+            <a:ext cx="6903720" cy="658368"/>
+          </a:xfrm>
+          <a:prstGeom prst="rect">
+            <a:avLst/>
+          </a:prstGeom>
+          <a:noFill/>
+          <a:ln/>
+        </p:spPr>
+        <p:txBody>
+          <a:bodyPr wrap="square" rtlCol="0" anchor="ctr"/>
+          <a:lstStyle/>
+          <a:p>
+            <a:pPr algn="ctr" indent="0" marL="0">
+              <a:buNone/>
+            </a:pPr>
+            <a:r>
+              <a:rPr lang="en-US" sz="1100" i="1" dirty="0">
+                <a:solidFill>
+                  <a:srgbClr val="CBD5E1"/>
                 </a:solidFill>
                 <a:latin typeface="Calibri" pitchFamily="34" charset="0"/>
                 <a:ea typeface="Calibri" pitchFamily="34" charset="-122"/>
                 <a:cs typeface="Calibri" pitchFamily="34" charset="-120"/>
               </a:rPr>
-              <a:t>more than one</a:t>
-            </a:r>
-            <a:endParaRPr lang="en-US" sz="850" dirty="0"/>
-          </a:p>
-        </p:txBody>
-      </p:sp>
-      <p:sp>
-        <p:nvSpPr>
-          <p:cNvPr id="25" name="Shape 23"/>
-          <p:cNvSpPr/>
-          <p:nvPr/>
-        </p:nvSpPr>
-        <p:spPr>
-          <a:xfrm>
-            <a:off x="365760" y="3273552"/>
-            <a:ext cx="1371600" cy="658368"/>
+              <a:t>Write here...</a:t>
+            </a:r>
+            <a:endParaRPr lang="en-US" sz="1100" dirty="0"/>
+          </a:p>
+        </p:txBody>
+      </p:sp>
+      <p:sp>
+        <p:nvSpPr>
+          <p:cNvPr id="26" name="Shape 24"/>
+          <p:cNvSpPr/>
+          <p:nvPr/>
+        </p:nvSpPr>
+        <p:spPr>
+          <a:xfrm>
+            <a:off x="365760" y="4096512"/>
+            <a:ext cx="1371600" cy="804672"/>
           </a:xfrm>
           <a:prstGeom prst="rect">
             <a:avLst>
-              <a:gd name="adj" fmla="val 8333"/>
+              <a:gd name="adj" fmla="val 6818"/>
             </a:avLst>
           </a:prstGeom>
           <a:solidFill>
@@ -12522,14 +12542,14 @@
       </p:sp>
       <p:sp>
         <p:nvSpPr>
-          <p:cNvPr id="26" name="Text 24"/>
-          <p:cNvSpPr/>
-          <p:nvPr/>
-        </p:nvSpPr>
-        <p:spPr>
-          <a:xfrm>
-            <a:off x="365760" y="3273552"/>
-            <a:ext cx="1371600" cy="658368"/>
+          <p:cNvPr id="27" name="Text 25"/>
+          <p:cNvSpPr/>
+          <p:nvPr/>
+        </p:nvSpPr>
+        <p:spPr>
+          <a:xfrm>
+            <a:off x="365760" y="4096512"/>
+            <a:ext cx="1371600" cy="804672"/>
           </a:xfrm>
           <a:prstGeom prst="rect">
             <a:avLst/>
@@ -12553,7 +12573,7 @@
                 <a:ea typeface="Trebuchet MS" pitchFamily="34" charset="-122"/>
                 <a:cs typeface="Trebuchet MS" pitchFamily="34" charset="-120"/>
               </a:rPr>
-              <a:t>Syllables</a:t>
+              <a:t>Phonemes</a:t>
             </a:r>
             <a:endParaRPr lang="en-US" sz="1100" dirty="0"/>
           </a:p>
@@ -12561,80 +12581,14 @@
       </p:sp>
       <p:sp>
         <p:nvSpPr>
-          <p:cNvPr id="27" name="Shape 25"/>
-          <p:cNvSpPr/>
-          <p:nvPr/>
-        </p:nvSpPr>
-        <p:spPr>
-          <a:xfrm>
-            <a:off x="1874520" y="3273552"/>
-            <a:ext cx="6903720" cy="658368"/>
-          </a:xfrm>
-          <a:prstGeom prst="rect">
-            <a:avLst>
-              <a:gd name="adj" fmla="val 8333"/>
-            </a:avLst>
-          </a:prstGeom>
-          <a:solidFill>
-            <a:srgbClr val="F8FAFC"/>
-          </a:solidFill>
-          <a:ln w="12700">
-            <a:solidFill>
-              <a:srgbClr val="E2E8F0"/>
-            </a:solidFill>
-            <a:prstDash val="dash"/>
-          </a:ln>
-        </p:spPr>
-      </p:sp>
-      <p:sp>
-        <p:nvSpPr>
-          <p:cNvPr id="28" name="Text 26"/>
-          <p:cNvSpPr/>
-          <p:nvPr/>
-        </p:nvSpPr>
-        <p:spPr>
-          <a:xfrm>
-            <a:off x="1874520" y="3273552"/>
-            <a:ext cx="6903720" cy="658368"/>
-          </a:xfrm>
-          <a:prstGeom prst="rect">
-            <a:avLst/>
-          </a:prstGeom>
-          <a:noFill/>
-          <a:ln/>
-        </p:spPr>
-        <p:txBody>
-          <a:bodyPr wrap="square" rtlCol="0" anchor="ctr"/>
-          <a:lstStyle/>
-          <a:p>
-            <a:pPr algn="ctr" indent="0" marL="0">
-              <a:buNone/>
-            </a:pPr>
-            <a:r>
-              <a:rPr lang="en-US" sz="1100" i="1" dirty="0">
-                <a:solidFill>
-                  <a:srgbClr val="CBD5E1"/>
-                </a:solidFill>
-                <a:latin typeface="Calibri" pitchFamily="34" charset="0"/>
-                <a:ea typeface="Calibri" pitchFamily="34" charset="-122"/>
-                <a:cs typeface="Calibri" pitchFamily="34" charset="-120"/>
-              </a:rPr>
-              <a:t>Write here...</a:t>
-            </a:r>
-            <a:endParaRPr lang="en-US" sz="1100" dirty="0"/>
-          </a:p>
-        </p:txBody>
-      </p:sp>
-      <p:sp>
-        <p:nvSpPr>
-          <p:cNvPr id="29" name="Shape 27"/>
-          <p:cNvSpPr/>
-          <p:nvPr/>
-        </p:nvSpPr>
-        <p:spPr>
-          <a:xfrm>
-            <a:off x="365760" y="4096512"/>
-            <a:ext cx="1371600" cy="804672"/>
+          <p:cNvPr id="28" name="Shape 26"/>
+          <p:cNvSpPr/>
+          <p:nvPr/>
+        </p:nvSpPr>
+        <p:spPr>
+          <a:xfrm>
+            <a:off x="1874520" y="4096512"/>
+            <a:ext cx="6903720" cy="804672"/>
           </a:xfrm>
           <a:prstGeom prst="rect">
             <a:avLst>
@@ -12642,85 +12596,19 @@
             </a:avLst>
           </a:prstGeom>
           <a:solidFill>
-            <a:srgbClr val="E2E8F0"/>
+            <a:srgbClr val="F8FAFC"/>
           </a:solidFill>
           <a:ln w="12700">
             <a:solidFill>
               <a:srgbClr val="E2E8F0"/>
             </a:solidFill>
-            <a:prstDash val="solid"/>
-          </a:ln>
-        </p:spPr>
-      </p:sp>
-      <p:sp>
-        <p:nvSpPr>
-          <p:cNvPr id="30" name="Text 28"/>
-          <p:cNvSpPr/>
-          <p:nvPr/>
-        </p:nvSpPr>
-        <p:spPr>
-          <a:xfrm>
-            <a:off x="365760" y="4096512"/>
-            <a:ext cx="1371600" cy="804672"/>
-          </a:xfrm>
-          <a:prstGeom prst="rect">
-            <a:avLst/>
-          </a:prstGeom>
-          <a:noFill/>
-          <a:ln/>
-        </p:spPr>
-        <p:txBody>
-          <a:bodyPr wrap="square" lIns="0" tIns="0" rIns="0" bIns="0" rtlCol="0" anchor="ctr"/>
-          <a:lstStyle/>
-          <a:p>
-            <a:pPr algn="ctr" indent="0" marL="0">
-              <a:buNone/>
-            </a:pPr>
-            <a:r>
-              <a:rPr lang="en-US" sz="1100" b="1" dirty="0">
-                <a:solidFill>
-                  <a:srgbClr val="475569"/>
-                </a:solidFill>
-                <a:latin typeface="Trebuchet MS" pitchFamily="34" charset="0"/>
-                <a:ea typeface="Trebuchet MS" pitchFamily="34" charset="-122"/>
-                <a:cs typeface="Trebuchet MS" pitchFamily="34" charset="-120"/>
-              </a:rPr>
-              <a:t>Phonemes</a:t>
-            </a:r>
-            <a:endParaRPr lang="en-US" sz="1100" dirty="0"/>
-          </a:p>
-        </p:txBody>
-      </p:sp>
-      <p:sp>
-        <p:nvSpPr>
-          <p:cNvPr id="31" name="Shape 29"/>
-          <p:cNvSpPr/>
-          <p:nvPr/>
-        </p:nvSpPr>
-        <p:spPr>
-          <a:xfrm>
-            <a:off x="1874520" y="4096512"/>
-            <a:ext cx="6903720" cy="804672"/>
-          </a:xfrm>
-          <a:prstGeom prst="rect">
-            <a:avLst>
-              <a:gd name="adj" fmla="val 6818"/>
-            </a:avLst>
-          </a:prstGeom>
-          <a:solidFill>
-            <a:srgbClr val="F8FAFC"/>
-          </a:solidFill>
-          <a:ln w="12700">
-            <a:solidFill>
-              <a:srgbClr val="E2E8F0"/>
-            </a:solidFill>
             <a:prstDash val="dash"/>
           </a:ln>
         </p:spPr>
       </p:sp>
       <p:sp>
         <p:nvSpPr>
-          <p:cNvPr id="32" name="Text 30"/>
+          <p:cNvPr id="29" name="Text 27"/>
           <p:cNvSpPr/>
           <p:nvPr/>
         </p:nvSpPr>
@@ -13043,7 +12931,7 @@
                 <a:ea typeface="Calibri" pitchFamily="34" charset="-122"/>
                 <a:cs typeface="Calibri" pitchFamily="34" charset="-120"/>
               </a:rPr>
-              <a:t>Word Labs  •  wordlabs.app  •  Root: 'work' = to do effort or labour</a:t>
+              <a:t>Word Labs  •  wordlabs.app  •  Root: 'work' = to do or make effort</a:t>
             </a:r>
             <a:endParaRPr lang="en-US" sz="800" dirty="0"/>
           </a:p>
@@ -13182,7 +13070,7 @@
                 <a:ea typeface="Trebuchet MS" pitchFamily="34" charset="-122"/>
                 <a:cs typeface="Trebuchet MS" pitchFamily="34" charset="-120"/>
               </a:rPr>
-              <a:t>workers</a:t>
+              <a:t>framework</a:t>
             </a:r>
             <a:endParaRPr lang="en-US" sz="2800" dirty="0"/>
           </a:p>
@@ -13262,7 +13150,7 @@
         </p:nvSpPr>
         <p:spPr>
           <a:xfrm>
-            <a:off x="2221992" y="2258568"/>
+            <a:off x="2938272" y="2258568"/>
             <a:ext cx="1828800" cy="292608"/>
           </a:xfrm>
           <a:prstGeom prst="rect">
@@ -13271,11 +13159,11 @@
             </a:avLst>
           </a:prstGeom>
           <a:solidFill>
-            <a:srgbClr val="CCFBF1"/>
+            <a:srgbClr val="DDD6FE"/>
           </a:solidFill>
           <a:ln w="19050">
             <a:solidFill>
-              <a:srgbClr val="0D9488"/>
+              <a:srgbClr val="7C3AED"/>
             </a:solidFill>
             <a:prstDash val="solid"/>
           </a:ln>
@@ -13296,7 +13184,7 @@
         </p:nvSpPr>
         <p:spPr>
           <a:xfrm>
-            <a:off x="2221992" y="2258568"/>
+            <a:off x="2938272" y="2258568"/>
             <a:ext cx="1828800" cy="292608"/>
           </a:xfrm>
           <a:prstGeom prst="rect">
@@ -13315,13 +13203,13 @@
             <a:r>
               <a:rPr lang="en-US" sz="1300" b="1" dirty="0">
                 <a:solidFill>
-                  <a:srgbClr val="0F766E"/>
+                  <a:srgbClr val="4C1D95"/>
                 </a:solidFill>
                 <a:latin typeface="Trebuchet MS" pitchFamily="34" charset="0"/>
                 <a:ea typeface="Trebuchet MS" pitchFamily="34" charset="-122"/>
                 <a:cs typeface="Trebuchet MS" pitchFamily="34" charset="-120"/>
               </a:rPr>
-              <a:t>work</a:t>
+              <a:t>frame</a:t>
             </a:r>
             <a:endParaRPr lang="en-US" sz="1300" dirty="0"/>
           </a:p>
@@ -13335,7 +13223,7 @@
         </p:nvSpPr>
         <p:spPr>
           <a:xfrm>
-            <a:off x="2221992" y="2569464"/>
+            <a:off x="2938272" y="2569464"/>
             <a:ext cx="1828800" cy="201168"/>
           </a:xfrm>
           <a:prstGeom prst="rect">
@@ -13360,7 +13248,7 @@
                 <a:ea typeface="Calibri" pitchFamily="34" charset="-122"/>
                 <a:cs typeface="Calibri" pitchFamily="34" charset="-120"/>
               </a:rPr>
-              <a:t>effort or labour</a:t>
+              <a:t>a structure that holds things</a:t>
             </a:r>
             <a:endParaRPr lang="en-US" sz="850" dirty="0"/>
           </a:p>
@@ -13374,7 +13262,7 @@
         </p:nvSpPr>
         <p:spPr>
           <a:xfrm>
-            <a:off x="4370832" y="2258568"/>
+            <a:off x="5803392" y="2258568"/>
             <a:ext cx="1828800" cy="292608"/>
           </a:xfrm>
           <a:prstGeom prst="rect">
@@ -13383,11 +13271,11 @@
             </a:avLst>
           </a:prstGeom>
           <a:solidFill>
-            <a:srgbClr val="FCE7F3"/>
+            <a:srgbClr val="CCFBF1"/>
           </a:solidFill>
           <a:ln w="19050">
             <a:solidFill>
-              <a:srgbClr val="DB2777"/>
+              <a:srgbClr val="0D9488"/>
             </a:solidFill>
             <a:prstDash val="solid"/>
           </a:ln>
@@ -13408,7 +13296,7 @@
         </p:nvSpPr>
         <p:spPr>
           <a:xfrm>
-            <a:off x="4370832" y="2258568"/>
+            <a:off x="5803392" y="2258568"/>
             <a:ext cx="1828800" cy="292608"/>
           </a:xfrm>
           <a:prstGeom prst="rect">
@@ -13427,13 +13315,13 @@
             <a:r>
               <a:rPr lang="en-US" sz="1300" b="1" dirty="0">
                 <a:solidFill>
-                  <a:srgbClr val="9D174D"/>
+                  <a:srgbClr val="0F766E"/>
                 </a:solidFill>
                 <a:latin typeface="Trebuchet MS" pitchFamily="34" charset="0"/>
                 <a:ea typeface="Trebuchet MS" pitchFamily="34" charset="-122"/>
                 <a:cs typeface="Trebuchet MS" pitchFamily="34" charset="-120"/>
               </a:rPr>
-              <a:t>er</a:t>
+              <a:t>work</a:t>
             </a:r>
             <a:endParaRPr lang="en-US" sz="1300" dirty="0"/>
           </a:p>
@@ -13447,7 +13335,7 @@
         </p:nvSpPr>
         <p:spPr>
           <a:xfrm>
-            <a:off x="4370832" y="2569464"/>
+            <a:off x="5803392" y="2569464"/>
             <a:ext cx="1828800" cy="201168"/>
           </a:xfrm>
           <a:prstGeom prst="rect">
@@ -13472,7 +13360,7 @@
                 <a:ea typeface="Calibri" pitchFamily="34" charset="-122"/>
                 <a:cs typeface="Calibri" pitchFamily="34" charset="-120"/>
               </a:rPr>
-              <a:t>person who does</a:t>
+              <a:t>to do or make effort</a:t>
             </a:r>
             <a:endParaRPr lang="en-US" sz="850" dirty="0"/>
           </a:p>
@@ -13486,30 +13374,23 @@
         </p:nvSpPr>
         <p:spPr>
           <a:xfrm>
-            <a:off x="6519672" y="2258568"/>
-            <a:ext cx="1828800" cy="292608"/>
+            <a:off x="365760" y="3273552"/>
+            <a:ext cx="1371600" cy="658368"/>
           </a:xfrm>
           <a:prstGeom prst="rect">
             <a:avLst>
-              <a:gd name="adj" fmla="val 25000"/>
+              <a:gd name="adj" fmla="val 8333"/>
             </a:avLst>
           </a:prstGeom>
           <a:solidFill>
-            <a:srgbClr val="FCE7F3"/>
-          </a:solidFill>
-          <a:ln w="19050">
-            <a:solidFill>
-              <a:srgbClr val="DB2777"/>
-            </a:solidFill>
-            <a:prstDash val="solid"/>
-          </a:ln>
-          <a:effectLst>
-            <a:outerShdw sx="100000" sy="100000" kx="0" ky="0" algn="bl" rotWithShape="0" blurRad="101600" dist="38100" dir="8100000">
-              <a:srgbClr val="000000">
-                <a:alpha val="12000"/>
-              </a:srgbClr>
-            </a:outerShdw>
-          </a:effectLst>
+            <a:srgbClr val="E2E8F0"/>
+          </a:solidFill>
+          <a:ln w="12700">
+            <a:solidFill>
+              <a:srgbClr val="E2E8F0"/>
+            </a:solidFill>
+            <a:prstDash val="solid"/>
+          </a:ln>
         </p:spPr>
       </p:sp>
       <p:sp>
@@ -13520,8 +13401,8 @@
         </p:nvSpPr>
         <p:spPr>
           <a:xfrm>
-            <a:off x="6519672" y="2258568"/>
-            <a:ext cx="1828800" cy="292608"/>
+            <a:off x="365760" y="3273552"/>
+            <a:ext cx="1371600" cy="658368"/>
           </a:xfrm>
           <a:prstGeom prst="rect">
             <a:avLst/>
@@ -13537,69 +13418,30 @@
               <a:buNone/>
             </a:pPr>
             <a:r>
-              <a:rPr lang="en-US" sz="1300" b="1" dirty="0">
-                <a:solidFill>
-                  <a:srgbClr val="9D174D"/>
+              <a:rPr lang="en-US" sz="1100" b="1" dirty="0">
+                <a:solidFill>
+                  <a:srgbClr val="475569"/>
                 </a:solidFill>
                 <a:latin typeface="Trebuchet MS" pitchFamily="34" charset="0"/>
                 <a:ea typeface="Trebuchet MS" pitchFamily="34" charset="-122"/>
                 <a:cs typeface="Trebuchet MS" pitchFamily="34" charset="-120"/>
               </a:rPr>
-              <a:t>s</a:t>
-            </a:r>
-            <a:endParaRPr lang="en-US" sz="1300" dirty="0"/>
-          </a:p>
-        </p:txBody>
-      </p:sp>
-      <p:sp>
-        <p:nvSpPr>
-          <p:cNvPr id="24" name="Text 22"/>
-          <p:cNvSpPr/>
-          <p:nvPr/>
-        </p:nvSpPr>
-        <p:spPr>
-          <a:xfrm>
-            <a:off x="6519672" y="2569464"/>
-            <a:ext cx="1828800" cy="201168"/>
-          </a:xfrm>
-          <a:prstGeom prst="rect">
-            <a:avLst/>
-          </a:prstGeom>
-          <a:noFill/>
-          <a:ln/>
-        </p:spPr>
-        <p:txBody>
-          <a:bodyPr wrap="square" lIns="0" tIns="0" rIns="0" bIns="0" rtlCol="0" anchor="t"/>
-          <a:lstStyle/>
-          <a:p>
-            <a:pPr algn="ctr" indent="0" marL="0">
-              <a:buNone/>
-            </a:pPr>
-            <a:r>
-              <a:rPr lang="en-US" sz="850" dirty="0">
-                <a:solidFill>
-                  <a:srgbClr val="475569"/>
-                </a:solidFill>
-                <a:latin typeface="Calibri" pitchFamily="34" charset="0"/>
-                <a:ea typeface="Calibri" pitchFamily="34" charset="-122"/>
-                <a:cs typeface="Calibri" pitchFamily="34" charset="-120"/>
-              </a:rPr>
-              <a:t>more than one</a:t>
-            </a:r>
-            <a:endParaRPr lang="en-US" sz="850" dirty="0"/>
-          </a:p>
-        </p:txBody>
-      </p:sp>
-      <p:sp>
-        <p:nvSpPr>
-          <p:cNvPr id="25" name="Shape 23"/>
-          <p:cNvSpPr/>
-          <p:nvPr/>
-        </p:nvSpPr>
-        <p:spPr>
-          <a:xfrm>
-            <a:off x="365760" y="3273552"/>
-            <a:ext cx="1371600" cy="658368"/>
+              <a:t>Syllables</a:t>
+            </a:r>
+            <a:endParaRPr lang="en-US" sz="1100" dirty="0"/>
+          </a:p>
+        </p:txBody>
+      </p:sp>
+      <p:sp>
+        <p:nvSpPr>
+          <p:cNvPr id="24" name="Shape 22"/>
+          <p:cNvSpPr/>
+          <p:nvPr/>
+        </p:nvSpPr>
+        <p:spPr>
+          <a:xfrm>
+            <a:off x="1874520" y="3273552"/>
+            <a:ext cx="6903720" cy="658368"/>
           </a:xfrm>
           <a:prstGeom prst="rect">
             <a:avLst>
@@ -13607,11 +13449,38 @@
             </a:avLst>
           </a:prstGeom>
           <a:solidFill>
-            <a:srgbClr val="E2E8F0"/>
-          </a:solidFill>
-          <a:ln w="12700">
-            <a:solidFill>
-              <a:srgbClr val="E2E8F0"/>
+            <a:srgbClr val="CCFBF1"/>
+          </a:solidFill>
+          <a:ln w="12700">
+            <a:solidFill>
+              <a:srgbClr val="0D9488"/>
+            </a:solidFill>
+            <a:prstDash val="solid"/>
+          </a:ln>
+        </p:spPr>
+      </p:sp>
+      <p:sp>
+        <p:nvSpPr>
+          <p:cNvPr id="25" name="Shape 23"/>
+          <p:cNvSpPr/>
+          <p:nvPr/>
+        </p:nvSpPr>
+        <p:spPr>
+          <a:xfrm>
+            <a:off x="2999232" y="3364992"/>
+            <a:ext cx="1645920" cy="475488"/>
+          </a:xfrm>
+          <a:prstGeom prst="rect">
+            <a:avLst>
+              <a:gd name="adj" fmla="val 9615"/>
+            </a:avLst>
+          </a:prstGeom>
+          <a:solidFill>
+            <a:srgbClr val="FFFFFF"/>
+          </a:solidFill>
+          <a:ln w="12700">
+            <a:solidFill>
+              <a:srgbClr val="0D9488"/>
             </a:solidFill>
             <a:prstDash val="solid"/>
           </a:ln>
@@ -13625,8 +13494,8 @@
         </p:nvSpPr>
         <p:spPr>
           <a:xfrm>
-            <a:off x="365760" y="3273552"/>
-            <a:ext cx="1371600" cy="658368"/>
+            <a:off x="2999232" y="3364992"/>
+            <a:ext cx="1645920" cy="475488"/>
           </a:xfrm>
           <a:prstGeom prst="rect">
             <a:avLst/>
@@ -13642,46 +13511,58 @@
               <a:buNone/>
             </a:pPr>
             <a:r>
-              <a:rPr lang="en-US" sz="1100" b="1" dirty="0">
-                <a:solidFill>
-                  <a:srgbClr val="475569"/>
+              <a:rPr lang="en-US" sz="1400" b="1" dirty="0">
+                <a:solidFill>
+                  <a:srgbClr val="0D9488"/>
                 </a:solidFill>
                 <a:latin typeface="Trebuchet MS" pitchFamily="34" charset="0"/>
                 <a:ea typeface="Trebuchet MS" pitchFamily="34" charset="-122"/>
                 <a:cs typeface="Trebuchet MS" pitchFamily="34" charset="-120"/>
               </a:rPr>
-              <a:t>Syllables</a:t>
-            </a:r>
-            <a:endParaRPr lang="en-US" sz="1100" dirty="0"/>
-          </a:p>
-        </p:txBody>
-      </p:sp>
-      <p:sp>
-        <p:nvSpPr>
-          <p:cNvPr id="27" name="Shape 25"/>
-          <p:cNvSpPr/>
-          <p:nvPr/>
-        </p:nvSpPr>
-        <p:spPr>
-          <a:xfrm>
-            <a:off x="1874520" y="3273552"/>
-            <a:ext cx="6903720" cy="658368"/>
-          </a:xfrm>
-          <a:prstGeom prst="rect">
-            <a:avLst>
-              <a:gd name="adj" fmla="val 8333"/>
-            </a:avLst>
-          </a:prstGeom>
-          <a:solidFill>
-            <a:srgbClr val="CCFBF1"/>
-          </a:solidFill>
-          <a:ln w="12700">
-            <a:solidFill>
-              <a:srgbClr val="0D9488"/>
-            </a:solidFill>
-            <a:prstDash val="solid"/>
-          </a:ln>
-        </p:spPr>
+              <a:t>frame</a:t>
+            </a:r>
+            <a:endParaRPr lang="en-US" sz="1400" dirty="0"/>
+          </a:p>
+        </p:txBody>
+      </p:sp>
+      <p:sp>
+        <p:nvSpPr>
+          <p:cNvPr id="27" name="Text 25"/>
+          <p:cNvSpPr/>
+          <p:nvPr/>
+        </p:nvSpPr>
+        <p:spPr>
+          <a:xfrm>
+            <a:off x="4645152" y="3364992"/>
+            <a:ext cx="1097280" cy="475488"/>
+          </a:xfrm>
+          <a:prstGeom prst="rect">
+            <a:avLst/>
+          </a:prstGeom>
+          <a:noFill/>
+          <a:ln/>
+        </p:spPr>
+        <p:txBody>
+          <a:bodyPr wrap="square" lIns="0" tIns="0" rIns="0" bIns="0" rtlCol="0" anchor="ctr"/>
+          <a:lstStyle/>
+          <a:p>
+            <a:pPr algn="ctr" indent="0" marL="0">
+              <a:buNone/>
+            </a:pPr>
+            <a:r>
+              <a:rPr lang="en-US" sz="1600" b="1" dirty="0">
+                <a:solidFill>
+                  <a:srgbClr val="0D9488"/>
+                </a:solidFill>
+                <a:latin typeface="Trebuchet MS" pitchFamily="34" charset="0"/>
+                <a:ea typeface="Trebuchet MS" pitchFamily="34" charset="-122"/>
+                <a:cs typeface="Trebuchet MS" pitchFamily="34" charset="-120"/>
+              </a:rPr>
+              <a:t>·</a:t>
+            </a:r>
+            <a:endParaRPr lang="en-US" sz="1600" dirty="0"/>
+          </a:p>
+        </p:txBody>
       </p:sp>
       <p:sp>
         <p:nvSpPr>
@@ -13691,7 +13572,7 @@
         </p:nvSpPr>
         <p:spPr>
           <a:xfrm>
-            <a:off x="2999232" y="3364992"/>
+            <a:off x="5742432" y="3364992"/>
             <a:ext cx="1645920" cy="475488"/>
           </a:xfrm>
           <a:prstGeom prst="rect">
@@ -13718,7 +13599,7 @@
         </p:nvSpPr>
         <p:spPr>
           <a:xfrm>
-            <a:off x="2999232" y="3364992"/>
+            <a:off x="5742432" y="3364992"/>
             <a:ext cx="1645920" cy="475488"/>
           </a:xfrm>
           <a:prstGeom prst="rect">
@@ -13751,14 +13632,41 @@
       </p:sp>
       <p:sp>
         <p:nvSpPr>
-          <p:cNvPr id="30" name="Text 28"/>
-          <p:cNvSpPr/>
-          <p:nvPr/>
-        </p:nvSpPr>
-        <p:spPr>
-          <a:xfrm>
-            <a:off x="4645152" y="3364992"/>
-            <a:ext cx="1097280" cy="475488"/>
+          <p:cNvPr id="30" name="Shape 28"/>
+          <p:cNvSpPr/>
+          <p:nvPr/>
+        </p:nvSpPr>
+        <p:spPr>
+          <a:xfrm>
+            <a:off x="365760" y="4096512"/>
+            <a:ext cx="1371600" cy="804672"/>
+          </a:xfrm>
+          <a:prstGeom prst="rect">
+            <a:avLst>
+              <a:gd name="adj" fmla="val 6818"/>
+            </a:avLst>
+          </a:prstGeom>
+          <a:solidFill>
+            <a:srgbClr val="E2E8F0"/>
+          </a:solidFill>
+          <a:ln w="12700">
+            <a:solidFill>
+              <a:srgbClr val="E2E8F0"/>
+            </a:solidFill>
+            <a:prstDash val="solid"/>
+          </a:ln>
+        </p:spPr>
+      </p:sp>
+      <p:sp>
+        <p:nvSpPr>
+          <p:cNvPr id="31" name="Text 29"/>
+          <p:cNvSpPr/>
+          <p:nvPr/>
+        </p:nvSpPr>
+        <p:spPr>
+          <a:xfrm>
+            <a:off x="365760" y="4096512"/>
+            <a:ext cx="1371600" cy="804672"/>
           </a:xfrm>
           <a:prstGeom prst="rect">
             <a:avLst/>
@@ -13774,96 +13682,30 @@
               <a:buNone/>
             </a:pPr>
             <a:r>
-              <a:rPr lang="en-US" sz="1600" b="1" dirty="0">
-                <a:solidFill>
-                  <a:srgbClr val="0D9488"/>
+              <a:rPr lang="en-US" sz="1100" b="1" dirty="0">
+                <a:solidFill>
+                  <a:srgbClr val="475569"/>
                 </a:solidFill>
                 <a:latin typeface="Trebuchet MS" pitchFamily="34" charset="0"/>
                 <a:ea typeface="Trebuchet MS" pitchFamily="34" charset="-122"/>
                 <a:cs typeface="Trebuchet MS" pitchFamily="34" charset="-120"/>
               </a:rPr>
-              <a:t>·</a:t>
-            </a:r>
-            <a:endParaRPr lang="en-US" sz="1600" dirty="0"/>
-          </a:p>
-        </p:txBody>
-      </p:sp>
-      <p:sp>
-        <p:nvSpPr>
-          <p:cNvPr id="31" name="Shape 29"/>
-          <p:cNvSpPr/>
-          <p:nvPr/>
-        </p:nvSpPr>
-        <p:spPr>
-          <a:xfrm>
-            <a:off x="5742432" y="3364992"/>
-            <a:ext cx="1645920" cy="475488"/>
-          </a:xfrm>
-          <a:prstGeom prst="rect">
-            <a:avLst>
-              <a:gd name="adj" fmla="val 9615"/>
-            </a:avLst>
-          </a:prstGeom>
-          <a:solidFill>
-            <a:srgbClr val="FFFFFF"/>
-          </a:solidFill>
-          <a:ln w="12700">
-            <a:solidFill>
-              <a:srgbClr val="0D9488"/>
-            </a:solidFill>
-            <a:prstDash val="solid"/>
-          </a:ln>
-        </p:spPr>
-      </p:sp>
-      <p:sp>
-        <p:nvSpPr>
-          <p:cNvPr id="32" name="Text 30"/>
-          <p:cNvSpPr/>
-          <p:nvPr/>
-        </p:nvSpPr>
-        <p:spPr>
-          <a:xfrm>
-            <a:off x="5742432" y="3364992"/>
-            <a:ext cx="1645920" cy="475488"/>
-          </a:xfrm>
-          <a:prstGeom prst="rect">
-            <a:avLst/>
-          </a:prstGeom>
-          <a:noFill/>
-          <a:ln/>
-        </p:spPr>
-        <p:txBody>
-          <a:bodyPr wrap="square" lIns="0" tIns="0" rIns="0" bIns="0" rtlCol="0" anchor="ctr"/>
-          <a:lstStyle/>
-          <a:p>
-            <a:pPr algn="ctr" indent="0" marL="0">
-              <a:buNone/>
-            </a:pPr>
-            <a:r>
-              <a:rPr lang="en-US" sz="1400" b="1" dirty="0">
-                <a:solidFill>
-                  <a:srgbClr val="0D9488"/>
-                </a:solidFill>
-                <a:latin typeface="Trebuchet MS" pitchFamily="34" charset="0"/>
-                <a:ea typeface="Trebuchet MS" pitchFamily="34" charset="-122"/>
-                <a:cs typeface="Trebuchet MS" pitchFamily="34" charset="-120"/>
-              </a:rPr>
-              <a:t>ers</a:t>
-            </a:r>
-            <a:endParaRPr lang="en-US" sz="1400" dirty="0"/>
-          </a:p>
-        </p:txBody>
-      </p:sp>
-      <p:sp>
-        <p:nvSpPr>
-          <p:cNvPr id="33" name="Shape 31"/>
-          <p:cNvSpPr/>
-          <p:nvPr/>
-        </p:nvSpPr>
-        <p:spPr>
-          <a:xfrm>
-            <a:off x="365760" y="4096512"/>
-            <a:ext cx="1371600" cy="804672"/>
+              <a:t>Phonemes</a:t>
+            </a:r>
+            <a:endParaRPr lang="en-US" sz="1100" dirty="0"/>
+          </a:p>
+        </p:txBody>
+      </p:sp>
+      <p:sp>
+        <p:nvSpPr>
+          <p:cNvPr id="32" name="Shape 30"/>
+          <p:cNvSpPr/>
+          <p:nvPr/>
+        </p:nvSpPr>
+        <p:spPr>
+          <a:xfrm>
+            <a:off x="1874520" y="4096512"/>
+            <a:ext cx="6903720" cy="804672"/>
           </a:xfrm>
           <a:prstGeom prst="rect">
             <a:avLst>
@@ -13871,85 +13713,19 @@
             </a:avLst>
           </a:prstGeom>
           <a:solidFill>
-            <a:srgbClr val="E2E8F0"/>
+            <a:srgbClr val="F8FAFC"/>
           </a:solidFill>
           <a:ln w="12700">
             <a:solidFill>
               <a:srgbClr val="E2E8F0"/>
             </a:solidFill>
-            <a:prstDash val="solid"/>
-          </a:ln>
-        </p:spPr>
-      </p:sp>
-      <p:sp>
-        <p:nvSpPr>
-          <p:cNvPr id="34" name="Text 32"/>
-          <p:cNvSpPr/>
-          <p:nvPr/>
-        </p:nvSpPr>
-        <p:spPr>
-          <a:xfrm>
-            <a:off x="365760" y="4096512"/>
-            <a:ext cx="1371600" cy="804672"/>
-          </a:xfrm>
-          <a:prstGeom prst="rect">
-            <a:avLst/>
-          </a:prstGeom>
-          <a:noFill/>
-          <a:ln/>
-        </p:spPr>
-        <p:txBody>
-          <a:bodyPr wrap="square" lIns="0" tIns="0" rIns="0" bIns="0" rtlCol="0" anchor="ctr"/>
-          <a:lstStyle/>
-          <a:p>
-            <a:pPr algn="ctr" indent="0" marL="0">
-              <a:buNone/>
-            </a:pPr>
-            <a:r>
-              <a:rPr lang="en-US" sz="1100" b="1" dirty="0">
-                <a:solidFill>
-                  <a:srgbClr val="475569"/>
-                </a:solidFill>
-                <a:latin typeface="Trebuchet MS" pitchFamily="34" charset="0"/>
-                <a:ea typeface="Trebuchet MS" pitchFamily="34" charset="-122"/>
-                <a:cs typeface="Trebuchet MS" pitchFamily="34" charset="-120"/>
-              </a:rPr>
-              <a:t>Phonemes</a:t>
-            </a:r>
-            <a:endParaRPr lang="en-US" sz="1100" dirty="0"/>
-          </a:p>
-        </p:txBody>
-      </p:sp>
-      <p:sp>
-        <p:nvSpPr>
-          <p:cNvPr id="35" name="Shape 33"/>
-          <p:cNvSpPr/>
-          <p:nvPr/>
-        </p:nvSpPr>
-        <p:spPr>
-          <a:xfrm>
-            <a:off x="1874520" y="4096512"/>
-            <a:ext cx="6903720" cy="804672"/>
-          </a:xfrm>
-          <a:prstGeom prst="rect">
-            <a:avLst>
-              <a:gd name="adj" fmla="val 6818"/>
-            </a:avLst>
-          </a:prstGeom>
-          <a:solidFill>
-            <a:srgbClr val="F8FAFC"/>
-          </a:solidFill>
-          <a:ln w="12700">
-            <a:solidFill>
-              <a:srgbClr val="E2E8F0"/>
-            </a:solidFill>
             <a:prstDash val="dash"/>
           </a:ln>
         </p:spPr>
       </p:sp>
       <p:sp>
         <p:nvSpPr>
-          <p:cNvPr id="36" name="Text 34"/>
+          <p:cNvPr id="33" name="Text 31"/>
           <p:cNvSpPr/>
           <p:nvPr/>
         </p:nvSpPr>
@@ -14181,7 +13957,7 @@
                 <a:ea typeface="Calibri" pitchFamily="34" charset="-122"/>
                 <a:cs typeface="Calibri" pitchFamily="34" charset="-120"/>
               </a:rPr>
-              <a:t>Root 'work' — to do effort or labour</a:t>
+              <a:t>Root 'work' — to do or make effort</a:t>
             </a:r>
             <a:endParaRPr lang="en-US" sz="1600" dirty="0"/>
           </a:p>
@@ -14537,7 +14313,7 @@
                 <a:ea typeface="Calibri" pitchFamily="34" charset="-122"/>
                 <a:cs typeface="Calibri" pitchFamily="34" charset="-120"/>
               </a:rPr>
-              <a:t>Word Labs  •  wordlabs.app  •  Root: 'work' = to do effort or labour</a:t>
+              <a:t>Word Labs  •  wordlabs.app  •  Root: 'work' = to do or make effort</a:t>
             </a:r>
             <a:endParaRPr lang="en-US" sz="800" dirty="0"/>
           </a:p>
@@ -14676,7 +14452,7 @@
                 <a:ea typeface="Trebuchet MS" pitchFamily="34" charset="-122"/>
                 <a:cs typeface="Trebuchet MS" pitchFamily="34" charset="-120"/>
               </a:rPr>
-              <a:t>workers</a:t>
+              <a:t>framework</a:t>
             </a:r>
             <a:endParaRPr lang="en-US" sz="2800" dirty="0"/>
           </a:p>
@@ -14756,7 +14532,7 @@
         </p:nvSpPr>
         <p:spPr>
           <a:xfrm>
-            <a:off x="2221992" y="2258568"/>
+            <a:off x="2938272" y="2258568"/>
             <a:ext cx="1828800" cy="292608"/>
           </a:xfrm>
           <a:prstGeom prst="rect">
@@ -14765,11 +14541,11 @@
             </a:avLst>
           </a:prstGeom>
           <a:solidFill>
-            <a:srgbClr val="CCFBF1"/>
+            <a:srgbClr val="DDD6FE"/>
           </a:solidFill>
           <a:ln w="19050">
             <a:solidFill>
-              <a:srgbClr val="0D9488"/>
+              <a:srgbClr val="7C3AED"/>
             </a:solidFill>
             <a:prstDash val="solid"/>
           </a:ln>
@@ -14790,7 +14566,7 @@
         </p:nvSpPr>
         <p:spPr>
           <a:xfrm>
-            <a:off x="2221992" y="2258568"/>
+            <a:off x="2938272" y="2258568"/>
             <a:ext cx="1828800" cy="292608"/>
           </a:xfrm>
           <a:prstGeom prst="rect">
@@ -14809,13 +14585,13 @@
             <a:r>
               <a:rPr lang="en-US" sz="1300" b="1" dirty="0">
                 <a:solidFill>
-                  <a:srgbClr val="0F766E"/>
+                  <a:srgbClr val="4C1D95"/>
                 </a:solidFill>
                 <a:latin typeface="Trebuchet MS" pitchFamily="34" charset="0"/>
                 <a:ea typeface="Trebuchet MS" pitchFamily="34" charset="-122"/>
                 <a:cs typeface="Trebuchet MS" pitchFamily="34" charset="-120"/>
               </a:rPr>
-              <a:t>work</a:t>
+              <a:t>frame</a:t>
             </a:r>
             <a:endParaRPr lang="en-US" sz="1300" dirty="0"/>
           </a:p>
@@ -14829,7 +14605,7 @@
         </p:nvSpPr>
         <p:spPr>
           <a:xfrm>
-            <a:off x="2221992" y="2569464"/>
+            <a:off x="2938272" y="2569464"/>
             <a:ext cx="1828800" cy="201168"/>
           </a:xfrm>
           <a:prstGeom prst="rect">
@@ -14854,7 +14630,7 @@
                 <a:ea typeface="Calibri" pitchFamily="34" charset="-122"/>
                 <a:cs typeface="Calibri" pitchFamily="34" charset="-120"/>
               </a:rPr>
-              <a:t>effort or labour</a:t>
+              <a:t>a structure that holds things</a:t>
             </a:r>
             <a:endParaRPr lang="en-US" sz="850" dirty="0"/>
           </a:p>
@@ -14868,7 +14644,7 @@
         </p:nvSpPr>
         <p:spPr>
           <a:xfrm>
-            <a:off x="4370832" y="2258568"/>
+            <a:off x="5803392" y="2258568"/>
             <a:ext cx="1828800" cy="292608"/>
           </a:xfrm>
           <a:prstGeom prst="rect">
@@ -14877,11 +14653,11 @@
             </a:avLst>
           </a:prstGeom>
           <a:solidFill>
-            <a:srgbClr val="FCE7F3"/>
+            <a:srgbClr val="CCFBF1"/>
           </a:solidFill>
           <a:ln w="19050">
             <a:solidFill>
-              <a:srgbClr val="DB2777"/>
+              <a:srgbClr val="0D9488"/>
             </a:solidFill>
             <a:prstDash val="solid"/>
           </a:ln>
@@ -14902,7 +14678,7 @@
         </p:nvSpPr>
         <p:spPr>
           <a:xfrm>
-            <a:off x="4370832" y="2258568"/>
+            <a:off x="5803392" y="2258568"/>
             <a:ext cx="1828800" cy="292608"/>
           </a:xfrm>
           <a:prstGeom prst="rect">
@@ -14921,13 +14697,13 @@
             <a:r>
               <a:rPr lang="en-US" sz="1300" b="1" dirty="0">
                 <a:solidFill>
-                  <a:srgbClr val="9D174D"/>
+                  <a:srgbClr val="0F766E"/>
                 </a:solidFill>
                 <a:latin typeface="Trebuchet MS" pitchFamily="34" charset="0"/>
                 <a:ea typeface="Trebuchet MS" pitchFamily="34" charset="-122"/>
                 <a:cs typeface="Trebuchet MS" pitchFamily="34" charset="-120"/>
               </a:rPr>
-              <a:t>er</a:t>
+              <a:t>work</a:t>
             </a:r>
             <a:endParaRPr lang="en-US" sz="1300" dirty="0"/>
           </a:p>
@@ -14941,7 +14717,7 @@
         </p:nvSpPr>
         <p:spPr>
           <a:xfrm>
-            <a:off x="4370832" y="2569464"/>
+            <a:off x="5803392" y="2569464"/>
             <a:ext cx="1828800" cy="201168"/>
           </a:xfrm>
           <a:prstGeom prst="rect">
@@ -14966,7 +14742,7 @@
                 <a:ea typeface="Calibri" pitchFamily="34" charset="-122"/>
                 <a:cs typeface="Calibri" pitchFamily="34" charset="-120"/>
               </a:rPr>
-              <a:t>person who does</a:t>
+              <a:t>to do or make effort</a:t>
             </a:r>
             <a:endParaRPr lang="en-US" sz="850" dirty="0"/>
           </a:p>
@@ -14980,30 +14756,23 @@
         </p:nvSpPr>
         <p:spPr>
           <a:xfrm>
-            <a:off x="6519672" y="2258568"/>
-            <a:ext cx="1828800" cy="292608"/>
+            <a:off x="365760" y="3273552"/>
+            <a:ext cx="1371600" cy="658368"/>
           </a:xfrm>
           <a:prstGeom prst="rect">
             <a:avLst>
-              <a:gd name="adj" fmla="val 25000"/>
+              <a:gd name="adj" fmla="val 8333"/>
             </a:avLst>
           </a:prstGeom>
           <a:solidFill>
-            <a:srgbClr val="FCE7F3"/>
-          </a:solidFill>
-          <a:ln w="19050">
-            <a:solidFill>
-              <a:srgbClr val="DB2777"/>
-            </a:solidFill>
-            <a:prstDash val="solid"/>
-          </a:ln>
-          <a:effectLst>
-            <a:outerShdw sx="100000" sy="100000" kx="0" ky="0" algn="bl" rotWithShape="0" blurRad="101600" dist="38100" dir="8100000">
-              <a:srgbClr val="000000">
-                <a:alpha val="12000"/>
-              </a:srgbClr>
-            </a:outerShdw>
-          </a:effectLst>
+            <a:srgbClr val="E2E8F0"/>
+          </a:solidFill>
+          <a:ln w="12700">
+            <a:solidFill>
+              <a:srgbClr val="E2E8F0"/>
+            </a:solidFill>
+            <a:prstDash val="solid"/>
+          </a:ln>
         </p:spPr>
       </p:sp>
       <p:sp>
@@ -15014,8 +14783,8 @@
         </p:nvSpPr>
         <p:spPr>
           <a:xfrm>
-            <a:off x="6519672" y="2258568"/>
-            <a:ext cx="1828800" cy="292608"/>
+            <a:off x="365760" y="3273552"/>
+            <a:ext cx="1371600" cy="658368"/>
           </a:xfrm>
           <a:prstGeom prst="rect">
             <a:avLst/>
@@ -15031,69 +14800,30 @@
               <a:buNone/>
             </a:pPr>
             <a:r>
-              <a:rPr lang="en-US" sz="1300" b="1" dirty="0">
-                <a:solidFill>
-                  <a:srgbClr val="9D174D"/>
+              <a:rPr lang="en-US" sz="1100" b="1" dirty="0">
+                <a:solidFill>
+                  <a:srgbClr val="475569"/>
                 </a:solidFill>
                 <a:latin typeface="Trebuchet MS" pitchFamily="34" charset="0"/>
                 <a:ea typeface="Trebuchet MS" pitchFamily="34" charset="-122"/>
                 <a:cs typeface="Trebuchet MS" pitchFamily="34" charset="-120"/>
               </a:rPr>
-              <a:t>s</a:t>
-            </a:r>
-            <a:endParaRPr lang="en-US" sz="1300" dirty="0"/>
-          </a:p>
-        </p:txBody>
-      </p:sp>
-      <p:sp>
-        <p:nvSpPr>
-          <p:cNvPr id="24" name="Text 22"/>
-          <p:cNvSpPr/>
-          <p:nvPr/>
-        </p:nvSpPr>
-        <p:spPr>
-          <a:xfrm>
-            <a:off x="6519672" y="2569464"/>
-            <a:ext cx="1828800" cy="201168"/>
-          </a:xfrm>
-          <a:prstGeom prst="rect">
-            <a:avLst/>
-          </a:prstGeom>
-          <a:noFill/>
-          <a:ln/>
-        </p:spPr>
-        <p:txBody>
-          <a:bodyPr wrap="square" lIns="0" tIns="0" rIns="0" bIns="0" rtlCol="0" anchor="t"/>
-          <a:lstStyle/>
-          <a:p>
-            <a:pPr algn="ctr" indent="0" marL="0">
-              <a:buNone/>
-            </a:pPr>
-            <a:r>
-              <a:rPr lang="en-US" sz="850" dirty="0">
-                <a:solidFill>
-                  <a:srgbClr val="475569"/>
-                </a:solidFill>
-                <a:latin typeface="Calibri" pitchFamily="34" charset="0"/>
-                <a:ea typeface="Calibri" pitchFamily="34" charset="-122"/>
-                <a:cs typeface="Calibri" pitchFamily="34" charset="-120"/>
-              </a:rPr>
-              <a:t>more than one</a:t>
-            </a:r>
-            <a:endParaRPr lang="en-US" sz="850" dirty="0"/>
-          </a:p>
-        </p:txBody>
-      </p:sp>
-      <p:sp>
-        <p:nvSpPr>
-          <p:cNvPr id="25" name="Shape 23"/>
-          <p:cNvSpPr/>
-          <p:nvPr/>
-        </p:nvSpPr>
-        <p:spPr>
-          <a:xfrm>
-            <a:off x="365760" y="3273552"/>
-            <a:ext cx="1371600" cy="658368"/>
+              <a:t>Syllables</a:t>
+            </a:r>
+            <a:endParaRPr lang="en-US" sz="1100" dirty="0"/>
+          </a:p>
+        </p:txBody>
+      </p:sp>
+      <p:sp>
+        <p:nvSpPr>
+          <p:cNvPr id="24" name="Shape 22"/>
+          <p:cNvSpPr/>
+          <p:nvPr/>
+        </p:nvSpPr>
+        <p:spPr>
+          <a:xfrm>
+            <a:off x="1874520" y="3273552"/>
+            <a:ext cx="6903720" cy="658368"/>
           </a:xfrm>
           <a:prstGeom prst="rect">
             <a:avLst>
@@ -15101,11 +14831,38 @@
             </a:avLst>
           </a:prstGeom>
           <a:solidFill>
-            <a:srgbClr val="E2E8F0"/>
-          </a:solidFill>
-          <a:ln w="12700">
-            <a:solidFill>
-              <a:srgbClr val="E2E8F0"/>
+            <a:srgbClr val="CCFBF1"/>
+          </a:solidFill>
+          <a:ln w="12700">
+            <a:solidFill>
+              <a:srgbClr val="0D9488"/>
+            </a:solidFill>
+            <a:prstDash val="solid"/>
+          </a:ln>
+        </p:spPr>
+      </p:sp>
+      <p:sp>
+        <p:nvSpPr>
+          <p:cNvPr id="25" name="Shape 23"/>
+          <p:cNvSpPr/>
+          <p:nvPr/>
+        </p:nvSpPr>
+        <p:spPr>
+          <a:xfrm>
+            <a:off x="2999232" y="3364992"/>
+            <a:ext cx="1645920" cy="475488"/>
+          </a:xfrm>
+          <a:prstGeom prst="rect">
+            <a:avLst>
+              <a:gd name="adj" fmla="val 9615"/>
+            </a:avLst>
+          </a:prstGeom>
+          <a:solidFill>
+            <a:srgbClr val="FFFFFF"/>
+          </a:solidFill>
+          <a:ln w="12700">
+            <a:solidFill>
+              <a:srgbClr val="0D9488"/>
             </a:solidFill>
             <a:prstDash val="solid"/>
           </a:ln>
@@ -15119,8 +14876,8 @@
         </p:nvSpPr>
         <p:spPr>
           <a:xfrm>
-            <a:off x="365760" y="3273552"/>
-            <a:ext cx="1371600" cy="658368"/>
+            <a:off x="2999232" y="3364992"/>
+            <a:ext cx="1645920" cy="475488"/>
           </a:xfrm>
           <a:prstGeom prst="rect">
             <a:avLst/>
@@ -15136,15 +14893,186 @@
               <a:buNone/>
             </a:pPr>
             <a:r>
-              <a:rPr lang="en-US" sz="1100" b="1" dirty="0">
-                <a:solidFill>
-                  <a:srgbClr val="475569"/>
+              <a:rPr lang="en-US" sz="1400" b="1" dirty="0">
+                <a:solidFill>
+                  <a:srgbClr val="0D9488"/>
                 </a:solidFill>
                 <a:latin typeface="Trebuchet MS" pitchFamily="34" charset="0"/>
                 <a:ea typeface="Trebuchet MS" pitchFamily="34" charset="-122"/>
                 <a:cs typeface="Trebuchet MS" pitchFamily="34" charset="-120"/>
               </a:rPr>
-              <a:t>Syllables</a:t>
+              <a:t>frame</a:t>
+            </a:r>
+            <a:endParaRPr lang="en-US" sz="1400" dirty="0"/>
+          </a:p>
+        </p:txBody>
+      </p:sp>
+      <p:sp>
+        <p:nvSpPr>
+          <p:cNvPr id="27" name="Text 25"/>
+          <p:cNvSpPr/>
+          <p:nvPr/>
+        </p:nvSpPr>
+        <p:spPr>
+          <a:xfrm>
+            <a:off x="4645152" y="3364992"/>
+            <a:ext cx="1097280" cy="475488"/>
+          </a:xfrm>
+          <a:prstGeom prst="rect">
+            <a:avLst/>
+          </a:prstGeom>
+          <a:noFill/>
+          <a:ln/>
+        </p:spPr>
+        <p:txBody>
+          <a:bodyPr wrap="square" lIns="0" tIns="0" rIns="0" bIns="0" rtlCol="0" anchor="ctr"/>
+          <a:lstStyle/>
+          <a:p>
+            <a:pPr algn="ctr" indent="0" marL="0">
+              <a:buNone/>
+            </a:pPr>
+            <a:r>
+              <a:rPr lang="en-US" sz="1600" b="1" dirty="0">
+                <a:solidFill>
+                  <a:srgbClr val="0D9488"/>
+                </a:solidFill>
+                <a:latin typeface="Trebuchet MS" pitchFamily="34" charset="0"/>
+                <a:ea typeface="Trebuchet MS" pitchFamily="34" charset="-122"/>
+                <a:cs typeface="Trebuchet MS" pitchFamily="34" charset="-120"/>
+              </a:rPr>
+              <a:t>·</a:t>
+            </a:r>
+            <a:endParaRPr lang="en-US" sz="1600" dirty="0"/>
+          </a:p>
+        </p:txBody>
+      </p:sp>
+      <p:sp>
+        <p:nvSpPr>
+          <p:cNvPr id="28" name="Shape 26"/>
+          <p:cNvSpPr/>
+          <p:nvPr/>
+        </p:nvSpPr>
+        <p:spPr>
+          <a:xfrm>
+            <a:off x="5742432" y="3364992"/>
+            <a:ext cx="1645920" cy="475488"/>
+          </a:xfrm>
+          <a:prstGeom prst="rect">
+            <a:avLst>
+              <a:gd name="adj" fmla="val 9615"/>
+            </a:avLst>
+          </a:prstGeom>
+          <a:solidFill>
+            <a:srgbClr val="FFFFFF"/>
+          </a:solidFill>
+          <a:ln w="12700">
+            <a:solidFill>
+              <a:srgbClr val="0D9488"/>
+            </a:solidFill>
+            <a:prstDash val="solid"/>
+          </a:ln>
+        </p:spPr>
+      </p:sp>
+      <p:sp>
+        <p:nvSpPr>
+          <p:cNvPr id="29" name="Text 27"/>
+          <p:cNvSpPr/>
+          <p:nvPr/>
+        </p:nvSpPr>
+        <p:spPr>
+          <a:xfrm>
+            <a:off x="5742432" y="3364992"/>
+            <a:ext cx="1645920" cy="475488"/>
+          </a:xfrm>
+          <a:prstGeom prst="rect">
+            <a:avLst/>
+          </a:prstGeom>
+          <a:noFill/>
+          <a:ln/>
+        </p:spPr>
+        <p:txBody>
+          <a:bodyPr wrap="square" lIns="0" tIns="0" rIns="0" bIns="0" rtlCol="0" anchor="ctr"/>
+          <a:lstStyle/>
+          <a:p>
+            <a:pPr algn="ctr" indent="0" marL="0">
+              <a:buNone/>
+            </a:pPr>
+            <a:r>
+              <a:rPr lang="en-US" sz="1400" b="1" dirty="0">
+                <a:solidFill>
+                  <a:srgbClr val="0D9488"/>
+                </a:solidFill>
+                <a:latin typeface="Trebuchet MS" pitchFamily="34" charset="0"/>
+                <a:ea typeface="Trebuchet MS" pitchFamily="34" charset="-122"/>
+                <a:cs typeface="Trebuchet MS" pitchFamily="34" charset="-120"/>
+              </a:rPr>
+              <a:t>work</a:t>
+            </a:r>
+            <a:endParaRPr lang="en-US" sz="1400" dirty="0"/>
+          </a:p>
+        </p:txBody>
+      </p:sp>
+      <p:sp>
+        <p:nvSpPr>
+          <p:cNvPr id="30" name="Shape 28"/>
+          <p:cNvSpPr/>
+          <p:nvPr/>
+        </p:nvSpPr>
+        <p:spPr>
+          <a:xfrm>
+            <a:off x="365760" y="4096512"/>
+            <a:ext cx="1371600" cy="804672"/>
+          </a:xfrm>
+          <a:prstGeom prst="rect">
+            <a:avLst>
+              <a:gd name="adj" fmla="val 6818"/>
+            </a:avLst>
+          </a:prstGeom>
+          <a:solidFill>
+            <a:srgbClr val="E2E8F0"/>
+          </a:solidFill>
+          <a:ln w="12700">
+            <a:solidFill>
+              <a:srgbClr val="E2E8F0"/>
+            </a:solidFill>
+            <a:prstDash val="solid"/>
+          </a:ln>
+        </p:spPr>
+      </p:sp>
+      <p:sp>
+        <p:nvSpPr>
+          <p:cNvPr id="31" name="Text 29"/>
+          <p:cNvSpPr/>
+          <p:nvPr/>
+        </p:nvSpPr>
+        <p:spPr>
+          <a:xfrm>
+            <a:off x="365760" y="4096512"/>
+            <a:ext cx="1371600" cy="804672"/>
+          </a:xfrm>
+          <a:prstGeom prst="rect">
+            <a:avLst/>
+          </a:prstGeom>
+          <a:noFill/>
+          <a:ln/>
+        </p:spPr>
+        <p:txBody>
+          <a:bodyPr wrap="square" lIns="0" tIns="0" rIns="0" bIns="0" rtlCol="0" anchor="ctr"/>
+          <a:lstStyle/>
+          <a:p>
+            <a:pPr algn="ctr" indent="0" marL="0">
+              <a:buNone/>
+            </a:pPr>
+            <a:r>
+              <a:rPr lang="en-US" sz="1100" b="1" dirty="0">
+                <a:solidFill>
+                  <a:srgbClr val="475569"/>
+                </a:solidFill>
+                <a:latin typeface="Trebuchet MS" pitchFamily="34" charset="0"/>
+                <a:ea typeface="Trebuchet MS" pitchFamily="34" charset="-122"/>
+                <a:cs typeface="Trebuchet MS" pitchFamily="34" charset="-120"/>
+              </a:rPr>
+              <a:t>Phonemes</a:t>
             </a:r>
             <a:endParaRPr lang="en-US" sz="1100" dirty="0"/>
           </a:p>
@@ -15152,13 +15080,13 @@
       </p:sp>
       <p:sp>
         <p:nvSpPr>
-          <p:cNvPr id="27" name="Shape 25"/>
-          <p:cNvSpPr/>
-          <p:nvPr/>
-        </p:nvSpPr>
-        <p:spPr>
-          <a:xfrm>
-            <a:off x="1874520" y="3273552"/>
+          <p:cNvPr id="32" name="Shape 30"/>
+          <p:cNvSpPr/>
+          <p:nvPr/>
+        </p:nvSpPr>
+        <p:spPr>
+          <a:xfrm>
+            <a:off x="1874520" y="4096512"/>
             <a:ext cx="6903720" cy="658368"/>
           </a:xfrm>
           <a:prstGeom prst="rect">
@@ -15167,30 +15095,30 @@
             </a:avLst>
           </a:prstGeom>
           <a:solidFill>
-            <a:srgbClr val="CCFBF1"/>
-          </a:solidFill>
-          <a:ln w="12700">
-            <a:solidFill>
-              <a:srgbClr val="0D9488"/>
-            </a:solidFill>
-            <a:prstDash val="solid"/>
-          </a:ln>
-        </p:spPr>
-      </p:sp>
-      <p:sp>
-        <p:nvSpPr>
-          <p:cNvPr id="28" name="Shape 26"/>
-          <p:cNvSpPr/>
-          <p:nvPr/>
-        </p:nvSpPr>
-        <p:spPr>
-          <a:xfrm>
-            <a:off x="2999232" y="3364992"/>
-            <a:ext cx="1645920" cy="475488"/>
+            <a:srgbClr val="FCE7F3"/>
+          </a:solidFill>
+          <a:ln w="12700">
+            <a:solidFill>
+              <a:srgbClr val="DB2777"/>
+            </a:solidFill>
+            <a:prstDash val="solid"/>
+          </a:ln>
+        </p:spPr>
+      </p:sp>
+      <p:sp>
+        <p:nvSpPr>
+          <p:cNvPr id="33" name="Shape 31"/>
+          <p:cNvSpPr/>
+          <p:nvPr/>
+        </p:nvSpPr>
+        <p:spPr>
+          <a:xfrm>
+            <a:off x="2023872" y="4169664"/>
+            <a:ext cx="685800" cy="475488"/>
           </a:xfrm>
           <a:prstGeom prst="rect">
             <a:avLst>
-              <a:gd name="adj" fmla="val 9615"/>
+              <a:gd name="adj" fmla="val 7692"/>
             </a:avLst>
           </a:prstGeom>
           <a:solidFill>
@@ -15198,22 +15126,22 @@
           </a:solidFill>
           <a:ln w="12700">
             <a:solidFill>
-              <a:srgbClr val="0D9488"/>
-            </a:solidFill>
-            <a:prstDash val="solid"/>
-          </a:ln>
-        </p:spPr>
-      </p:sp>
-      <p:sp>
-        <p:nvSpPr>
-          <p:cNvPr id="29" name="Text 27"/>
-          <p:cNvSpPr/>
-          <p:nvPr/>
-        </p:nvSpPr>
-        <p:spPr>
-          <a:xfrm>
-            <a:off x="2999232" y="3364992"/>
-            <a:ext cx="1645920" cy="475488"/>
+              <a:srgbClr val="DB2777"/>
+            </a:solidFill>
+            <a:prstDash val="solid"/>
+          </a:ln>
+        </p:spPr>
+      </p:sp>
+      <p:sp>
+        <p:nvSpPr>
+          <p:cNvPr id="34" name="Text 32"/>
+          <p:cNvSpPr/>
+          <p:nvPr/>
+        </p:nvSpPr>
+        <p:spPr>
+          <a:xfrm>
+            <a:off x="2023872" y="4169664"/>
+            <a:ext cx="685800" cy="475488"/>
           </a:xfrm>
           <a:prstGeom prst="rect">
             <a:avLst/>
@@ -15229,30 +15157,57 @@
               <a:buNone/>
             </a:pPr>
             <a:r>
-              <a:rPr lang="en-US" sz="1400" b="1" dirty="0">
-                <a:solidFill>
-                  <a:srgbClr val="0D9488"/>
+              <a:rPr lang="en-US" sz="900" b="1" dirty="0">
+                <a:solidFill>
+                  <a:srgbClr val="9D174D"/>
                 </a:solidFill>
                 <a:latin typeface="Trebuchet MS" pitchFamily="34" charset="0"/>
                 <a:ea typeface="Trebuchet MS" pitchFamily="34" charset="-122"/>
                 <a:cs typeface="Trebuchet MS" pitchFamily="34" charset="-120"/>
               </a:rPr>
-              <a:t>work</a:t>
-            </a:r>
-            <a:endParaRPr lang="en-US" sz="1400" dirty="0"/>
-          </a:p>
-        </p:txBody>
-      </p:sp>
-      <p:sp>
-        <p:nvSpPr>
-          <p:cNvPr id="30" name="Text 28"/>
-          <p:cNvSpPr/>
-          <p:nvPr/>
-        </p:nvSpPr>
-        <p:spPr>
-          <a:xfrm>
-            <a:off x="4645152" y="3364992"/>
-            <a:ext cx="1097280" cy="475488"/>
+              <a:t>f</a:t>
+            </a:r>
+            <a:endParaRPr lang="en-US" sz="900" dirty="0"/>
+          </a:p>
+        </p:txBody>
+      </p:sp>
+      <p:sp>
+        <p:nvSpPr>
+          <p:cNvPr id="35" name="Shape 33"/>
+          <p:cNvSpPr/>
+          <p:nvPr/>
+        </p:nvSpPr>
+        <p:spPr>
+          <a:xfrm>
+            <a:off x="2831592" y="4169664"/>
+            <a:ext cx="685800" cy="475488"/>
+          </a:xfrm>
+          <a:prstGeom prst="rect">
+            <a:avLst>
+              <a:gd name="adj" fmla="val 7692"/>
+            </a:avLst>
+          </a:prstGeom>
+          <a:solidFill>
+            <a:srgbClr val="FFFFFF"/>
+          </a:solidFill>
+          <a:ln w="12700">
+            <a:solidFill>
+              <a:srgbClr val="DB2777"/>
+            </a:solidFill>
+            <a:prstDash val="solid"/>
+          </a:ln>
+        </p:spPr>
+      </p:sp>
+      <p:sp>
+        <p:nvSpPr>
+          <p:cNvPr id="36" name="Text 34"/>
+          <p:cNvSpPr/>
+          <p:nvPr/>
+        </p:nvSpPr>
+        <p:spPr>
+          <a:xfrm>
+            <a:off x="2831592" y="4169664"/>
+            <a:ext cx="685800" cy="475488"/>
           </a:xfrm>
           <a:prstGeom prst="rect">
             <a:avLst/>
@@ -15268,34 +15223,34 @@
               <a:buNone/>
             </a:pPr>
             <a:r>
-              <a:rPr lang="en-US" sz="1600" b="1" dirty="0">
-                <a:solidFill>
-                  <a:srgbClr val="0D9488"/>
+              <a:rPr lang="en-US" sz="900" b="1" dirty="0">
+                <a:solidFill>
+                  <a:srgbClr val="9D174D"/>
                 </a:solidFill>
                 <a:latin typeface="Trebuchet MS" pitchFamily="34" charset="0"/>
                 <a:ea typeface="Trebuchet MS" pitchFamily="34" charset="-122"/>
                 <a:cs typeface="Trebuchet MS" pitchFamily="34" charset="-120"/>
               </a:rPr>
-              <a:t>·</a:t>
-            </a:r>
-            <a:endParaRPr lang="en-US" sz="1600" dirty="0"/>
-          </a:p>
-        </p:txBody>
-      </p:sp>
-      <p:sp>
-        <p:nvSpPr>
-          <p:cNvPr id="31" name="Shape 29"/>
-          <p:cNvSpPr/>
-          <p:nvPr/>
-        </p:nvSpPr>
-        <p:spPr>
-          <a:xfrm>
-            <a:off x="5742432" y="3364992"/>
-            <a:ext cx="1645920" cy="475488"/>
+              <a:t>r</a:t>
+            </a:r>
+            <a:endParaRPr lang="en-US" sz="900" dirty="0"/>
+          </a:p>
+        </p:txBody>
+      </p:sp>
+      <p:sp>
+        <p:nvSpPr>
+          <p:cNvPr id="37" name="Shape 35"/>
+          <p:cNvSpPr/>
+          <p:nvPr/>
+        </p:nvSpPr>
+        <p:spPr>
+          <a:xfrm>
+            <a:off x="3639312" y="4169664"/>
+            <a:ext cx="685800" cy="475488"/>
           </a:xfrm>
           <a:prstGeom prst="rect">
             <a:avLst>
-              <a:gd name="adj" fmla="val 9615"/>
+              <a:gd name="adj" fmla="val 7692"/>
             </a:avLst>
           </a:prstGeom>
           <a:solidFill>
@@ -15303,22 +15258,22 @@
           </a:solidFill>
           <a:ln w="12700">
             <a:solidFill>
-              <a:srgbClr val="0D9488"/>
-            </a:solidFill>
-            <a:prstDash val="solid"/>
-          </a:ln>
-        </p:spPr>
-      </p:sp>
-      <p:sp>
-        <p:nvSpPr>
-          <p:cNvPr id="32" name="Text 30"/>
-          <p:cNvSpPr/>
-          <p:nvPr/>
-        </p:nvSpPr>
-        <p:spPr>
-          <a:xfrm>
-            <a:off x="5742432" y="3364992"/>
-            <a:ext cx="1645920" cy="475488"/>
+              <a:srgbClr val="DB2777"/>
+            </a:solidFill>
+            <a:prstDash val="solid"/>
+          </a:ln>
+        </p:spPr>
+      </p:sp>
+      <p:sp>
+        <p:nvSpPr>
+          <p:cNvPr id="38" name="Text 36"/>
+          <p:cNvSpPr/>
+          <p:nvPr/>
+        </p:nvSpPr>
+        <p:spPr>
+          <a:xfrm>
+            <a:off x="3639312" y="4169664"/>
+            <a:ext cx="685800" cy="475488"/>
           </a:xfrm>
           <a:prstGeom prst="rect">
             <a:avLst/>
@@ -15334,57 +15289,57 @@
               <a:buNone/>
             </a:pPr>
             <a:r>
-              <a:rPr lang="en-US" sz="1400" b="1" dirty="0">
-                <a:solidFill>
-                  <a:srgbClr val="0D9488"/>
+              <a:rPr lang="en-US" sz="900" b="1" dirty="0">
+                <a:solidFill>
+                  <a:srgbClr val="9D174D"/>
                 </a:solidFill>
                 <a:latin typeface="Trebuchet MS" pitchFamily="34" charset="0"/>
                 <a:ea typeface="Trebuchet MS" pitchFamily="34" charset="-122"/>
                 <a:cs typeface="Trebuchet MS" pitchFamily="34" charset="-120"/>
               </a:rPr>
-              <a:t>ers</a:t>
-            </a:r>
-            <a:endParaRPr lang="en-US" sz="1400" dirty="0"/>
-          </a:p>
-        </p:txBody>
-      </p:sp>
-      <p:sp>
-        <p:nvSpPr>
-          <p:cNvPr id="33" name="Shape 31"/>
-          <p:cNvSpPr/>
-          <p:nvPr/>
-        </p:nvSpPr>
-        <p:spPr>
-          <a:xfrm>
-            <a:off x="365760" y="4096512"/>
-            <a:ext cx="1371600" cy="804672"/>
+              <a:t>a</a:t>
+            </a:r>
+            <a:endParaRPr lang="en-US" sz="900" dirty="0"/>
+          </a:p>
+        </p:txBody>
+      </p:sp>
+      <p:sp>
+        <p:nvSpPr>
+          <p:cNvPr id="39" name="Shape 37"/>
+          <p:cNvSpPr/>
+          <p:nvPr/>
+        </p:nvSpPr>
+        <p:spPr>
+          <a:xfrm>
+            <a:off x="4447032" y="4169664"/>
+            <a:ext cx="685800" cy="475488"/>
           </a:xfrm>
           <a:prstGeom prst="rect">
             <a:avLst>
-              <a:gd name="adj" fmla="val 6818"/>
+              <a:gd name="adj" fmla="val 7692"/>
             </a:avLst>
           </a:prstGeom>
           <a:solidFill>
-            <a:srgbClr val="E2E8F0"/>
-          </a:solidFill>
-          <a:ln w="12700">
-            <a:solidFill>
-              <a:srgbClr val="E2E8F0"/>
-            </a:solidFill>
-            <a:prstDash val="solid"/>
-          </a:ln>
-        </p:spPr>
-      </p:sp>
-      <p:sp>
-        <p:nvSpPr>
-          <p:cNvPr id="34" name="Text 32"/>
-          <p:cNvSpPr/>
-          <p:nvPr/>
-        </p:nvSpPr>
-        <p:spPr>
-          <a:xfrm>
-            <a:off x="365760" y="4096512"/>
-            <a:ext cx="1371600" cy="804672"/>
+            <a:srgbClr val="FFFFFF"/>
+          </a:solidFill>
+          <a:ln w="12700">
+            <a:solidFill>
+              <a:srgbClr val="DB2777"/>
+            </a:solidFill>
+            <a:prstDash val="solid"/>
+          </a:ln>
+        </p:spPr>
+      </p:sp>
+      <p:sp>
+        <p:nvSpPr>
+          <p:cNvPr id="40" name="Text 38"/>
+          <p:cNvSpPr/>
+          <p:nvPr/>
+        </p:nvSpPr>
+        <p:spPr>
+          <a:xfrm>
+            <a:off x="4447032" y="4169664"/>
+            <a:ext cx="685800" cy="475488"/>
           </a:xfrm>
           <a:prstGeom prst="rect">
             <a:avLst/>
@@ -15400,56 +15355,29 @@
               <a:buNone/>
             </a:pPr>
             <a:r>
-              <a:rPr lang="en-US" sz="1100" b="1" dirty="0">
-                <a:solidFill>
-                  <a:srgbClr val="475569"/>
+              <a:rPr lang="en-US" sz="900" b="1" dirty="0">
+                <a:solidFill>
+                  <a:srgbClr val="9D174D"/>
                 </a:solidFill>
                 <a:latin typeface="Trebuchet MS" pitchFamily="34" charset="0"/>
                 <a:ea typeface="Trebuchet MS" pitchFamily="34" charset="-122"/>
                 <a:cs typeface="Trebuchet MS" pitchFamily="34" charset="-120"/>
               </a:rPr>
-              <a:t>Phonemes</a:t>
-            </a:r>
-            <a:endParaRPr lang="en-US" sz="1100" dirty="0"/>
-          </a:p>
-        </p:txBody>
-      </p:sp>
-      <p:sp>
-        <p:nvSpPr>
-          <p:cNvPr id="35" name="Shape 33"/>
-          <p:cNvSpPr/>
-          <p:nvPr/>
-        </p:nvSpPr>
-        <p:spPr>
-          <a:xfrm>
-            <a:off x="1874520" y="4096512"/>
-            <a:ext cx="6903720" cy="658368"/>
-          </a:xfrm>
-          <a:prstGeom prst="rect">
-            <a:avLst>
-              <a:gd name="adj" fmla="val 8333"/>
-            </a:avLst>
-          </a:prstGeom>
-          <a:solidFill>
-            <a:srgbClr val="FCE7F3"/>
-          </a:solidFill>
-          <a:ln w="12700">
-            <a:solidFill>
-              <a:srgbClr val="DB2777"/>
-            </a:solidFill>
-            <a:prstDash val="solid"/>
-          </a:ln>
-        </p:spPr>
-      </p:sp>
-      <p:sp>
-        <p:nvSpPr>
-          <p:cNvPr id="36" name="Shape 34"/>
-          <p:cNvSpPr/>
-          <p:nvPr/>
-        </p:nvSpPr>
-        <p:spPr>
-          <a:xfrm>
-            <a:off x="2427732" y="4169664"/>
+              <a:t>m</a:t>
+            </a:r>
+            <a:endParaRPr lang="en-US" sz="900" dirty="0"/>
+          </a:p>
+        </p:txBody>
+      </p:sp>
+      <p:sp>
+        <p:nvSpPr>
+          <p:cNvPr id="41" name="Shape 39"/>
+          <p:cNvSpPr/>
+          <p:nvPr/>
+        </p:nvSpPr>
+        <p:spPr>
+          <a:xfrm>
+            <a:off x="5254752" y="4169664"/>
             <a:ext cx="685800" cy="475488"/>
           </a:xfrm>
           <a:prstGeom prst="rect">
@@ -15470,13 +15398,13 @@
       </p:sp>
       <p:sp>
         <p:nvSpPr>
-          <p:cNvPr id="37" name="Text 35"/>
-          <p:cNvSpPr/>
-          <p:nvPr/>
-        </p:nvSpPr>
-        <p:spPr>
-          <a:xfrm>
-            <a:off x="2427732" y="4169664"/>
+          <p:cNvPr id="42" name="Text 40"/>
+          <p:cNvSpPr/>
+          <p:nvPr/>
+        </p:nvSpPr>
+        <p:spPr>
+          <a:xfrm>
+            <a:off x="5254752" y="4169664"/>
             <a:ext cx="685800" cy="475488"/>
           </a:xfrm>
           <a:prstGeom prst="rect">
@@ -15501,7 +15429,7 @@
                 <a:ea typeface="Trebuchet MS" pitchFamily="34" charset="-122"/>
                 <a:cs typeface="Trebuchet MS" pitchFamily="34" charset="-120"/>
               </a:rPr>
-              <a:t>w</a:t>
+              <a:t>e</a:t>
             </a:r>
             <a:endParaRPr lang="en-US" sz="900" dirty="0"/>
           </a:p>
@@ -15509,13 +15437,13 @@
       </p:sp>
       <p:sp>
         <p:nvSpPr>
-          <p:cNvPr id="38" name="Shape 36"/>
-          <p:cNvSpPr/>
-          <p:nvPr/>
-        </p:nvSpPr>
-        <p:spPr>
-          <a:xfrm>
-            <a:off x="3639312" y="4169664"/>
+          <p:cNvPr id="43" name="Shape 41"/>
+          <p:cNvSpPr/>
+          <p:nvPr/>
+        </p:nvSpPr>
+        <p:spPr>
+          <a:xfrm>
+            <a:off x="6062472" y="4169664"/>
             <a:ext cx="685800" cy="475488"/>
           </a:xfrm>
           <a:prstGeom prst="rect">
@@ -15536,13 +15464,13 @@
       </p:sp>
       <p:sp>
         <p:nvSpPr>
-          <p:cNvPr id="39" name="Text 37"/>
-          <p:cNvSpPr/>
-          <p:nvPr/>
-        </p:nvSpPr>
-        <p:spPr>
-          <a:xfrm>
-            <a:off x="3639312" y="4169664"/>
+          <p:cNvPr id="44" name="Text 42"/>
+          <p:cNvSpPr/>
+          <p:nvPr/>
+        </p:nvSpPr>
+        <p:spPr>
+          <a:xfrm>
+            <a:off x="6062472" y="4169664"/>
             <a:ext cx="685800" cy="475488"/>
           </a:xfrm>
           <a:prstGeom prst="rect">
@@ -15567,7 +15495,7 @@
                 <a:ea typeface="Trebuchet MS" pitchFamily="34" charset="-122"/>
                 <a:cs typeface="Trebuchet MS" pitchFamily="34" charset="-120"/>
               </a:rPr>
-              <a:t>or</a:t>
+              <a:t>w</a:t>
             </a:r>
             <a:endParaRPr lang="en-US" sz="900" dirty="0"/>
           </a:p>
@@ -15575,13 +15503,13 @@
       </p:sp>
       <p:sp>
         <p:nvSpPr>
-          <p:cNvPr id="40" name="Shape 38"/>
-          <p:cNvSpPr/>
-          <p:nvPr/>
-        </p:nvSpPr>
-        <p:spPr>
-          <a:xfrm>
-            <a:off x="4850892" y="4169664"/>
+          <p:cNvPr id="45" name="Shape 43"/>
+          <p:cNvSpPr/>
+          <p:nvPr/>
+        </p:nvSpPr>
+        <p:spPr>
+          <a:xfrm>
+            <a:off x="6870192" y="4169664"/>
             <a:ext cx="685800" cy="475488"/>
           </a:xfrm>
           <a:prstGeom prst="rect">
@@ -15602,13 +15530,13 @@
       </p:sp>
       <p:sp>
         <p:nvSpPr>
-          <p:cNvPr id="41" name="Text 39"/>
-          <p:cNvSpPr/>
-          <p:nvPr/>
-        </p:nvSpPr>
-        <p:spPr>
-          <a:xfrm>
-            <a:off x="4850892" y="4169664"/>
+          <p:cNvPr id="46" name="Text 44"/>
+          <p:cNvSpPr/>
+          <p:nvPr/>
+        </p:nvSpPr>
+        <p:spPr>
+          <a:xfrm>
+            <a:off x="6870192" y="4169664"/>
             <a:ext cx="685800" cy="475488"/>
           </a:xfrm>
           <a:prstGeom prst="rect">
@@ -15633,7 +15561,7 @@
                 <a:ea typeface="Trebuchet MS" pitchFamily="34" charset="-122"/>
                 <a:cs typeface="Trebuchet MS" pitchFamily="34" charset="-120"/>
               </a:rPr>
-              <a:t>k</a:t>
+              <a:t>or</a:t>
             </a:r>
             <a:endParaRPr lang="en-US" sz="900" dirty="0"/>
           </a:p>
@@ -15641,13 +15569,13 @@
       </p:sp>
       <p:sp>
         <p:nvSpPr>
-          <p:cNvPr id="42" name="Shape 40"/>
-          <p:cNvSpPr/>
-          <p:nvPr/>
-        </p:nvSpPr>
-        <p:spPr>
-          <a:xfrm>
-            <a:off x="6062472" y="4169664"/>
+          <p:cNvPr id="47" name="Shape 45"/>
+          <p:cNvSpPr/>
+          <p:nvPr/>
+        </p:nvSpPr>
+        <p:spPr>
+          <a:xfrm>
+            <a:off x="7677912" y="4169664"/>
             <a:ext cx="685800" cy="475488"/>
           </a:xfrm>
           <a:prstGeom prst="rect">
@@ -15668,13 +15596,13 @@
       </p:sp>
       <p:sp>
         <p:nvSpPr>
-          <p:cNvPr id="43" name="Text 41"/>
-          <p:cNvSpPr/>
-          <p:nvPr/>
-        </p:nvSpPr>
-        <p:spPr>
-          <a:xfrm>
-            <a:off x="6062472" y="4169664"/>
+          <p:cNvPr id="48" name="Text 46"/>
+          <p:cNvSpPr/>
+          <p:nvPr/>
+        </p:nvSpPr>
+        <p:spPr>
+          <a:xfrm>
+            <a:off x="7677912" y="4169664"/>
             <a:ext cx="685800" cy="475488"/>
           </a:xfrm>
           <a:prstGeom prst="rect">
@@ -15699,73 +15627,7 @@
                 <a:ea typeface="Trebuchet MS" pitchFamily="34" charset="-122"/>
                 <a:cs typeface="Trebuchet MS" pitchFamily="34" charset="-120"/>
               </a:rPr>
-              <a:t>er</a:t>
-            </a:r>
-            <a:endParaRPr lang="en-US" sz="900" dirty="0"/>
-          </a:p>
-        </p:txBody>
-      </p:sp>
-      <p:sp>
-        <p:nvSpPr>
-          <p:cNvPr id="44" name="Shape 42"/>
-          <p:cNvSpPr/>
-          <p:nvPr/>
-        </p:nvSpPr>
-        <p:spPr>
-          <a:xfrm>
-            <a:off x="7274052" y="4169664"/>
-            <a:ext cx="685800" cy="475488"/>
-          </a:xfrm>
-          <a:prstGeom prst="rect">
-            <a:avLst>
-              <a:gd name="adj" fmla="val 7692"/>
-            </a:avLst>
-          </a:prstGeom>
-          <a:solidFill>
-            <a:srgbClr val="FFFFFF"/>
-          </a:solidFill>
-          <a:ln w="12700">
-            <a:solidFill>
-              <a:srgbClr val="DB2777"/>
-            </a:solidFill>
-            <a:prstDash val="solid"/>
-          </a:ln>
-        </p:spPr>
-      </p:sp>
-      <p:sp>
-        <p:nvSpPr>
-          <p:cNvPr id="45" name="Text 43"/>
-          <p:cNvSpPr/>
-          <p:nvPr/>
-        </p:nvSpPr>
-        <p:spPr>
-          <a:xfrm>
-            <a:off x="7274052" y="4169664"/>
-            <a:ext cx="685800" cy="475488"/>
-          </a:xfrm>
-          <a:prstGeom prst="rect">
-            <a:avLst/>
-          </a:prstGeom>
-          <a:noFill/>
-          <a:ln/>
-        </p:spPr>
-        <p:txBody>
-          <a:bodyPr wrap="square" lIns="0" tIns="0" rIns="0" bIns="0" rtlCol="0" anchor="ctr"/>
-          <a:lstStyle/>
-          <a:p>
-            <a:pPr algn="ctr" indent="0" marL="0">
-              <a:buNone/>
-            </a:pPr>
-            <a:r>
-              <a:rPr lang="en-US" sz="900" b="1" dirty="0">
-                <a:solidFill>
-                  <a:srgbClr val="9D174D"/>
-                </a:solidFill>
-                <a:latin typeface="Trebuchet MS" pitchFamily="34" charset="0"/>
-                <a:ea typeface="Trebuchet MS" pitchFamily="34" charset="-122"/>
-                <a:cs typeface="Trebuchet MS" pitchFamily="34" charset="-120"/>
-              </a:rPr>
-              <a:t>s</a:t>
+              <a:t>k</a:t>
             </a:r>
             <a:endParaRPr lang="en-US" sz="900" dirty="0"/>
           </a:p>
@@ -16339,7 +16201,7 @@
                 <a:ea typeface="Calibri" pitchFamily="34" charset="-122"/>
                 <a:cs typeface="Calibri" pitchFamily="34" charset="-120"/>
               </a:rPr>
-              <a:t>Word Labs  •  wordlabs.app  •  Root: 'work' = to do effort or labour</a:t>
+              <a:t>Word Labs  •  wordlabs.app  •  Root: 'work' = to do or make effort</a:t>
             </a:r>
             <a:endParaRPr lang="en-US" sz="800" dirty="0"/>
           </a:p>
@@ -16673,7 +16535,7 @@
                 <a:ea typeface="Trebuchet MS" pitchFamily="34" charset="-122"/>
                 <a:cs typeface="Trebuchet MS" pitchFamily="34" charset="-120"/>
               </a:rPr>
-              <a:t>1</a:t>
+              <a:t>2</a:t>
             </a:r>
             <a:pPr algn="ctr" indent="0" marL="0">
               <a:buNone/>
@@ -16687,7 +16549,7 @@
                 <a:ea typeface="Trebuchet MS" pitchFamily="34" charset="-122"/>
                 <a:cs typeface="Trebuchet MS" pitchFamily="34" charset="-120"/>
               </a:rPr>
-              <a:t>  punctuation mark</a:t>
+              <a:t>  punctuation marks</a:t>
             </a:r>
             <a:endParaRPr lang="en-US" sz="2800" dirty="0"/>
           </a:p>
@@ -16979,7 +16841,7 @@
                 <a:ea typeface="Calibri" pitchFamily="34" charset="-122"/>
                 <a:cs typeface="Calibri" pitchFamily="34" charset="-120"/>
               </a:rPr>
-              <a:t>Word Labs  •  wordlabs.app  •  Root: 'work' = to do effort or labour</a:t>
+              <a:t>Word Labs  •  wordlabs.app  •  Root: 'work' = to do or make effort</a:t>
             </a:r>
             <a:endParaRPr lang="en-US" sz="800" dirty="0"/>
           </a:p>
@@ -17091,7 +16953,7 @@
                 <a:ea typeface="Calibri" pitchFamily="34" charset="-122"/>
                 <a:cs typeface="Calibri" pitchFamily="34" charset="-120"/>
               </a:rPr>
-              <a:t>During the </a:t>
+              <a:t>The </a:t>
             </a:r>
             <a:pPr algn="l" indent="0" marL="0">
               <a:buNone/>
@@ -17108,7 +16970,7 @@
                 <a:ea typeface="Calibri" pitchFamily="34" charset="-122"/>
                 <a:cs typeface="Calibri" pitchFamily="34" charset="-120"/>
               </a:rPr>
-              <a:t>workshop</a:t>
+              <a:t>overworked</a:t>
             </a:r>
             <a:pPr algn="l" indent="0" marL="0">
               <a:buNone/>
@@ -17122,7 +16984,7 @@
                 <a:ea typeface="Calibri" pitchFamily="34" charset="-122"/>
                 <a:cs typeface="Calibri" pitchFamily="34" charset="-120"/>
               </a:rPr>
-              <a:t>, the </a:t>
+              <a:t> engineer relied on her </a:t>
             </a:r>
             <a:pPr algn="l" indent="0" marL="0">
               <a:buNone/>
@@ -17139,7 +17001,7 @@
                 <a:ea typeface="Calibri" pitchFamily="34" charset="-122"/>
                 <a:cs typeface="Calibri" pitchFamily="34" charset="-120"/>
               </a:rPr>
-              <a:t>overworked</a:t>
+              <a:t>network</a:t>
             </a:r>
             <a:pPr algn="l" indent="0" marL="0">
               <a:buNone/>
@@ -17153,7 +17015,7 @@
                 <a:ea typeface="Calibri" pitchFamily="34" charset="-122"/>
                 <a:cs typeface="Calibri" pitchFamily="34" charset="-120"/>
               </a:rPr>
-              <a:t> students decided to </a:t>
+              <a:t>, but her heavy </a:t>
             </a:r>
             <a:pPr algn="l" indent="0" marL="0">
               <a:buNone/>
@@ -17170,7 +17032,7 @@
                 <a:ea typeface="Calibri" pitchFamily="34" charset="-122"/>
                 <a:cs typeface="Calibri" pitchFamily="34" charset="-120"/>
               </a:rPr>
-              <a:t>rework</a:t>
+              <a:t>workload</a:t>
             </a:r>
             <a:pPr algn="l" indent="0" marL="0">
               <a:buNone/>
@@ -17184,7 +17046,7 @@
                 <a:ea typeface="Calibri" pitchFamily="34" charset="-122"/>
                 <a:cs typeface="Calibri" pitchFamily="34" charset="-120"/>
               </a:rPr>
-              <a:t> their project together.</a:t>
+              <a:t> made the deadline very stressful.</a:t>
             </a:r>
             <a:endParaRPr lang="en-US" sz="1800" dirty="0"/>
           </a:p>
@@ -17339,7 +17201,7 @@
                 <a:ea typeface="Trebuchet MS" pitchFamily="34" charset="-122"/>
                 <a:cs typeface="Trebuchet MS" pitchFamily="34" charset="-120"/>
               </a:rPr>
-              <a:t>workshop</a:t>
+              <a:t>overworked</a:t>
             </a:r>
             <a:endParaRPr lang="en-US" sz="1400" dirty="0"/>
           </a:p>
@@ -17467,7 +17329,7 @@
                 <a:ea typeface="Trebuchet MS" pitchFamily="34" charset="-122"/>
                 <a:cs typeface="Trebuchet MS" pitchFamily="34" charset="-120"/>
               </a:rPr>
-              <a:t>overworked</a:t>
+              <a:t>network</a:t>
             </a:r>
             <a:endParaRPr lang="en-US" sz="1400" dirty="0"/>
           </a:p>
@@ -17595,7 +17457,7 @@
                 <a:ea typeface="Trebuchet MS" pitchFamily="34" charset="-122"/>
                 <a:cs typeface="Trebuchet MS" pitchFamily="34" charset="-120"/>
               </a:rPr>
-              <a:t>rework</a:t>
+              <a:t>workload</a:t>
             </a:r>
             <a:endParaRPr lang="en-US" sz="1400" dirty="0"/>
           </a:p>
@@ -17926,7 +17788,7 @@
                 <a:ea typeface="Calibri" pitchFamily="34" charset="-122"/>
                 <a:cs typeface="Calibri" pitchFamily="34" charset="-120"/>
               </a:rPr>
-              <a:t>Word Labs  •  wordlabs.app  •  Root: 'work' = to do effort or labour</a:t>
+              <a:t>Word Labs  •  wordlabs.app  •  Root: 'work' = to do or make effort</a:t>
             </a:r>
             <a:endParaRPr lang="en-US" sz="800" dirty="0"/>
           </a:p>
@@ -18065,7 +17927,7 @@
                 <a:ea typeface="Trebuchet MS" pitchFamily="34" charset="-122"/>
                 <a:cs typeface="Trebuchet MS" pitchFamily="34" charset="-120"/>
               </a:rPr>
-              <a:t>workshop</a:t>
+              <a:t>overworked</a:t>
             </a:r>
             <a:endParaRPr lang="en-US" sz="2800" dirty="0"/>
           </a:p>
@@ -18753,7 +18615,7 @@
                 <a:ea typeface="Calibri" pitchFamily="34" charset="-122"/>
                 <a:cs typeface="Calibri" pitchFamily="34" charset="-120"/>
               </a:rPr>
-              <a:t>Word Labs  •  wordlabs.app  •  Root: 'work' = to do effort or labour</a:t>
+              <a:t>Word Labs  •  wordlabs.app  •  Root: 'work' = to do or make effort</a:t>
             </a:r>
             <a:endParaRPr lang="en-US" sz="800" dirty="0"/>
           </a:p>
@@ -18892,7 +18754,7 @@
                 <a:ea typeface="Trebuchet MS" pitchFamily="34" charset="-122"/>
                 <a:cs typeface="Trebuchet MS" pitchFamily="34" charset="-120"/>
               </a:rPr>
-              <a:t>workshop</a:t>
+              <a:t>overworked</a:t>
             </a:r>
             <a:endParaRPr lang="en-US" sz="2800" dirty="0"/>
           </a:p>
@@ -18972,7 +18834,7 @@
         </p:nvSpPr>
         <p:spPr>
           <a:xfrm>
-            <a:off x="2938272" y="2258568"/>
+            <a:off x="2221992" y="2258568"/>
             <a:ext cx="1828800" cy="292608"/>
           </a:xfrm>
           <a:prstGeom prst="rect">
@@ -18981,11 +18843,11 @@
             </a:avLst>
           </a:prstGeom>
           <a:solidFill>
-            <a:srgbClr val="CCFBF1"/>
+            <a:srgbClr val="DDD6FE"/>
           </a:solidFill>
           <a:ln w="19050">
             <a:solidFill>
-              <a:srgbClr val="0D9488"/>
+              <a:srgbClr val="7C3AED"/>
             </a:solidFill>
             <a:prstDash val="solid"/>
           </a:ln>
@@ -19006,7 +18868,7 @@
         </p:nvSpPr>
         <p:spPr>
           <a:xfrm>
-            <a:off x="2938272" y="2258568"/>
+            <a:off x="2221992" y="2258568"/>
             <a:ext cx="1828800" cy="292608"/>
           </a:xfrm>
           <a:prstGeom prst="rect">
@@ -19025,13 +18887,13 @@
             <a:r>
               <a:rPr lang="en-US" sz="1300" b="1" dirty="0">
                 <a:solidFill>
-                  <a:srgbClr val="0F766E"/>
+                  <a:srgbClr val="4C1D95"/>
                 </a:solidFill>
                 <a:latin typeface="Trebuchet MS" pitchFamily="34" charset="0"/>
                 <a:ea typeface="Trebuchet MS" pitchFamily="34" charset="-122"/>
                 <a:cs typeface="Trebuchet MS" pitchFamily="34" charset="-120"/>
               </a:rPr>
-              <a:t>work</a:t>
+              <a:t>over</a:t>
             </a:r>
             <a:endParaRPr lang="en-US" sz="1300" dirty="0"/>
           </a:p>
@@ -19045,7 +18907,7 @@
         </p:nvSpPr>
         <p:spPr>
           <a:xfrm>
-            <a:off x="2938272" y="2569464"/>
+            <a:off x="2221992" y="2569464"/>
             <a:ext cx="1828800" cy="201168"/>
           </a:xfrm>
           <a:prstGeom prst="rect">
@@ -19070,7 +18932,7 @@
                 <a:ea typeface="Calibri" pitchFamily="34" charset="-122"/>
                 <a:cs typeface="Calibri" pitchFamily="34" charset="-120"/>
               </a:rPr>
-              <a:t>effort or labour</a:t>
+              <a:t>too much</a:t>
             </a:r>
             <a:endParaRPr lang="en-US" sz="850" dirty="0"/>
           </a:p>
@@ -19084,7 +18946,7 @@
         </p:nvSpPr>
         <p:spPr>
           <a:xfrm>
-            <a:off x="5803392" y="2258568"/>
+            <a:off x="4370832" y="2258568"/>
             <a:ext cx="1828800" cy="292608"/>
           </a:xfrm>
           <a:prstGeom prst="rect">
@@ -19093,11 +18955,11 @@
             </a:avLst>
           </a:prstGeom>
           <a:solidFill>
-            <a:srgbClr val="FCE7F3"/>
+            <a:srgbClr val="CCFBF1"/>
           </a:solidFill>
           <a:ln w="19050">
             <a:solidFill>
-              <a:srgbClr val="DB2777"/>
+              <a:srgbClr val="0D9488"/>
             </a:solidFill>
             <a:prstDash val="solid"/>
           </a:ln>
@@ -19118,7 +18980,7 @@
         </p:nvSpPr>
         <p:spPr>
           <a:xfrm>
-            <a:off x="5803392" y="2258568"/>
+            <a:off x="4370832" y="2258568"/>
             <a:ext cx="1828800" cy="292608"/>
           </a:xfrm>
           <a:prstGeom prst="rect">
@@ -19137,13 +18999,13 @@
             <a:r>
               <a:rPr lang="en-US" sz="1300" b="1" dirty="0">
                 <a:solidFill>
-                  <a:srgbClr val="9D174D"/>
+                  <a:srgbClr val="0F766E"/>
                 </a:solidFill>
                 <a:latin typeface="Trebuchet MS" pitchFamily="34" charset="0"/>
                 <a:ea typeface="Trebuchet MS" pitchFamily="34" charset="-122"/>
                 <a:cs typeface="Trebuchet MS" pitchFamily="34" charset="-120"/>
               </a:rPr>
-              <a:t>shop</a:t>
+              <a:t>work</a:t>
             </a:r>
             <a:endParaRPr lang="en-US" sz="1300" dirty="0"/>
           </a:p>
@@ -19157,7 +19019,7 @@
         </p:nvSpPr>
         <p:spPr>
           <a:xfrm>
-            <a:off x="5803392" y="2569464"/>
+            <a:off x="4370832" y="2569464"/>
             <a:ext cx="1828800" cy="201168"/>
           </a:xfrm>
           <a:prstGeom prst="rect">
@@ -19182,7 +19044,7 @@
                 <a:ea typeface="Calibri" pitchFamily="34" charset="-122"/>
                 <a:cs typeface="Calibri" pitchFamily="34" charset="-120"/>
               </a:rPr>
-              <a:t>a place for activity</a:t>
+              <a:t>to do or make effort</a:t>
             </a:r>
             <a:endParaRPr lang="en-US" sz="850" dirty="0"/>
           </a:p>
@@ -19191,6 +19053,118 @@
       <p:sp>
         <p:nvSpPr>
           <p:cNvPr id="22" name="Shape 20"/>
+          <p:cNvSpPr/>
+          <p:nvPr/>
+        </p:nvSpPr>
+        <p:spPr>
+          <a:xfrm>
+            <a:off x="6519672" y="2258568"/>
+            <a:ext cx="1828800" cy="292608"/>
+          </a:xfrm>
+          <a:prstGeom prst="rect">
+            <a:avLst>
+              <a:gd name="adj" fmla="val 25000"/>
+            </a:avLst>
+          </a:prstGeom>
+          <a:solidFill>
+            <a:srgbClr val="FCE7F3"/>
+          </a:solidFill>
+          <a:ln w="19050">
+            <a:solidFill>
+              <a:srgbClr val="DB2777"/>
+            </a:solidFill>
+            <a:prstDash val="solid"/>
+          </a:ln>
+          <a:effectLst>
+            <a:outerShdw sx="100000" sy="100000" kx="0" ky="0" algn="bl" rotWithShape="0" blurRad="101600" dist="38100" dir="8100000">
+              <a:srgbClr val="000000">
+                <a:alpha val="12000"/>
+              </a:srgbClr>
+            </a:outerShdw>
+          </a:effectLst>
+        </p:spPr>
+      </p:sp>
+      <p:sp>
+        <p:nvSpPr>
+          <p:cNvPr id="23" name="Text 21"/>
+          <p:cNvSpPr/>
+          <p:nvPr/>
+        </p:nvSpPr>
+        <p:spPr>
+          <a:xfrm>
+            <a:off x="6519672" y="2258568"/>
+            <a:ext cx="1828800" cy="292608"/>
+          </a:xfrm>
+          <a:prstGeom prst="rect">
+            <a:avLst/>
+          </a:prstGeom>
+          <a:noFill/>
+          <a:ln/>
+        </p:spPr>
+        <p:txBody>
+          <a:bodyPr wrap="square" lIns="0" tIns="0" rIns="0" bIns="0" rtlCol="0" anchor="ctr"/>
+          <a:lstStyle/>
+          <a:p>
+            <a:pPr algn="ctr" indent="0" marL="0">
+              <a:buNone/>
+            </a:pPr>
+            <a:r>
+              <a:rPr lang="en-US" sz="1300" b="1" dirty="0">
+                <a:solidFill>
+                  <a:srgbClr val="9D174D"/>
+                </a:solidFill>
+                <a:latin typeface="Trebuchet MS" pitchFamily="34" charset="0"/>
+                <a:ea typeface="Trebuchet MS" pitchFamily="34" charset="-122"/>
+                <a:cs typeface="Trebuchet MS" pitchFamily="34" charset="-120"/>
+              </a:rPr>
+              <a:t>ed</a:t>
+            </a:r>
+            <a:endParaRPr lang="en-US" sz="1300" dirty="0"/>
+          </a:p>
+        </p:txBody>
+      </p:sp>
+      <p:sp>
+        <p:nvSpPr>
+          <p:cNvPr id="24" name="Text 22"/>
+          <p:cNvSpPr/>
+          <p:nvPr/>
+        </p:nvSpPr>
+        <p:spPr>
+          <a:xfrm>
+            <a:off x="6519672" y="2569464"/>
+            <a:ext cx="1828800" cy="201168"/>
+          </a:xfrm>
+          <a:prstGeom prst="rect">
+            <a:avLst/>
+          </a:prstGeom>
+          <a:noFill/>
+          <a:ln/>
+        </p:spPr>
+        <p:txBody>
+          <a:bodyPr wrap="square" lIns="0" tIns="0" rIns="0" bIns="0" rtlCol="0" anchor="t"/>
+          <a:lstStyle/>
+          <a:p>
+            <a:pPr algn="ctr" indent="0" marL="0">
+              <a:buNone/>
+            </a:pPr>
+            <a:r>
+              <a:rPr lang="en-US" sz="850" dirty="0">
+                <a:solidFill>
+                  <a:srgbClr val="475569"/>
+                </a:solidFill>
+                <a:latin typeface="Calibri" pitchFamily="34" charset="0"/>
+                <a:ea typeface="Calibri" pitchFamily="34" charset="-122"/>
+                <a:cs typeface="Calibri" pitchFamily="34" charset="-120"/>
+              </a:rPr>
+              <a:t>in the past</a:t>
+            </a:r>
+            <a:endParaRPr lang="en-US" sz="850" dirty="0"/>
+          </a:p>
+        </p:txBody>
+      </p:sp>
+      <p:sp>
+        <p:nvSpPr>
+          <p:cNvPr id="25" name="Shape 23"/>
           <p:cNvSpPr/>
           <p:nvPr/>
         </p:nvSpPr>
@@ -19217,7 +19191,7 @@
       </p:sp>
       <p:sp>
         <p:nvSpPr>
-          <p:cNvPr id="23" name="Text 21"/>
+          <p:cNvPr id="26" name="Text 24"/>
           <p:cNvSpPr/>
           <p:nvPr/>
         </p:nvSpPr>
@@ -19256,7 +19230,7 @@
       </p:sp>
       <p:sp>
         <p:nvSpPr>
-          <p:cNvPr id="24" name="Shape 22"/>
+          <p:cNvPr id="27" name="Shape 25"/>
           <p:cNvSpPr/>
           <p:nvPr/>
         </p:nvSpPr>
@@ -19283,7 +19257,7 @@
       </p:sp>
       <p:sp>
         <p:nvSpPr>
-          <p:cNvPr id="25" name="Text 23"/>
+          <p:cNvPr id="28" name="Text 26"/>
           <p:cNvSpPr/>
           <p:nvPr/>
         </p:nvSpPr>
@@ -19322,7 +19296,7 @@
       </p:sp>
       <p:sp>
         <p:nvSpPr>
-          <p:cNvPr id="26" name="Shape 24"/>
+          <p:cNvPr id="29" name="Shape 27"/>
           <p:cNvSpPr/>
           <p:nvPr/>
         </p:nvSpPr>
@@ -19349,7 +19323,7 @@
       </p:sp>
       <p:sp>
         <p:nvSpPr>
-          <p:cNvPr id="27" name="Text 25"/>
+          <p:cNvPr id="30" name="Text 28"/>
           <p:cNvSpPr/>
           <p:nvPr/>
         </p:nvSpPr>
@@ -19388,7 +19362,7 @@
       </p:sp>
       <p:sp>
         <p:nvSpPr>
-          <p:cNvPr id="28" name="Shape 26"/>
+          <p:cNvPr id="31" name="Shape 29"/>
           <p:cNvSpPr/>
           <p:nvPr/>
         </p:nvSpPr>
@@ -19415,7 +19389,7 @@
       </p:sp>
       <p:sp>
         <p:nvSpPr>
-          <p:cNvPr id="29" name="Text 27"/>
+          <p:cNvPr id="32" name="Text 30"/>
           <p:cNvSpPr/>
           <p:nvPr/>
         </p:nvSpPr>
@@ -19738,7 +19712,7 @@
                 <a:ea typeface="Calibri" pitchFamily="34" charset="-122"/>
                 <a:cs typeface="Calibri" pitchFamily="34" charset="-120"/>
               </a:rPr>
-              <a:t>Word Labs  •  wordlabs.app  •  Root: 'work' = to do effort or labour</a:t>
+              <a:t>Word Labs  •  wordlabs.app  •  Root: 'work' = to do or make effort</a:t>
             </a:r>
             <a:endParaRPr lang="en-US" sz="800" dirty="0"/>
           </a:p>
@@ -19877,7 +19851,7 @@
                 <a:ea typeface="Trebuchet MS" pitchFamily="34" charset="-122"/>
                 <a:cs typeface="Trebuchet MS" pitchFamily="34" charset="-120"/>
               </a:rPr>
-              <a:t>workshop</a:t>
+              <a:t>overworked</a:t>
             </a:r>
             <a:endParaRPr lang="en-US" sz="2800" dirty="0"/>
           </a:p>
@@ -19957,7 +19931,7 @@
         </p:nvSpPr>
         <p:spPr>
           <a:xfrm>
-            <a:off x="2938272" y="2258568"/>
+            <a:off x="2221992" y="2258568"/>
             <a:ext cx="1828800" cy="292608"/>
           </a:xfrm>
           <a:prstGeom prst="rect">
@@ -19966,11 +19940,11 @@
             </a:avLst>
           </a:prstGeom>
           <a:solidFill>
-            <a:srgbClr val="CCFBF1"/>
+            <a:srgbClr val="DDD6FE"/>
           </a:solidFill>
           <a:ln w="19050">
             <a:solidFill>
-              <a:srgbClr val="0D9488"/>
+              <a:srgbClr val="7C3AED"/>
             </a:solidFill>
             <a:prstDash val="solid"/>
           </a:ln>
@@ -19991,7 +19965,7 @@
         </p:nvSpPr>
         <p:spPr>
           <a:xfrm>
-            <a:off x="2938272" y="2258568"/>
+            <a:off x="2221992" y="2258568"/>
             <a:ext cx="1828800" cy="292608"/>
           </a:xfrm>
           <a:prstGeom prst="rect">
@@ -20010,13 +19984,13 @@
             <a:r>
               <a:rPr lang="en-US" sz="1300" b="1" dirty="0">
                 <a:solidFill>
-                  <a:srgbClr val="0F766E"/>
+                  <a:srgbClr val="4C1D95"/>
                 </a:solidFill>
                 <a:latin typeface="Trebuchet MS" pitchFamily="34" charset="0"/>
                 <a:ea typeface="Trebuchet MS" pitchFamily="34" charset="-122"/>
                 <a:cs typeface="Trebuchet MS" pitchFamily="34" charset="-120"/>
               </a:rPr>
-              <a:t>work</a:t>
+              <a:t>over</a:t>
             </a:r>
             <a:endParaRPr lang="en-US" sz="1300" dirty="0"/>
           </a:p>
@@ -20030,7 +20004,7 @@
         </p:nvSpPr>
         <p:spPr>
           <a:xfrm>
-            <a:off x="2938272" y="2569464"/>
+            <a:off x="2221992" y="2569464"/>
             <a:ext cx="1828800" cy="201168"/>
           </a:xfrm>
           <a:prstGeom prst="rect">
@@ -20055,7 +20029,7 @@
                 <a:ea typeface="Calibri" pitchFamily="34" charset="-122"/>
                 <a:cs typeface="Calibri" pitchFamily="34" charset="-120"/>
               </a:rPr>
-              <a:t>effort or labour</a:t>
+              <a:t>too much</a:t>
             </a:r>
             <a:endParaRPr lang="en-US" sz="850" dirty="0"/>
           </a:p>
@@ -20069,7 +20043,7 @@
         </p:nvSpPr>
         <p:spPr>
           <a:xfrm>
-            <a:off x="5803392" y="2258568"/>
+            <a:off x="4370832" y="2258568"/>
             <a:ext cx="1828800" cy="292608"/>
           </a:xfrm>
           <a:prstGeom prst="rect">
@@ -20078,11 +20052,11 @@
             </a:avLst>
           </a:prstGeom>
           <a:solidFill>
-            <a:srgbClr val="FCE7F3"/>
+            <a:srgbClr val="CCFBF1"/>
           </a:solidFill>
           <a:ln w="19050">
             <a:solidFill>
-              <a:srgbClr val="DB2777"/>
+              <a:srgbClr val="0D9488"/>
             </a:solidFill>
             <a:prstDash val="solid"/>
           </a:ln>
@@ -20103,7 +20077,7 @@
         </p:nvSpPr>
         <p:spPr>
           <a:xfrm>
-            <a:off x="5803392" y="2258568"/>
+            <a:off x="4370832" y="2258568"/>
             <a:ext cx="1828800" cy="292608"/>
           </a:xfrm>
           <a:prstGeom prst="rect">
@@ -20122,13 +20096,13 @@
             <a:r>
               <a:rPr lang="en-US" sz="1300" b="1" dirty="0">
                 <a:solidFill>
-                  <a:srgbClr val="9D174D"/>
+                  <a:srgbClr val="0F766E"/>
                 </a:solidFill>
                 <a:latin typeface="Trebuchet MS" pitchFamily="34" charset="0"/>
                 <a:ea typeface="Trebuchet MS" pitchFamily="34" charset="-122"/>
                 <a:cs typeface="Trebuchet MS" pitchFamily="34" charset="-120"/>
               </a:rPr>
-              <a:t>shop</a:t>
+              <a:t>work</a:t>
             </a:r>
             <a:endParaRPr lang="en-US" sz="1300" dirty="0"/>
           </a:p>
@@ -20142,7 +20116,7 @@
         </p:nvSpPr>
         <p:spPr>
           <a:xfrm>
-            <a:off x="5803392" y="2569464"/>
+            <a:off x="4370832" y="2569464"/>
             <a:ext cx="1828800" cy="201168"/>
           </a:xfrm>
           <a:prstGeom prst="rect">
@@ -20167,7 +20141,7 @@
                 <a:ea typeface="Calibri" pitchFamily="34" charset="-122"/>
                 <a:cs typeface="Calibri" pitchFamily="34" charset="-120"/>
               </a:rPr>
-              <a:t>a place for activity</a:t>
+              <a:t>to do or make effort</a:t>
             </a:r>
             <a:endParaRPr lang="en-US" sz="850" dirty="0"/>
           </a:p>
@@ -20176,6 +20150,118 @@
       <p:sp>
         <p:nvSpPr>
           <p:cNvPr id="22" name="Shape 20"/>
+          <p:cNvSpPr/>
+          <p:nvPr/>
+        </p:nvSpPr>
+        <p:spPr>
+          <a:xfrm>
+            <a:off x="6519672" y="2258568"/>
+            <a:ext cx="1828800" cy="292608"/>
+          </a:xfrm>
+          <a:prstGeom prst="rect">
+            <a:avLst>
+              <a:gd name="adj" fmla="val 25000"/>
+            </a:avLst>
+          </a:prstGeom>
+          <a:solidFill>
+            <a:srgbClr val="FCE7F3"/>
+          </a:solidFill>
+          <a:ln w="19050">
+            <a:solidFill>
+              <a:srgbClr val="DB2777"/>
+            </a:solidFill>
+            <a:prstDash val="solid"/>
+          </a:ln>
+          <a:effectLst>
+            <a:outerShdw sx="100000" sy="100000" kx="0" ky="0" algn="bl" rotWithShape="0" blurRad="101600" dist="38100" dir="8100000">
+              <a:srgbClr val="000000">
+                <a:alpha val="12000"/>
+              </a:srgbClr>
+            </a:outerShdw>
+          </a:effectLst>
+        </p:spPr>
+      </p:sp>
+      <p:sp>
+        <p:nvSpPr>
+          <p:cNvPr id="23" name="Text 21"/>
+          <p:cNvSpPr/>
+          <p:nvPr/>
+        </p:nvSpPr>
+        <p:spPr>
+          <a:xfrm>
+            <a:off x="6519672" y="2258568"/>
+            <a:ext cx="1828800" cy="292608"/>
+          </a:xfrm>
+          <a:prstGeom prst="rect">
+            <a:avLst/>
+          </a:prstGeom>
+          <a:noFill/>
+          <a:ln/>
+        </p:spPr>
+        <p:txBody>
+          <a:bodyPr wrap="square" lIns="0" tIns="0" rIns="0" bIns="0" rtlCol="0" anchor="ctr"/>
+          <a:lstStyle/>
+          <a:p>
+            <a:pPr algn="ctr" indent="0" marL="0">
+              <a:buNone/>
+            </a:pPr>
+            <a:r>
+              <a:rPr lang="en-US" sz="1300" b="1" dirty="0">
+                <a:solidFill>
+                  <a:srgbClr val="9D174D"/>
+                </a:solidFill>
+                <a:latin typeface="Trebuchet MS" pitchFamily="34" charset="0"/>
+                <a:ea typeface="Trebuchet MS" pitchFamily="34" charset="-122"/>
+                <a:cs typeface="Trebuchet MS" pitchFamily="34" charset="-120"/>
+              </a:rPr>
+              <a:t>ed</a:t>
+            </a:r>
+            <a:endParaRPr lang="en-US" sz="1300" dirty="0"/>
+          </a:p>
+        </p:txBody>
+      </p:sp>
+      <p:sp>
+        <p:nvSpPr>
+          <p:cNvPr id="24" name="Text 22"/>
+          <p:cNvSpPr/>
+          <p:nvPr/>
+        </p:nvSpPr>
+        <p:spPr>
+          <a:xfrm>
+            <a:off x="6519672" y="2569464"/>
+            <a:ext cx="1828800" cy="201168"/>
+          </a:xfrm>
+          <a:prstGeom prst="rect">
+            <a:avLst/>
+          </a:prstGeom>
+          <a:noFill/>
+          <a:ln/>
+        </p:spPr>
+        <p:txBody>
+          <a:bodyPr wrap="square" lIns="0" tIns="0" rIns="0" bIns="0" rtlCol="0" anchor="t"/>
+          <a:lstStyle/>
+          <a:p>
+            <a:pPr algn="ctr" indent="0" marL="0">
+              <a:buNone/>
+            </a:pPr>
+            <a:r>
+              <a:rPr lang="en-US" sz="850" dirty="0">
+                <a:solidFill>
+                  <a:srgbClr val="475569"/>
+                </a:solidFill>
+                <a:latin typeface="Calibri" pitchFamily="34" charset="0"/>
+                <a:ea typeface="Calibri" pitchFamily="34" charset="-122"/>
+                <a:cs typeface="Calibri" pitchFamily="34" charset="-120"/>
+              </a:rPr>
+              <a:t>in the past</a:t>
+            </a:r>
+            <a:endParaRPr lang="en-US" sz="850" dirty="0"/>
+          </a:p>
+        </p:txBody>
+      </p:sp>
+      <p:sp>
+        <p:nvSpPr>
+          <p:cNvPr id="25" name="Shape 23"/>
           <p:cNvSpPr/>
           <p:nvPr/>
         </p:nvSpPr>
@@ -20202,7 +20288,7 @@
       </p:sp>
       <p:sp>
         <p:nvSpPr>
-          <p:cNvPr id="23" name="Text 21"/>
+          <p:cNvPr id="26" name="Text 24"/>
           <p:cNvSpPr/>
           <p:nvPr/>
         </p:nvSpPr>
@@ -20241,7 +20327,7 @@
       </p:sp>
       <p:sp>
         <p:nvSpPr>
-          <p:cNvPr id="24" name="Shape 22"/>
+          <p:cNvPr id="27" name="Shape 25"/>
           <p:cNvSpPr/>
           <p:nvPr/>
         </p:nvSpPr>
@@ -20268,13 +20354,13 @@
       </p:sp>
       <p:sp>
         <p:nvSpPr>
-          <p:cNvPr id="25" name="Shape 23"/>
-          <p:cNvSpPr/>
-          <p:nvPr/>
-        </p:nvSpPr>
-        <p:spPr>
-          <a:xfrm>
-            <a:off x="2999232" y="3364992"/>
+          <p:cNvPr id="28" name="Shape 26"/>
+          <p:cNvSpPr/>
+          <p:nvPr/>
+        </p:nvSpPr>
+        <p:spPr>
+          <a:xfrm>
+            <a:off x="2313432" y="3364992"/>
             <a:ext cx="1645920" cy="475488"/>
           </a:xfrm>
           <a:prstGeom prst="rect">
@@ -20295,13 +20381,13 @@
       </p:sp>
       <p:sp>
         <p:nvSpPr>
-          <p:cNvPr id="26" name="Text 24"/>
-          <p:cNvSpPr/>
-          <p:nvPr/>
-        </p:nvSpPr>
-        <p:spPr>
-          <a:xfrm>
-            <a:off x="2999232" y="3364992"/>
+          <p:cNvPr id="29" name="Text 27"/>
+          <p:cNvSpPr/>
+          <p:nvPr/>
+        </p:nvSpPr>
+        <p:spPr>
+          <a:xfrm>
+            <a:off x="2313432" y="3364992"/>
             <a:ext cx="1645920" cy="475488"/>
           </a:xfrm>
           <a:prstGeom prst="rect">
@@ -20326,7 +20412,7 @@
                 <a:ea typeface="Trebuchet MS" pitchFamily="34" charset="-122"/>
                 <a:cs typeface="Trebuchet MS" pitchFamily="34" charset="-120"/>
               </a:rPr>
-              <a:t>work</a:t>
+              <a:t>o</a:t>
             </a:r>
             <a:endParaRPr lang="en-US" sz="1400" dirty="0"/>
           </a:p>
@@ -20334,14 +20420,14 @@
       </p:sp>
       <p:sp>
         <p:nvSpPr>
-          <p:cNvPr id="27" name="Text 25"/>
-          <p:cNvSpPr/>
-          <p:nvPr/>
-        </p:nvSpPr>
-        <p:spPr>
-          <a:xfrm>
-            <a:off x="4645152" y="3364992"/>
-            <a:ext cx="1097280" cy="475488"/>
+          <p:cNvPr id="30" name="Text 28"/>
+          <p:cNvSpPr/>
+          <p:nvPr/>
+        </p:nvSpPr>
+        <p:spPr>
+          <a:xfrm>
+            <a:off x="3959352" y="3364992"/>
+            <a:ext cx="411480" cy="475488"/>
           </a:xfrm>
           <a:prstGeom prst="rect">
             <a:avLst/>
@@ -20373,13 +20459,13 @@
       </p:sp>
       <p:sp>
         <p:nvSpPr>
-          <p:cNvPr id="28" name="Shape 26"/>
-          <p:cNvSpPr/>
-          <p:nvPr/>
-        </p:nvSpPr>
-        <p:spPr>
-          <a:xfrm>
-            <a:off x="5742432" y="3364992"/>
+          <p:cNvPr id="31" name="Shape 29"/>
+          <p:cNvSpPr/>
+          <p:nvPr/>
+        </p:nvSpPr>
+        <p:spPr>
+          <a:xfrm>
+            <a:off x="4370832" y="3364992"/>
             <a:ext cx="1645920" cy="475488"/>
           </a:xfrm>
           <a:prstGeom prst="rect">
@@ -20400,13 +20486,13 @@
       </p:sp>
       <p:sp>
         <p:nvSpPr>
-          <p:cNvPr id="29" name="Text 27"/>
-          <p:cNvSpPr/>
-          <p:nvPr/>
-        </p:nvSpPr>
-        <p:spPr>
-          <a:xfrm>
-            <a:off x="5742432" y="3364992"/>
+          <p:cNvPr id="32" name="Text 30"/>
+          <p:cNvSpPr/>
+          <p:nvPr/>
+        </p:nvSpPr>
+        <p:spPr>
+          <a:xfrm>
+            <a:off x="4370832" y="3364992"/>
             <a:ext cx="1645920" cy="475488"/>
           </a:xfrm>
           <a:prstGeom prst="rect">
@@ -20431,7 +20517,7 @@
                 <a:ea typeface="Trebuchet MS" pitchFamily="34" charset="-122"/>
                 <a:cs typeface="Trebuchet MS" pitchFamily="34" charset="-120"/>
               </a:rPr>
-              <a:t>shop</a:t>
+              <a:t>ver</a:t>
             </a:r>
             <a:endParaRPr lang="en-US" sz="1400" dirty="0"/>
           </a:p>
@@ -20439,7 +20525,112 @@
       </p:sp>
       <p:sp>
         <p:nvSpPr>
-          <p:cNvPr id="30" name="Shape 28"/>
+          <p:cNvPr id="33" name="Text 31"/>
+          <p:cNvSpPr/>
+          <p:nvPr/>
+        </p:nvSpPr>
+        <p:spPr>
+          <a:xfrm>
+            <a:off x="6016752" y="3364992"/>
+            <a:ext cx="411480" cy="475488"/>
+          </a:xfrm>
+          <a:prstGeom prst="rect">
+            <a:avLst/>
+          </a:prstGeom>
+          <a:noFill/>
+          <a:ln/>
+        </p:spPr>
+        <p:txBody>
+          <a:bodyPr wrap="square" lIns="0" tIns="0" rIns="0" bIns="0" rtlCol="0" anchor="ctr"/>
+          <a:lstStyle/>
+          <a:p>
+            <a:pPr algn="ctr" indent="0" marL="0">
+              <a:buNone/>
+            </a:pPr>
+            <a:r>
+              <a:rPr lang="en-US" sz="1600" b="1" dirty="0">
+                <a:solidFill>
+                  <a:srgbClr val="0D9488"/>
+                </a:solidFill>
+                <a:latin typeface="Trebuchet MS" pitchFamily="34" charset="0"/>
+                <a:ea typeface="Trebuchet MS" pitchFamily="34" charset="-122"/>
+                <a:cs typeface="Trebuchet MS" pitchFamily="34" charset="-120"/>
+              </a:rPr>
+              <a:t>·</a:t>
+            </a:r>
+            <a:endParaRPr lang="en-US" sz="1600" dirty="0"/>
+          </a:p>
+        </p:txBody>
+      </p:sp>
+      <p:sp>
+        <p:nvSpPr>
+          <p:cNvPr id="34" name="Shape 32"/>
+          <p:cNvSpPr/>
+          <p:nvPr/>
+        </p:nvSpPr>
+        <p:spPr>
+          <a:xfrm>
+            <a:off x="6428232" y="3364992"/>
+            <a:ext cx="1645920" cy="475488"/>
+          </a:xfrm>
+          <a:prstGeom prst="rect">
+            <a:avLst>
+              <a:gd name="adj" fmla="val 9615"/>
+            </a:avLst>
+          </a:prstGeom>
+          <a:solidFill>
+            <a:srgbClr val="FFFFFF"/>
+          </a:solidFill>
+          <a:ln w="12700">
+            <a:solidFill>
+              <a:srgbClr val="0D9488"/>
+            </a:solidFill>
+            <a:prstDash val="solid"/>
+          </a:ln>
+        </p:spPr>
+      </p:sp>
+      <p:sp>
+        <p:nvSpPr>
+          <p:cNvPr id="35" name="Text 33"/>
+          <p:cNvSpPr/>
+          <p:nvPr/>
+        </p:nvSpPr>
+        <p:spPr>
+          <a:xfrm>
+            <a:off x="6428232" y="3364992"/>
+            <a:ext cx="1645920" cy="475488"/>
+          </a:xfrm>
+          <a:prstGeom prst="rect">
+            <a:avLst/>
+          </a:prstGeom>
+          <a:noFill/>
+          <a:ln/>
+        </p:spPr>
+        <p:txBody>
+          <a:bodyPr wrap="square" lIns="0" tIns="0" rIns="0" bIns="0" rtlCol="0" anchor="ctr"/>
+          <a:lstStyle/>
+          <a:p>
+            <a:pPr algn="ctr" indent="0" marL="0">
+              <a:buNone/>
+            </a:pPr>
+            <a:r>
+              <a:rPr lang="en-US" sz="1400" b="1" dirty="0">
+                <a:solidFill>
+                  <a:srgbClr val="0D9488"/>
+                </a:solidFill>
+                <a:latin typeface="Trebuchet MS" pitchFamily="34" charset="0"/>
+                <a:ea typeface="Trebuchet MS" pitchFamily="34" charset="-122"/>
+                <a:cs typeface="Trebuchet MS" pitchFamily="34" charset="-120"/>
+              </a:rPr>
+              <a:t>worked</a:t>
+            </a:r>
+            <a:endParaRPr lang="en-US" sz="1400" dirty="0"/>
+          </a:p>
+        </p:txBody>
+      </p:sp>
+      <p:sp>
+        <p:nvSpPr>
+          <p:cNvPr id="36" name="Shape 34"/>
           <p:cNvSpPr/>
           <p:nvPr/>
         </p:nvSpPr>
@@ -20466,7 +20657,7 @@
       </p:sp>
       <p:sp>
         <p:nvSpPr>
-          <p:cNvPr id="31" name="Text 29"/>
+          <p:cNvPr id="37" name="Text 35"/>
           <p:cNvSpPr/>
           <p:nvPr/>
         </p:nvSpPr>
@@ -20505,7 +20696,7 @@
       </p:sp>
       <p:sp>
         <p:nvSpPr>
-          <p:cNvPr id="32" name="Shape 30"/>
+          <p:cNvPr id="38" name="Shape 36"/>
           <p:cNvSpPr/>
           <p:nvPr/>
         </p:nvSpPr>
@@ -20532,7 +20723,7 @@
       </p:sp>
       <p:sp>
         <p:nvSpPr>
-          <p:cNvPr id="33" name="Text 31"/>
+          <p:cNvPr id="39" name="Text 37"/>
           <p:cNvSpPr/>
           <p:nvPr/>
         </p:nvSpPr>
@@ -20855,7 +21046,7 @@
                 <a:ea typeface="Calibri" pitchFamily="34" charset="-122"/>
                 <a:cs typeface="Calibri" pitchFamily="34" charset="-120"/>
               </a:rPr>
-              <a:t>Word Labs  •  wordlabs.app  •  Root: 'work' = to do effort or labour</a:t>
+              <a:t>Word Labs  •  wordlabs.app  •  Root: 'work' = to do or make effort</a:t>
             </a:r>
             <a:endParaRPr lang="en-US" sz="800" dirty="0"/>
           </a:p>
@@ -20994,7 +21185,7 @@
                 <a:ea typeface="Trebuchet MS" pitchFamily="34" charset="-122"/>
                 <a:cs typeface="Trebuchet MS" pitchFamily="34" charset="-120"/>
               </a:rPr>
-              <a:t>workshop</a:t>
+              <a:t>overworked</a:t>
             </a:r>
             <a:endParaRPr lang="en-US" sz="2800" dirty="0"/>
           </a:p>
@@ -21074,7 +21265,7 @@
         </p:nvSpPr>
         <p:spPr>
           <a:xfrm>
-            <a:off x="2938272" y="2258568"/>
+            <a:off x="2221992" y="2258568"/>
             <a:ext cx="1828800" cy="292608"/>
           </a:xfrm>
           <a:prstGeom prst="rect">
@@ -21083,11 +21274,11 @@
             </a:avLst>
           </a:prstGeom>
           <a:solidFill>
-            <a:srgbClr val="CCFBF1"/>
+            <a:srgbClr val="DDD6FE"/>
           </a:solidFill>
           <a:ln w="19050">
             <a:solidFill>
-              <a:srgbClr val="0D9488"/>
+              <a:srgbClr val="7C3AED"/>
             </a:solidFill>
             <a:prstDash val="solid"/>
           </a:ln>
@@ -21108,7 +21299,7 @@
         </p:nvSpPr>
         <p:spPr>
           <a:xfrm>
-            <a:off x="2938272" y="2258568"/>
+            <a:off x="2221992" y="2258568"/>
             <a:ext cx="1828800" cy="292608"/>
           </a:xfrm>
           <a:prstGeom prst="rect">
@@ -21127,13 +21318,13 @@
             <a:r>
               <a:rPr lang="en-US" sz="1300" b="1" dirty="0">
                 <a:solidFill>
-                  <a:srgbClr val="0F766E"/>
+                  <a:srgbClr val="4C1D95"/>
                 </a:solidFill>
                 <a:latin typeface="Trebuchet MS" pitchFamily="34" charset="0"/>
                 <a:ea typeface="Trebuchet MS" pitchFamily="34" charset="-122"/>
                 <a:cs typeface="Trebuchet MS" pitchFamily="34" charset="-120"/>
               </a:rPr>
-              <a:t>work</a:t>
+              <a:t>over</a:t>
             </a:r>
             <a:endParaRPr lang="en-US" sz="1300" dirty="0"/>
           </a:p>
@@ -21147,7 +21338,7 @@
         </p:nvSpPr>
         <p:spPr>
           <a:xfrm>
-            <a:off x="2938272" y="2569464"/>
+            <a:off x="2221992" y="2569464"/>
             <a:ext cx="1828800" cy="201168"/>
           </a:xfrm>
           <a:prstGeom prst="rect">
@@ -21172,7 +21363,7 @@
                 <a:ea typeface="Calibri" pitchFamily="34" charset="-122"/>
                 <a:cs typeface="Calibri" pitchFamily="34" charset="-120"/>
               </a:rPr>
-              <a:t>effort or labour</a:t>
+              <a:t>too much</a:t>
             </a:r>
             <a:endParaRPr lang="en-US" sz="850" dirty="0"/>
           </a:p>
@@ -21186,7 +21377,7 @@
         </p:nvSpPr>
         <p:spPr>
           <a:xfrm>
-            <a:off x="5803392" y="2258568"/>
+            <a:off x="4370832" y="2258568"/>
             <a:ext cx="1828800" cy="292608"/>
           </a:xfrm>
           <a:prstGeom prst="rect">
@@ -21195,11 +21386,11 @@
             </a:avLst>
           </a:prstGeom>
           <a:solidFill>
-            <a:srgbClr val="FCE7F3"/>
+            <a:srgbClr val="CCFBF1"/>
           </a:solidFill>
           <a:ln w="19050">
             <a:solidFill>
-              <a:srgbClr val="DB2777"/>
+              <a:srgbClr val="0D9488"/>
             </a:solidFill>
             <a:prstDash val="solid"/>
           </a:ln>
@@ -21220,7 +21411,7 @@
         </p:nvSpPr>
         <p:spPr>
           <a:xfrm>
-            <a:off x="5803392" y="2258568"/>
+            <a:off x="4370832" y="2258568"/>
             <a:ext cx="1828800" cy="292608"/>
           </a:xfrm>
           <a:prstGeom prst="rect">
@@ -21239,13 +21430,13 @@
             <a:r>
               <a:rPr lang="en-US" sz="1300" b="1" dirty="0">
                 <a:solidFill>
-                  <a:srgbClr val="9D174D"/>
+                  <a:srgbClr val="0F766E"/>
                 </a:solidFill>
                 <a:latin typeface="Trebuchet MS" pitchFamily="34" charset="0"/>
                 <a:ea typeface="Trebuchet MS" pitchFamily="34" charset="-122"/>
                 <a:cs typeface="Trebuchet MS" pitchFamily="34" charset="-120"/>
               </a:rPr>
-              <a:t>shop</a:t>
+              <a:t>work</a:t>
             </a:r>
             <a:endParaRPr lang="en-US" sz="1300" dirty="0"/>
           </a:p>
@@ -21259,7 +21450,7 @@
         </p:nvSpPr>
         <p:spPr>
           <a:xfrm>
-            <a:off x="5803392" y="2569464"/>
+            <a:off x="4370832" y="2569464"/>
             <a:ext cx="1828800" cy="201168"/>
           </a:xfrm>
           <a:prstGeom prst="rect">
@@ -21284,7 +21475,7 @@
                 <a:ea typeface="Calibri" pitchFamily="34" charset="-122"/>
                 <a:cs typeface="Calibri" pitchFamily="34" charset="-120"/>
               </a:rPr>
-              <a:t>a place for activity</a:t>
+              <a:t>to do or make effort</a:t>
             </a:r>
             <a:endParaRPr lang="en-US" sz="850" dirty="0"/>
           </a:p>
@@ -21293,6 +21484,118 @@
       <p:sp>
         <p:nvSpPr>
           <p:cNvPr id="22" name="Shape 20"/>
+          <p:cNvSpPr/>
+          <p:nvPr/>
+        </p:nvSpPr>
+        <p:spPr>
+          <a:xfrm>
+            <a:off x="6519672" y="2258568"/>
+            <a:ext cx="1828800" cy="292608"/>
+          </a:xfrm>
+          <a:prstGeom prst="rect">
+            <a:avLst>
+              <a:gd name="adj" fmla="val 25000"/>
+            </a:avLst>
+          </a:prstGeom>
+          <a:solidFill>
+            <a:srgbClr val="FCE7F3"/>
+          </a:solidFill>
+          <a:ln w="19050">
+            <a:solidFill>
+              <a:srgbClr val="DB2777"/>
+            </a:solidFill>
+            <a:prstDash val="solid"/>
+          </a:ln>
+          <a:effectLst>
+            <a:outerShdw sx="100000" sy="100000" kx="0" ky="0" algn="bl" rotWithShape="0" blurRad="101600" dist="38100" dir="8100000">
+              <a:srgbClr val="000000">
+                <a:alpha val="12000"/>
+              </a:srgbClr>
+            </a:outerShdw>
+          </a:effectLst>
+        </p:spPr>
+      </p:sp>
+      <p:sp>
+        <p:nvSpPr>
+          <p:cNvPr id="23" name="Text 21"/>
+          <p:cNvSpPr/>
+          <p:nvPr/>
+        </p:nvSpPr>
+        <p:spPr>
+          <a:xfrm>
+            <a:off x="6519672" y="2258568"/>
+            <a:ext cx="1828800" cy="292608"/>
+          </a:xfrm>
+          <a:prstGeom prst="rect">
+            <a:avLst/>
+          </a:prstGeom>
+          <a:noFill/>
+          <a:ln/>
+        </p:spPr>
+        <p:txBody>
+          <a:bodyPr wrap="square" lIns="0" tIns="0" rIns="0" bIns="0" rtlCol="0" anchor="ctr"/>
+          <a:lstStyle/>
+          <a:p>
+            <a:pPr algn="ctr" indent="0" marL="0">
+              <a:buNone/>
+            </a:pPr>
+            <a:r>
+              <a:rPr lang="en-US" sz="1300" b="1" dirty="0">
+                <a:solidFill>
+                  <a:srgbClr val="9D174D"/>
+                </a:solidFill>
+                <a:latin typeface="Trebuchet MS" pitchFamily="34" charset="0"/>
+                <a:ea typeface="Trebuchet MS" pitchFamily="34" charset="-122"/>
+                <a:cs typeface="Trebuchet MS" pitchFamily="34" charset="-120"/>
+              </a:rPr>
+              <a:t>ed</a:t>
+            </a:r>
+            <a:endParaRPr lang="en-US" sz="1300" dirty="0"/>
+          </a:p>
+        </p:txBody>
+      </p:sp>
+      <p:sp>
+        <p:nvSpPr>
+          <p:cNvPr id="24" name="Text 22"/>
+          <p:cNvSpPr/>
+          <p:nvPr/>
+        </p:nvSpPr>
+        <p:spPr>
+          <a:xfrm>
+            <a:off x="6519672" y="2569464"/>
+            <a:ext cx="1828800" cy="201168"/>
+          </a:xfrm>
+          <a:prstGeom prst="rect">
+            <a:avLst/>
+          </a:prstGeom>
+          <a:noFill/>
+          <a:ln/>
+        </p:spPr>
+        <p:txBody>
+          <a:bodyPr wrap="square" lIns="0" tIns="0" rIns="0" bIns="0" rtlCol="0" anchor="t"/>
+          <a:lstStyle/>
+          <a:p>
+            <a:pPr algn="ctr" indent="0" marL="0">
+              <a:buNone/>
+            </a:pPr>
+            <a:r>
+              <a:rPr lang="en-US" sz="850" dirty="0">
+                <a:solidFill>
+                  <a:srgbClr val="475569"/>
+                </a:solidFill>
+                <a:latin typeface="Calibri" pitchFamily="34" charset="0"/>
+                <a:ea typeface="Calibri" pitchFamily="34" charset="-122"/>
+                <a:cs typeface="Calibri" pitchFamily="34" charset="-120"/>
+              </a:rPr>
+              <a:t>in the past</a:t>
+            </a:r>
+            <a:endParaRPr lang="en-US" sz="850" dirty="0"/>
+          </a:p>
+        </p:txBody>
+      </p:sp>
+      <p:sp>
+        <p:nvSpPr>
+          <p:cNvPr id="25" name="Shape 23"/>
           <p:cNvSpPr/>
           <p:nvPr/>
         </p:nvSpPr>
@@ -21319,7 +21622,7 @@
       </p:sp>
       <p:sp>
         <p:nvSpPr>
-          <p:cNvPr id="23" name="Text 21"/>
+          <p:cNvPr id="26" name="Text 24"/>
           <p:cNvSpPr/>
           <p:nvPr/>
         </p:nvSpPr>
@@ -21358,7 +21661,7 @@
       </p:sp>
       <p:sp>
         <p:nvSpPr>
-          <p:cNvPr id="24" name="Shape 22"/>
+          <p:cNvPr id="27" name="Shape 25"/>
           <p:cNvSpPr/>
           <p:nvPr/>
         </p:nvSpPr>
@@ -21385,13 +21688,13 @@
       </p:sp>
       <p:sp>
         <p:nvSpPr>
-          <p:cNvPr id="25" name="Shape 23"/>
-          <p:cNvSpPr/>
-          <p:nvPr/>
-        </p:nvSpPr>
-        <p:spPr>
-          <a:xfrm>
-            <a:off x="2999232" y="3364992"/>
+          <p:cNvPr id="28" name="Shape 26"/>
+          <p:cNvSpPr/>
+          <p:nvPr/>
+        </p:nvSpPr>
+        <p:spPr>
+          <a:xfrm>
+            <a:off x="2313432" y="3364992"/>
             <a:ext cx="1645920" cy="475488"/>
           </a:xfrm>
           <a:prstGeom prst="rect">
@@ -21412,13 +21715,13 @@
       </p:sp>
       <p:sp>
         <p:nvSpPr>
-          <p:cNvPr id="26" name="Text 24"/>
-          <p:cNvSpPr/>
-          <p:nvPr/>
-        </p:nvSpPr>
-        <p:spPr>
-          <a:xfrm>
-            <a:off x="2999232" y="3364992"/>
+          <p:cNvPr id="29" name="Text 27"/>
+          <p:cNvSpPr/>
+          <p:nvPr/>
+        </p:nvSpPr>
+        <p:spPr>
+          <a:xfrm>
+            <a:off x="2313432" y="3364992"/>
             <a:ext cx="1645920" cy="475488"/>
           </a:xfrm>
           <a:prstGeom prst="rect">
@@ -21443,7 +21746,7 @@
                 <a:ea typeface="Trebuchet MS" pitchFamily="34" charset="-122"/>
                 <a:cs typeface="Trebuchet MS" pitchFamily="34" charset="-120"/>
               </a:rPr>
-              <a:t>work</a:t>
+              <a:t>o</a:t>
             </a:r>
             <a:endParaRPr lang="en-US" sz="1400" dirty="0"/>
           </a:p>
@@ -21451,14 +21754,14 @@
       </p:sp>
       <p:sp>
         <p:nvSpPr>
-          <p:cNvPr id="27" name="Text 25"/>
-          <p:cNvSpPr/>
-          <p:nvPr/>
-        </p:nvSpPr>
-        <p:spPr>
-          <a:xfrm>
-            <a:off x="4645152" y="3364992"/>
-            <a:ext cx="1097280" cy="475488"/>
+          <p:cNvPr id="30" name="Text 28"/>
+          <p:cNvSpPr/>
+          <p:nvPr/>
+        </p:nvSpPr>
+        <p:spPr>
+          <a:xfrm>
+            <a:off x="3959352" y="3364992"/>
+            <a:ext cx="411480" cy="475488"/>
           </a:xfrm>
           <a:prstGeom prst="rect">
             <a:avLst/>
@@ -21490,13 +21793,13 @@
       </p:sp>
       <p:sp>
         <p:nvSpPr>
-          <p:cNvPr id="28" name="Shape 26"/>
-          <p:cNvSpPr/>
-          <p:nvPr/>
-        </p:nvSpPr>
-        <p:spPr>
-          <a:xfrm>
-            <a:off x="5742432" y="3364992"/>
+          <p:cNvPr id="31" name="Shape 29"/>
+          <p:cNvSpPr/>
+          <p:nvPr/>
+        </p:nvSpPr>
+        <p:spPr>
+          <a:xfrm>
+            <a:off x="4370832" y="3364992"/>
             <a:ext cx="1645920" cy="475488"/>
           </a:xfrm>
           <a:prstGeom prst="rect">
@@ -21517,13 +21820,13 @@
       </p:sp>
       <p:sp>
         <p:nvSpPr>
-          <p:cNvPr id="29" name="Text 27"/>
-          <p:cNvSpPr/>
-          <p:nvPr/>
-        </p:nvSpPr>
-        <p:spPr>
-          <a:xfrm>
-            <a:off x="5742432" y="3364992"/>
+          <p:cNvPr id="32" name="Text 30"/>
+          <p:cNvSpPr/>
+          <p:nvPr/>
+        </p:nvSpPr>
+        <p:spPr>
+          <a:xfrm>
+            <a:off x="4370832" y="3364992"/>
             <a:ext cx="1645920" cy="475488"/>
           </a:xfrm>
           <a:prstGeom prst="rect">
@@ -21548,7 +21851,7 @@
                 <a:ea typeface="Trebuchet MS" pitchFamily="34" charset="-122"/>
                 <a:cs typeface="Trebuchet MS" pitchFamily="34" charset="-120"/>
               </a:rPr>
-              <a:t>shop</a:t>
+              <a:t>ver</a:t>
             </a:r>
             <a:endParaRPr lang="en-US" sz="1400" dirty="0"/>
           </a:p>
@@ -21556,7 +21859,112 @@
       </p:sp>
       <p:sp>
         <p:nvSpPr>
-          <p:cNvPr id="30" name="Shape 28"/>
+          <p:cNvPr id="33" name="Text 31"/>
+          <p:cNvSpPr/>
+          <p:nvPr/>
+        </p:nvSpPr>
+        <p:spPr>
+          <a:xfrm>
+            <a:off x="6016752" y="3364992"/>
+            <a:ext cx="411480" cy="475488"/>
+          </a:xfrm>
+          <a:prstGeom prst="rect">
+            <a:avLst/>
+          </a:prstGeom>
+          <a:noFill/>
+          <a:ln/>
+        </p:spPr>
+        <p:txBody>
+          <a:bodyPr wrap="square" lIns="0" tIns="0" rIns="0" bIns="0" rtlCol="0" anchor="ctr"/>
+          <a:lstStyle/>
+          <a:p>
+            <a:pPr algn="ctr" indent="0" marL="0">
+              <a:buNone/>
+            </a:pPr>
+            <a:r>
+              <a:rPr lang="en-US" sz="1600" b="1" dirty="0">
+                <a:solidFill>
+                  <a:srgbClr val="0D9488"/>
+                </a:solidFill>
+                <a:latin typeface="Trebuchet MS" pitchFamily="34" charset="0"/>
+                <a:ea typeface="Trebuchet MS" pitchFamily="34" charset="-122"/>
+                <a:cs typeface="Trebuchet MS" pitchFamily="34" charset="-120"/>
+              </a:rPr>
+              <a:t>·</a:t>
+            </a:r>
+            <a:endParaRPr lang="en-US" sz="1600" dirty="0"/>
+          </a:p>
+        </p:txBody>
+      </p:sp>
+      <p:sp>
+        <p:nvSpPr>
+          <p:cNvPr id="34" name="Shape 32"/>
+          <p:cNvSpPr/>
+          <p:nvPr/>
+        </p:nvSpPr>
+        <p:spPr>
+          <a:xfrm>
+            <a:off x="6428232" y="3364992"/>
+            <a:ext cx="1645920" cy="475488"/>
+          </a:xfrm>
+          <a:prstGeom prst="rect">
+            <a:avLst>
+              <a:gd name="adj" fmla="val 9615"/>
+            </a:avLst>
+          </a:prstGeom>
+          <a:solidFill>
+            <a:srgbClr val="FFFFFF"/>
+          </a:solidFill>
+          <a:ln w="12700">
+            <a:solidFill>
+              <a:srgbClr val="0D9488"/>
+            </a:solidFill>
+            <a:prstDash val="solid"/>
+          </a:ln>
+        </p:spPr>
+      </p:sp>
+      <p:sp>
+        <p:nvSpPr>
+          <p:cNvPr id="35" name="Text 33"/>
+          <p:cNvSpPr/>
+          <p:nvPr/>
+        </p:nvSpPr>
+        <p:spPr>
+          <a:xfrm>
+            <a:off x="6428232" y="3364992"/>
+            <a:ext cx="1645920" cy="475488"/>
+          </a:xfrm>
+          <a:prstGeom prst="rect">
+            <a:avLst/>
+          </a:prstGeom>
+          <a:noFill/>
+          <a:ln/>
+        </p:spPr>
+        <p:txBody>
+          <a:bodyPr wrap="square" lIns="0" tIns="0" rIns="0" bIns="0" rtlCol="0" anchor="ctr"/>
+          <a:lstStyle/>
+          <a:p>
+            <a:pPr algn="ctr" indent="0" marL="0">
+              <a:buNone/>
+            </a:pPr>
+            <a:r>
+              <a:rPr lang="en-US" sz="1400" b="1" dirty="0">
+                <a:solidFill>
+                  <a:srgbClr val="0D9488"/>
+                </a:solidFill>
+                <a:latin typeface="Trebuchet MS" pitchFamily="34" charset="0"/>
+                <a:ea typeface="Trebuchet MS" pitchFamily="34" charset="-122"/>
+                <a:cs typeface="Trebuchet MS" pitchFamily="34" charset="-120"/>
+              </a:rPr>
+              <a:t>worked</a:t>
+            </a:r>
+            <a:endParaRPr lang="en-US" sz="1400" dirty="0"/>
+          </a:p>
+        </p:txBody>
+      </p:sp>
+      <p:sp>
+        <p:nvSpPr>
+          <p:cNvPr id="36" name="Shape 34"/>
           <p:cNvSpPr/>
           <p:nvPr/>
         </p:nvSpPr>
@@ -21583,7 +21991,7 @@
       </p:sp>
       <p:sp>
         <p:nvSpPr>
-          <p:cNvPr id="31" name="Text 29"/>
+          <p:cNvPr id="37" name="Text 35"/>
           <p:cNvSpPr/>
           <p:nvPr/>
         </p:nvSpPr>
@@ -21622,18 +22030,18 @@
       </p:sp>
       <p:sp>
         <p:nvSpPr>
-          <p:cNvPr id="32" name="Shape 30"/>
+          <p:cNvPr id="38" name="Shape 36"/>
           <p:cNvSpPr/>
           <p:nvPr/>
         </p:nvSpPr>
         <p:spPr>
           <a:xfrm>
             <a:off x="1874520" y="4096512"/>
-            <a:ext cx="6903720" cy="658368"/>
+            <a:ext cx="6903720" cy="804672"/>
           </a:xfrm>
           <a:prstGeom prst="rect">
             <a:avLst>
-              <a:gd name="adj" fmla="val 8333"/>
+              <a:gd name="adj" fmla="val 6818"/>
             </a:avLst>
           </a:prstGeom>
           <a:solidFill>
@@ -21649,18 +22057,18 @@
       </p:sp>
       <p:sp>
         <p:nvSpPr>
-          <p:cNvPr id="33" name="Shape 31"/>
-          <p:cNvSpPr/>
-          <p:nvPr/>
-        </p:nvSpPr>
-        <p:spPr>
-          <a:xfrm>
-            <a:off x="2254649" y="4169664"/>
-            <a:ext cx="685800" cy="475488"/>
+          <p:cNvPr id="39" name="Shape 37"/>
+          <p:cNvSpPr/>
+          <p:nvPr/>
+        </p:nvSpPr>
+        <p:spPr>
+          <a:xfrm>
+            <a:off x="1951330" y="4169664"/>
+            <a:ext cx="676656" cy="384048"/>
           </a:xfrm>
           <a:prstGeom prst="rect">
             <a:avLst>
-              <a:gd name="adj" fmla="val 7692"/>
+              <a:gd name="adj" fmla="val 9524"/>
             </a:avLst>
           </a:prstGeom>
           <a:solidFill>
@@ -21676,14 +22084,14 @@
       </p:sp>
       <p:sp>
         <p:nvSpPr>
-          <p:cNvPr id="34" name="Text 32"/>
-          <p:cNvSpPr/>
-          <p:nvPr/>
-        </p:nvSpPr>
-        <p:spPr>
-          <a:xfrm>
-            <a:off x="2254649" y="4169664"/>
-            <a:ext cx="685800" cy="475488"/>
+          <p:cNvPr id="40" name="Text 38"/>
+          <p:cNvSpPr/>
+          <p:nvPr/>
+        </p:nvSpPr>
+        <p:spPr>
+          <a:xfrm>
+            <a:off x="1951330" y="4169664"/>
+            <a:ext cx="676656" cy="384048"/>
           </a:xfrm>
           <a:prstGeom prst="rect">
             <a:avLst/>
@@ -21707,7 +22115,7 @@
                 <a:ea typeface="Trebuchet MS" pitchFamily="34" charset="-122"/>
                 <a:cs typeface="Trebuchet MS" pitchFamily="34" charset="-120"/>
               </a:rPr>
-              <a:t>w</a:t>
+              <a:t>o</a:t>
             </a:r>
             <a:endParaRPr lang="en-US" sz="900" dirty="0"/>
           </a:p>
@@ -21715,18 +22123,18 @@
       </p:sp>
       <p:sp>
         <p:nvSpPr>
-          <p:cNvPr id="35" name="Shape 33"/>
-          <p:cNvSpPr/>
-          <p:nvPr/>
-        </p:nvSpPr>
-        <p:spPr>
-          <a:xfrm>
-            <a:off x="3293146" y="4169664"/>
-            <a:ext cx="685800" cy="475488"/>
+          <p:cNvPr id="41" name="Shape 39"/>
+          <p:cNvSpPr/>
+          <p:nvPr/>
+        </p:nvSpPr>
+        <p:spPr>
+          <a:xfrm>
+            <a:off x="2677363" y="4169664"/>
+            <a:ext cx="676656" cy="384048"/>
           </a:xfrm>
           <a:prstGeom prst="rect">
             <a:avLst>
-              <a:gd name="adj" fmla="val 7692"/>
+              <a:gd name="adj" fmla="val 9524"/>
             </a:avLst>
           </a:prstGeom>
           <a:solidFill>
@@ -21742,14 +22150,14 @@
       </p:sp>
       <p:sp>
         <p:nvSpPr>
-          <p:cNvPr id="36" name="Text 34"/>
-          <p:cNvSpPr/>
-          <p:nvPr/>
-        </p:nvSpPr>
-        <p:spPr>
-          <a:xfrm>
-            <a:off x="3293146" y="4169664"/>
-            <a:ext cx="685800" cy="475488"/>
+          <p:cNvPr id="42" name="Text 40"/>
+          <p:cNvSpPr/>
+          <p:nvPr/>
+        </p:nvSpPr>
+        <p:spPr>
+          <a:xfrm>
+            <a:off x="2677363" y="4169664"/>
+            <a:ext cx="676656" cy="384048"/>
           </a:xfrm>
           <a:prstGeom prst="rect">
             <a:avLst/>
@@ -21773,7 +22181,7 @@
                 <a:ea typeface="Trebuchet MS" pitchFamily="34" charset="-122"/>
                 <a:cs typeface="Trebuchet MS" pitchFamily="34" charset="-120"/>
               </a:rPr>
-              <a:t>or</a:t>
+              <a:t>v</a:t>
             </a:r>
             <a:endParaRPr lang="en-US" sz="900" dirty="0"/>
           </a:p>
@@ -21781,18 +22189,18 @@
       </p:sp>
       <p:sp>
         <p:nvSpPr>
-          <p:cNvPr id="37" name="Shape 35"/>
-          <p:cNvSpPr/>
-          <p:nvPr/>
-        </p:nvSpPr>
-        <p:spPr>
-          <a:xfrm>
-            <a:off x="4331643" y="4169664"/>
-            <a:ext cx="685800" cy="475488"/>
+          <p:cNvPr id="43" name="Shape 41"/>
+          <p:cNvSpPr/>
+          <p:nvPr/>
+        </p:nvSpPr>
+        <p:spPr>
+          <a:xfrm>
+            <a:off x="3403397" y="4169664"/>
+            <a:ext cx="676656" cy="384048"/>
           </a:xfrm>
           <a:prstGeom prst="rect">
             <a:avLst>
-              <a:gd name="adj" fmla="val 7692"/>
+              <a:gd name="adj" fmla="val 9524"/>
             </a:avLst>
           </a:prstGeom>
           <a:solidFill>
@@ -21808,14 +22216,14 @@
       </p:sp>
       <p:sp>
         <p:nvSpPr>
-          <p:cNvPr id="38" name="Text 36"/>
-          <p:cNvSpPr/>
-          <p:nvPr/>
-        </p:nvSpPr>
-        <p:spPr>
-          <a:xfrm>
-            <a:off x="4331643" y="4169664"/>
-            <a:ext cx="685800" cy="475488"/>
+          <p:cNvPr id="44" name="Text 42"/>
+          <p:cNvSpPr/>
+          <p:nvPr/>
+        </p:nvSpPr>
+        <p:spPr>
+          <a:xfrm>
+            <a:off x="3403397" y="4169664"/>
+            <a:ext cx="676656" cy="384048"/>
           </a:xfrm>
           <a:prstGeom prst="rect">
             <a:avLst/>
@@ -21839,7 +22247,7 @@
                 <a:ea typeface="Trebuchet MS" pitchFamily="34" charset="-122"/>
                 <a:cs typeface="Trebuchet MS" pitchFamily="34" charset="-120"/>
               </a:rPr>
-              <a:t>k</a:t>
+              <a:t>er</a:t>
             </a:r>
             <a:endParaRPr lang="en-US" sz="900" dirty="0"/>
           </a:p>
@@ -21847,18 +22255,18 @@
       </p:sp>
       <p:sp>
         <p:nvSpPr>
-          <p:cNvPr id="39" name="Shape 37"/>
-          <p:cNvSpPr/>
-          <p:nvPr/>
-        </p:nvSpPr>
-        <p:spPr>
-          <a:xfrm>
-            <a:off x="5370141" y="4169664"/>
-            <a:ext cx="685800" cy="475488"/>
+          <p:cNvPr id="45" name="Shape 43"/>
+          <p:cNvSpPr/>
+          <p:nvPr/>
+        </p:nvSpPr>
+        <p:spPr>
+          <a:xfrm>
+            <a:off x="4129430" y="4169664"/>
+            <a:ext cx="676656" cy="384048"/>
           </a:xfrm>
           <a:prstGeom prst="rect">
             <a:avLst>
-              <a:gd name="adj" fmla="val 7692"/>
+              <a:gd name="adj" fmla="val 9524"/>
             </a:avLst>
           </a:prstGeom>
           <a:solidFill>
@@ -21874,14 +22282,14 @@
       </p:sp>
       <p:sp>
         <p:nvSpPr>
-          <p:cNvPr id="40" name="Text 38"/>
-          <p:cNvSpPr/>
-          <p:nvPr/>
-        </p:nvSpPr>
-        <p:spPr>
-          <a:xfrm>
-            <a:off x="5370141" y="4169664"/>
-            <a:ext cx="685800" cy="475488"/>
+          <p:cNvPr id="46" name="Text 44"/>
+          <p:cNvSpPr/>
+          <p:nvPr/>
+        </p:nvSpPr>
+        <p:spPr>
+          <a:xfrm>
+            <a:off x="4129430" y="4169664"/>
+            <a:ext cx="676656" cy="384048"/>
           </a:xfrm>
           <a:prstGeom prst="rect">
             <a:avLst/>
@@ -21905,7 +22313,7 @@
                 <a:ea typeface="Trebuchet MS" pitchFamily="34" charset="-122"/>
                 <a:cs typeface="Trebuchet MS" pitchFamily="34" charset="-120"/>
               </a:rPr>
-              <a:t>sh</a:t>
+              <a:t>w</a:t>
             </a:r>
             <a:endParaRPr lang="en-US" sz="900" dirty="0"/>
           </a:p>
@@ -21913,18 +22321,18 @@
       </p:sp>
       <p:sp>
         <p:nvSpPr>
-          <p:cNvPr id="41" name="Shape 39"/>
-          <p:cNvSpPr/>
-          <p:nvPr/>
-        </p:nvSpPr>
-        <p:spPr>
-          <a:xfrm>
-            <a:off x="6408638" y="4169664"/>
-            <a:ext cx="685800" cy="475488"/>
+          <p:cNvPr id="47" name="Shape 45"/>
+          <p:cNvSpPr/>
+          <p:nvPr/>
+        </p:nvSpPr>
+        <p:spPr>
+          <a:xfrm>
+            <a:off x="4855464" y="4169664"/>
+            <a:ext cx="676656" cy="384048"/>
           </a:xfrm>
           <a:prstGeom prst="rect">
             <a:avLst>
-              <a:gd name="adj" fmla="val 7692"/>
+              <a:gd name="adj" fmla="val 9524"/>
             </a:avLst>
           </a:prstGeom>
           <a:solidFill>
@@ -21940,14 +22348,14 @@
       </p:sp>
       <p:sp>
         <p:nvSpPr>
-          <p:cNvPr id="42" name="Text 40"/>
-          <p:cNvSpPr/>
-          <p:nvPr/>
-        </p:nvSpPr>
-        <p:spPr>
-          <a:xfrm>
-            <a:off x="6408638" y="4169664"/>
-            <a:ext cx="685800" cy="475488"/>
+          <p:cNvPr id="48" name="Text 46"/>
+          <p:cNvSpPr/>
+          <p:nvPr/>
+        </p:nvSpPr>
+        <p:spPr>
+          <a:xfrm>
+            <a:off x="4855464" y="4169664"/>
+            <a:ext cx="676656" cy="384048"/>
           </a:xfrm>
           <a:prstGeom prst="rect">
             <a:avLst/>
@@ -21971,7 +22379,7 @@
                 <a:ea typeface="Trebuchet MS" pitchFamily="34" charset="-122"/>
                 <a:cs typeface="Trebuchet MS" pitchFamily="34" charset="-120"/>
               </a:rPr>
-              <a:t>o</a:t>
+              <a:t>or</a:t>
             </a:r>
             <a:endParaRPr lang="en-US" sz="900" dirty="0"/>
           </a:p>
@@ -21979,18 +22387,18 @@
       </p:sp>
       <p:sp>
         <p:nvSpPr>
-          <p:cNvPr id="43" name="Shape 41"/>
-          <p:cNvSpPr/>
-          <p:nvPr/>
-        </p:nvSpPr>
-        <p:spPr>
-          <a:xfrm>
-            <a:off x="7447135" y="4169664"/>
-            <a:ext cx="685800" cy="475488"/>
+          <p:cNvPr id="49" name="Shape 47"/>
+          <p:cNvSpPr/>
+          <p:nvPr/>
+        </p:nvSpPr>
+        <p:spPr>
+          <a:xfrm>
+            <a:off x="5581498" y="4169664"/>
+            <a:ext cx="676656" cy="384048"/>
           </a:xfrm>
           <a:prstGeom prst="rect">
             <a:avLst>
-              <a:gd name="adj" fmla="val 7692"/>
+              <a:gd name="adj" fmla="val 9524"/>
             </a:avLst>
           </a:prstGeom>
           <a:solidFill>
@@ -22006,14 +22414,14 @@
       </p:sp>
       <p:sp>
         <p:nvSpPr>
-          <p:cNvPr id="44" name="Text 42"/>
-          <p:cNvSpPr/>
-          <p:nvPr/>
-        </p:nvSpPr>
-        <p:spPr>
-          <a:xfrm>
-            <a:off x="7447135" y="4169664"/>
-            <a:ext cx="685800" cy="475488"/>
+          <p:cNvPr id="50" name="Text 48"/>
+          <p:cNvSpPr/>
+          <p:nvPr/>
+        </p:nvSpPr>
+        <p:spPr>
+          <a:xfrm>
+            <a:off x="5581498" y="4169664"/>
+            <a:ext cx="676656" cy="384048"/>
           </a:xfrm>
           <a:prstGeom prst="rect">
             <a:avLst/>
@@ -22037,9 +22445,285 @@
                 <a:ea typeface="Trebuchet MS" pitchFamily="34" charset="-122"/>
                 <a:cs typeface="Trebuchet MS" pitchFamily="34" charset="-120"/>
               </a:rPr>
-              <a:t>p</a:t>
+              <a:t>k</a:t>
             </a:r>
             <a:endParaRPr lang="en-US" sz="900" dirty="0"/>
+          </a:p>
+        </p:txBody>
+      </p:sp>
+      <p:sp>
+        <p:nvSpPr>
+          <p:cNvPr id="51" name="Shape 49"/>
+          <p:cNvSpPr/>
+          <p:nvPr/>
+        </p:nvSpPr>
+        <p:spPr>
+          <a:xfrm>
+            <a:off x="6307531" y="4169664"/>
+            <a:ext cx="676656" cy="384048"/>
+          </a:xfrm>
+          <a:prstGeom prst="rect">
+            <a:avLst>
+              <a:gd name="adj" fmla="val 9524"/>
+            </a:avLst>
+          </a:prstGeom>
+          <a:solidFill>
+            <a:srgbClr val="FFFFFF"/>
+          </a:solidFill>
+          <a:ln w="12700">
+            <a:solidFill>
+              <a:srgbClr val="DB2777"/>
+            </a:solidFill>
+            <a:prstDash val="solid"/>
+          </a:ln>
+        </p:spPr>
+      </p:sp>
+      <p:sp>
+        <p:nvSpPr>
+          <p:cNvPr id="52" name="Text 50"/>
+          <p:cNvSpPr/>
+          <p:nvPr/>
+        </p:nvSpPr>
+        <p:spPr>
+          <a:xfrm>
+            <a:off x="6307531" y="4169664"/>
+            <a:ext cx="676656" cy="384048"/>
+          </a:xfrm>
+          <a:prstGeom prst="rect">
+            <a:avLst/>
+          </a:prstGeom>
+          <a:noFill/>
+          <a:ln/>
+        </p:spPr>
+        <p:txBody>
+          <a:bodyPr wrap="square" lIns="0" tIns="0" rIns="0" bIns="0" rtlCol="0" anchor="ctr"/>
+          <a:lstStyle/>
+          <a:p>
+            <a:pPr algn="ctr" indent="0" marL="0">
+              <a:buNone/>
+            </a:pPr>
+            <a:r>
+              <a:rPr lang="en-US" sz="900" b="1" dirty="0">
+                <a:solidFill>
+                  <a:srgbClr val="9D174D"/>
+                </a:solidFill>
+                <a:latin typeface="Trebuchet MS" pitchFamily="34" charset="0"/>
+                <a:ea typeface="Trebuchet MS" pitchFamily="34" charset="-122"/>
+                <a:cs typeface="Trebuchet MS" pitchFamily="34" charset="-120"/>
+              </a:rPr>
+              <a:t>t</a:t>
+            </a:r>
+            <a:endParaRPr lang="en-US" sz="900" dirty="0"/>
+          </a:p>
+        </p:txBody>
+      </p:sp>
+      <p:sp>
+        <p:nvSpPr>
+          <p:cNvPr id="53" name="Text 51"/>
+          <p:cNvSpPr/>
+          <p:nvPr/>
+        </p:nvSpPr>
+        <p:spPr>
+          <a:xfrm>
+            <a:off x="6307531" y="4572000"/>
+            <a:ext cx="676656" cy="219456"/>
+          </a:xfrm>
+          <a:prstGeom prst="rect">
+            <a:avLst/>
+          </a:prstGeom>
+          <a:noFill/>
+          <a:ln/>
+        </p:spPr>
+        <p:txBody>
+          <a:bodyPr wrap="square" lIns="0" tIns="0" rIns="0" bIns="0" rtlCol="0" anchor="t"/>
+          <a:lstStyle/>
+          <a:p>
+            <a:pPr algn="ctr" indent="0" marL="0">
+              <a:buNone/>
+            </a:pPr>
+            <a:r>
+              <a:rPr lang="en-US" sz="750" i="1" dirty="0">
+                <a:solidFill>
+                  <a:srgbClr val="94A3B8"/>
+                </a:solidFill>
+                <a:latin typeface="Calibri" pitchFamily="34" charset="0"/>
+                <a:ea typeface="Calibri" pitchFamily="34" charset="-122"/>
+                <a:cs typeface="Calibri" pitchFamily="34" charset="-120"/>
+              </a:rPr>
+              <a:t>/t/</a:t>
+            </a:r>
+            <a:endParaRPr lang="en-US" sz="750" dirty="0"/>
+          </a:p>
+        </p:txBody>
+      </p:sp>
+      <p:sp>
+        <p:nvSpPr>
+          <p:cNvPr id="54" name="Shape 52"/>
+          <p:cNvSpPr/>
+          <p:nvPr/>
+        </p:nvSpPr>
+        <p:spPr>
+          <a:xfrm>
+            <a:off x="7033565" y="4169664"/>
+            <a:ext cx="676656" cy="384048"/>
+          </a:xfrm>
+          <a:prstGeom prst="rect">
+            <a:avLst>
+              <a:gd name="adj" fmla="val 9524"/>
+            </a:avLst>
+          </a:prstGeom>
+          <a:solidFill>
+            <a:srgbClr val="FFFFFF"/>
+          </a:solidFill>
+          <a:ln w="12700">
+            <a:solidFill>
+              <a:srgbClr val="DB2777"/>
+            </a:solidFill>
+            <a:prstDash val="solid"/>
+          </a:ln>
+        </p:spPr>
+      </p:sp>
+      <p:sp>
+        <p:nvSpPr>
+          <p:cNvPr id="55" name="Text 53"/>
+          <p:cNvSpPr/>
+          <p:nvPr/>
+        </p:nvSpPr>
+        <p:spPr>
+          <a:xfrm>
+            <a:off x="7033565" y="4169664"/>
+            <a:ext cx="676656" cy="384048"/>
+          </a:xfrm>
+          <a:prstGeom prst="rect">
+            <a:avLst/>
+          </a:prstGeom>
+          <a:noFill/>
+          <a:ln/>
+        </p:spPr>
+        <p:txBody>
+          <a:bodyPr wrap="square" lIns="0" tIns="0" rIns="0" bIns="0" rtlCol="0" anchor="ctr"/>
+          <a:lstStyle/>
+          <a:p>
+            <a:pPr algn="ctr" indent="0" marL="0">
+              <a:buNone/>
+            </a:pPr>
+            <a:r>
+              <a:rPr lang="en-US" sz="900" b="1" dirty="0">
+                <a:solidFill>
+                  <a:srgbClr val="9D174D"/>
+                </a:solidFill>
+                <a:latin typeface="Trebuchet MS" pitchFamily="34" charset="0"/>
+                <a:ea typeface="Trebuchet MS" pitchFamily="34" charset="-122"/>
+                <a:cs typeface="Trebuchet MS" pitchFamily="34" charset="-120"/>
+              </a:rPr>
+              <a:t>e</a:t>
+            </a:r>
+            <a:endParaRPr lang="en-US" sz="900" dirty="0"/>
+          </a:p>
+        </p:txBody>
+      </p:sp>
+      <p:sp>
+        <p:nvSpPr>
+          <p:cNvPr id="56" name="Shape 54"/>
+          <p:cNvSpPr/>
+          <p:nvPr/>
+        </p:nvSpPr>
+        <p:spPr>
+          <a:xfrm>
+            <a:off x="7759598" y="4169664"/>
+            <a:ext cx="676656" cy="384048"/>
+          </a:xfrm>
+          <a:prstGeom prst="rect">
+            <a:avLst>
+              <a:gd name="adj" fmla="val 9524"/>
+            </a:avLst>
+          </a:prstGeom>
+          <a:solidFill>
+            <a:srgbClr val="FFFFFF"/>
+          </a:solidFill>
+          <a:ln w="12700">
+            <a:solidFill>
+              <a:srgbClr val="DB2777"/>
+            </a:solidFill>
+            <a:prstDash val="solid"/>
+          </a:ln>
+        </p:spPr>
+      </p:sp>
+      <p:sp>
+        <p:nvSpPr>
+          <p:cNvPr id="57" name="Text 55"/>
+          <p:cNvSpPr/>
+          <p:nvPr/>
+        </p:nvSpPr>
+        <p:spPr>
+          <a:xfrm>
+            <a:off x="7759598" y="4169664"/>
+            <a:ext cx="676656" cy="384048"/>
+          </a:xfrm>
+          <a:prstGeom prst="rect">
+            <a:avLst/>
+          </a:prstGeom>
+          <a:noFill/>
+          <a:ln/>
+        </p:spPr>
+        <p:txBody>
+          <a:bodyPr wrap="square" lIns="0" tIns="0" rIns="0" bIns="0" rtlCol="0" anchor="ctr"/>
+          <a:lstStyle/>
+          <a:p>
+            <a:pPr algn="ctr" indent="0" marL="0">
+              <a:buNone/>
+            </a:pPr>
+            <a:r>
+              <a:rPr lang="en-US" sz="900" b="1" dirty="0">
+                <a:solidFill>
+                  <a:srgbClr val="9D174D"/>
+                </a:solidFill>
+                <a:latin typeface="Trebuchet MS" pitchFamily="34" charset="0"/>
+                <a:ea typeface="Trebuchet MS" pitchFamily="34" charset="-122"/>
+                <a:cs typeface="Trebuchet MS" pitchFamily="34" charset="-120"/>
+              </a:rPr>
+              <a:t>d</a:t>
+            </a:r>
+            <a:endParaRPr lang="en-US" sz="900" dirty="0"/>
+          </a:p>
+        </p:txBody>
+      </p:sp>
+      <p:sp>
+        <p:nvSpPr>
+          <p:cNvPr id="58" name="Text 56"/>
+          <p:cNvSpPr/>
+          <p:nvPr/>
+        </p:nvSpPr>
+        <p:spPr>
+          <a:xfrm>
+            <a:off x="7759598" y="4572000"/>
+            <a:ext cx="676656" cy="219456"/>
+          </a:xfrm>
+          <a:prstGeom prst="rect">
+            <a:avLst/>
+          </a:prstGeom>
+          <a:noFill/>
+          <a:ln/>
+        </p:spPr>
+        <p:txBody>
+          <a:bodyPr wrap="square" lIns="0" tIns="0" rIns="0" bIns="0" rtlCol="0" anchor="t"/>
+          <a:lstStyle/>
+          <a:p>
+            <a:pPr algn="ctr" indent="0" marL="0">
+              <a:buNone/>
+            </a:pPr>
+            <a:r>
+              <a:rPr lang="en-US" sz="750" i="1" dirty="0">
+                <a:solidFill>
+                  <a:srgbClr val="94A3B8"/>
+                </a:solidFill>
+                <a:latin typeface="Calibri" pitchFamily="34" charset="0"/>
+                <a:ea typeface="Calibri" pitchFamily="34" charset="-122"/>
+                <a:cs typeface="Calibri" pitchFamily="34" charset="-120"/>
+              </a:rPr>
+              <a:t>/d/</a:t>
+            </a:r>
+            <a:endParaRPr lang="en-US" sz="750" dirty="0"/>
           </a:p>
         </p:txBody>
       </p:sp>
@@ -22329,7 +23013,7 @@
                 <a:ea typeface="Calibri" pitchFamily="34" charset="-122"/>
                 <a:cs typeface="Calibri" pitchFamily="34" charset="-120"/>
               </a:rPr>
-              <a:t>Word Labs  •  wordlabs.app  •  Root: 'work' = to do effort or labour</a:t>
+              <a:t>Word Labs  •  wordlabs.app  •  Root: 'work' = to do or make effort</a:t>
             </a:r>
             <a:endParaRPr lang="en-US" sz="800" dirty="0"/>
           </a:p>
@@ -22468,7 +23152,7 @@
                 <a:ea typeface="Trebuchet MS" pitchFamily="34" charset="-122"/>
                 <a:cs typeface="Trebuchet MS" pitchFamily="34" charset="-120"/>
               </a:rPr>
-              <a:t>overworked</a:t>
+              <a:t>network</a:t>
             </a:r>
             <a:endParaRPr lang="en-US" sz="2800" dirty="0"/>
           </a:p>
@@ -23156,7 +23840,7 @@
                 <a:ea typeface="Calibri" pitchFamily="34" charset="-122"/>
                 <a:cs typeface="Calibri" pitchFamily="34" charset="-120"/>
               </a:rPr>
-              <a:t>Word Labs  •  wordlabs.app  •  Root: 'work' = to do effort or labour</a:t>
+              <a:t>Word Labs  •  wordlabs.app  •  Root: 'work' = to do or make effort</a:t>
             </a:r>
             <a:endParaRPr lang="en-US" sz="800" dirty="0"/>
           </a:p>
@@ -23295,7 +23979,7 @@
                 <a:ea typeface="Trebuchet MS" pitchFamily="34" charset="-122"/>
                 <a:cs typeface="Trebuchet MS" pitchFamily="34" charset="-120"/>
               </a:rPr>
-              <a:t>overworked</a:t>
+              <a:t>network</a:t>
             </a:r>
             <a:endParaRPr lang="en-US" sz="2800" dirty="0"/>
           </a:p>
@@ -23375,7 +24059,7 @@
         </p:nvSpPr>
         <p:spPr>
           <a:xfrm>
-            <a:off x="2221992" y="2258568"/>
+            <a:off x="2938272" y="2258568"/>
             <a:ext cx="1828800" cy="292608"/>
           </a:xfrm>
           <a:prstGeom prst="rect">
@@ -23409,7 +24093,7 @@
         </p:nvSpPr>
         <p:spPr>
           <a:xfrm>
-            <a:off x="2221992" y="2258568"/>
+            <a:off x="2938272" y="2258568"/>
             <a:ext cx="1828800" cy="292608"/>
           </a:xfrm>
           <a:prstGeom prst="rect">
@@ -23434,7 +24118,7 @@
                 <a:ea typeface="Trebuchet MS" pitchFamily="34" charset="-122"/>
                 <a:cs typeface="Trebuchet MS" pitchFamily="34" charset="-120"/>
               </a:rPr>
-              <a:t>over</a:t>
+              <a:t>net</a:t>
             </a:r>
             <a:endParaRPr lang="en-US" sz="1300" dirty="0"/>
           </a:p>
@@ -23448,7 +24132,7 @@
         </p:nvSpPr>
         <p:spPr>
           <a:xfrm>
-            <a:off x="2221992" y="2569464"/>
+            <a:off x="2938272" y="2569464"/>
             <a:ext cx="1828800" cy="201168"/>
           </a:xfrm>
           <a:prstGeom prst="rect">
@@ -23473,7 +24157,7 @@
                 <a:ea typeface="Calibri" pitchFamily="34" charset="-122"/>
                 <a:cs typeface="Calibri" pitchFamily="34" charset="-120"/>
               </a:rPr>
-              <a:t>too much</a:t>
+              <a:t>a connected mesh or system</a:t>
             </a:r>
             <a:endParaRPr lang="en-US" sz="850" dirty="0"/>
           </a:p>
@@ -23487,7 +24171,7 @@
         </p:nvSpPr>
         <p:spPr>
           <a:xfrm>
-            <a:off x="4370832" y="2258568"/>
+            <a:off x="5803392" y="2258568"/>
             <a:ext cx="1828800" cy="292608"/>
           </a:xfrm>
           <a:prstGeom prst="rect">
@@ -23521,7 +24205,7 @@
         </p:nvSpPr>
         <p:spPr>
           <a:xfrm>
-            <a:off x="4370832" y="2258568"/>
+            <a:off x="5803392" y="2258568"/>
             <a:ext cx="1828800" cy="292608"/>
           </a:xfrm>
           <a:prstGeom prst="rect">
@@ -23560,7 +24244,7 @@
         </p:nvSpPr>
         <p:spPr>
           <a:xfrm>
-            <a:off x="4370832" y="2569464"/>
+            <a:off x="5803392" y="2569464"/>
             <a:ext cx="1828800" cy="201168"/>
           </a:xfrm>
           <a:prstGeom prst="rect">
@@ -23585,7 +24269,7 @@
                 <a:ea typeface="Calibri" pitchFamily="34" charset="-122"/>
                 <a:cs typeface="Calibri" pitchFamily="34" charset="-120"/>
               </a:rPr>
-              <a:t>effort or labour</a:t>
+              <a:t>to do or make effort</a:t>
             </a:r>
             <a:endParaRPr lang="en-US" sz="850" dirty="0"/>
           </a:p>
@@ -23599,30 +24283,23 @@
         </p:nvSpPr>
         <p:spPr>
           <a:xfrm>
-            <a:off x="6519672" y="2258568"/>
-            <a:ext cx="1828800" cy="292608"/>
+            <a:off x="365760" y="3273552"/>
+            <a:ext cx="1371600" cy="658368"/>
           </a:xfrm>
           <a:prstGeom prst="rect">
             <a:avLst>
-              <a:gd name="adj" fmla="val 25000"/>
+              <a:gd name="adj" fmla="val 8333"/>
             </a:avLst>
           </a:prstGeom>
           <a:solidFill>
-            <a:srgbClr val="FCE7F3"/>
-          </a:solidFill>
-          <a:ln w="19050">
-            <a:solidFill>
-              <a:srgbClr val="DB2777"/>
-            </a:solidFill>
-            <a:prstDash val="solid"/>
-          </a:ln>
-          <a:effectLst>
-            <a:outerShdw sx="100000" sy="100000" kx="0" ky="0" algn="bl" rotWithShape="0" blurRad="101600" dist="38100" dir="8100000">
-              <a:srgbClr val="000000">
-                <a:alpha val="12000"/>
-              </a:srgbClr>
-            </a:outerShdw>
-          </a:effectLst>
+            <a:srgbClr val="E2E8F0"/>
+          </a:solidFill>
+          <a:ln w="12700">
+            <a:solidFill>
+              <a:srgbClr val="E2E8F0"/>
+            </a:solidFill>
+            <a:prstDash val="solid"/>
+          </a:ln>
         </p:spPr>
       </p:sp>
       <p:sp>
@@ -23633,8 +24310,8 @@
         </p:nvSpPr>
         <p:spPr>
           <a:xfrm>
-            <a:off x="6519672" y="2258568"/>
-            <a:ext cx="1828800" cy="292608"/>
+            <a:off x="365760" y="3273552"/>
+            <a:ext cx="1371600" cy="658368"/>
           </a:xfrm>
           <a:prstGeom prst="rect">
             <a:avLst/>
@@ -23650,73 +24327,100 @@
               <a:buNone/>
             </a:pPr>
             <a:r>
-              <a:rPr lang="en-US" sz="1300" b="1" dirty="0">
-                <a:solidFill>
-                  <a:srgbClr val="9D174D"/>
+              <a:rPr lang="en-US" sz="1100" b="1" dirty="0">
+                <a:solidFill>
+                  <a:srgbClr val="475569"/>
                 </a:solidFill>
                 <a:latin typeface="Trebuchet MS" pitchFamily="34" charset="0"/>
                 <a:ea typeface="Trebuchet MS" pitchFamily="34" charset="-122"/>
                 <a:cs typeface="Trebuchet MS" pitchFamily="34" charset="-120"/>
               </a:rPr>
-              <a:t>ed</a:t>
-            </a:r>
-            <a:endParaRPr lang="en-US" sz="1300" dirty="0"/>
-          </a:p>
-        </p:txBody>
-      </p:sp>
-      <p:sp>
-        <p:nvSpPr>
-          <p:cNvPr id="24" name="Text 22"/>
-          <p:cNvSpPr/>
-          <p:nvPr/>
-        </p:nvSpPr>
-        <p:spPr>
-          <a:xfrm>
-            <a:off x="6519672" y="2569464"/>
-            <a:ext cx="1828800" cy="201168"/>
-          </a:xfrm>
-          <a:prstGeom prst="rect">
-            <a:avLst/>
-          </a:prstGeom>
-          <a:noFill/>
-          <a:ln/>
-        </p:spPr>
-        <p:txBody>
-          <a:bodyPr wrap="square" lIns="0" tIns="0" rIns="0" bIns="0" rtlCol="0" anchor="t"/>
-          <a:lstStyle/>
-          <a:p>
-            <a:pPr algn="ctr" indent="0" marL="0">
-              <a:buNone/>
-            </a:pPr>
-            <a:r>
-              <a:rPr lang="en-US" sz="850" dirty="0">
-                <a:solidFill>
-                  <a:srgbClr val="475569"/>
+              <a:t>Syllables</a:t>
+            </a:r>
+            <a:endParaRPr lang="en-US" sz="1100" dirty="0"/>
+          </a:p>
+        </p:txBody>
+      </p:sp>
+      <p:sp>
+        <p:nvSpPr>
+          <p:cNvPr id="24" name="Shape 22"/>
+          <p:cNvSpPr/>
+          <p:nvPr/>
+        </p:nvSpPr>
+        <p:spPr>
+          <a:xfrm>
+            <a:off x="1874520" y="3273552"/>
+            <a:ext cx="6903720" cy="658368"/>
+          </a:xfrm>
+          <a:prstGeom prst="rect">
+            <a:avLst>
+              <a:gd name="adj" fmla="val 8333"/>
+            </a:avLst>
+          </a:prstGeom>
+          <a:solidFill>
+            <a:srgbClr val="F8FAFC"/>
+          </a:solidFill>
+          <a:ln w="12700">
+            <a:solidFill>
+              <a:srgbClr val="E2E8F0"/>
+            </a:solidFill>
+            <a:prstDash val="dash"/>
+          </a:ln>
+        </p:spPr>
+      </p:sp>
+      <p:sp>
+        <p:nvSpPr>
+          <p:cNvPr id="25" name="Text 23"/>
+          <p:cNvSpPr/>
+          <p:nvPr/>
+        </p:nvSpPr>
+        <p:spPr>
+          <a:xfrm>
+            <a:off x="1874520" y="3273552"/>
+            <a:ext cx="6903720" cy="658368"/>
+          </a:xfrm>
+          <a:prstGeom prst="rect">
+            <a:avLst/>
+          </a:prstGeom>
+          <a:noFill/>
+          <a:ln/>
+        </p:spPr>
+        <p:txBody>
+          <a:bodyPr wrap="square" rtlCol="0" anchor="ctr"/>
+          <a:lstStyle/>
+          <a:p>
+            <a:pPr algn="ctr" indent="0" marL="0">
+              <a:buNone/>
+            </a:pPr>
+            <a:r>
+              <a:rPr lang="en-US" sz="1100" i="1" dirty="0">
+                <a:solidFill>
+                  <a:srgbClr val="CBD5E1"/>
                 </a:solidFill>
                 <a:latin typeface="Calibri" pitchFamily="34" charset="0"/>
                 <a:ea typeface="Calibri" pitchFamily="34" charset="-122"/>
                 <a:cs typeface="Calibri" pitchFamily="34" charset="-120"/>
               </a:rPr>
-              <a:t>in the past</a:t>
-            </a:r>
-            <a:endParaRPr lang="en-US" sz="850" dirty="0"/>
-          </a:p>
-        </p:txBody>
-      </p:sp>
-      <p:sp>
-        <p:nvSpPr>
-          <p:cNvPr id="25" name="Shape 23"/>
-          <p:cNvSpPr/>
-          <p:nvPr/>
-        </p:nvSpPr>
-        <p:spPr>
-          <a:xfrm>
-            <a:off x="365760" y="3273552"/>
-            <a:ext cx="1371600" cy="658368"/>
+              <a:t>Write here...</a:t>
+            </a:r>
+            <a:endParaRPr lang="en-US" sz="1100" dirty="0"/>
+          </a:p>
+        </p:txBody>
+      </p:sp>
+      <p:sp>
+        <p:nvSpPr>
+          <p:cNvPr id="26" name="Shape 24"/>
+          <p:cNvSpPr/>
+          <p:nvPr/>
+        </p:nvSpPr>
+        <p:spPr>
+          <a:xfrm>
+            <a:off x="365760" y="4096512"/>
+            <a:ext cx="1371600" cy="804672"/>
           </a:xfrm>
           <a:prstGeom prst="rect">
             <a:avLst>
-              <a:gd name="adj" fmla="val 8333"/>
+              <a:gd name="adj" fmla="val 6818"/>
             </a:avLst>
           </a:prstGeom>
           <a:solidFill>
@@ -23732,14 +24436,14 @@
       </p:sp>
       <p:sp>
         <p:nvSpPr>
-          <p:cNvPr id="26" name="Text 24"/>
-          <p:cNvSpPr/>
-          <p:nvPr/>
-        </p:nvSpPr>
-        <p:spPr>
-          <a:xfrm>
-            <a:off x="365760" y="3273552"/>
-            <a:ext cx="1371600" cy="658368"/>
+          <p:cNvPr id="27" name="Text 25"/>
+          <p:cNvSpPr/>
+          <p:nvPr/>
+        </p:nvSpPr>
+        <p:spPr>
+          <a:xfrm>
+            <a:off x="365760" y="4096512"/>
+            <a:ext cx="1371600" cy="804672"/>
           </a:xfrm>
           <a:prstGeom prst="rect">
             <a:avLst/>
@@ -23763,7 +24467,7 @@
                 <a:ea typeface="Trebuchet MS" pitchFamily="34" charset="-122"/>
                 <a:cs typeface="Trebuchet MS" pitchFamily="34" charset="-120"/>
               </a:rPr>
-              <a:t>Syllables</a:t>
+              <a:t>Phonemes</a:t>
             </a:r>
             <a:endParaRPr lang="en-US" sz="1100" dirty="0"/>
           </a:p>
@@ -23771,80 +24475,14 @@
       </p:sp>
       <p:sp>
         <p:nvSpPr>
-          <p:cNvPr id="27" name="Shape 25"/>
-          <p:cNvSpPr/>
-          <p:nvPr/>
-        </p:nvSpPr>
-        <p:spPr>
-          <a:xfrm>
-            <a:off x="1874520" y="3273552"/>
-            <a:ext cx="6903720" cy="658368"/>
-          </a:xfrm>
-          <a:prstGeom prst="rect">
-            <a:avLst>
-              <a:gd name="adj" fmla="val 8333"/>
-            </a:avLst>
-          </a:prstGeom>
-          <a:solidFill>
-            <a:srgbClr val="F8FAFC"/>
-          </a:solidFill>
-          <a:ln w="12700">
-            <a:solidFill>
-              <a:srgbClr val="E2E8F0"/>
-            </a:solidFill>
-            <a:prstDash val="dash"/>
-          </a:ln>
-        </p:spPr>
-      </p:sp>
-      <p:sp>
-        <p:nvSpPr>
-          <p:cNvPr id="28" name="Text 26"/>
-          <p:cNvSpPr/>
-          <p:nvPr/>
-        </p:nvSpPr>
-        <p:spPr>
-          <a:xfrm>
-            <a:off x="1874520" y="3273552"/>
-            <a:ext cx="6903720" cy="658368"/>
-          </a:xfrm>
-          <a:prstGeom prst="rect">
-            <a:avLst/>
-          </a:prstGeom>
-          <a:noFill/>
-          <a:ln/>
-        </p:spPr>
-        <p:txBody>
-          <a:bodyPr wrap="square" rtlCol="0" anchor="ctr"/>
-          <a:lstStyle/>
-          <a:p>
-            <a:pPr algn="ctr" indent="0" marL="0">
-              <a:buNone/>
-            </a:pPr>
-            <a:r>
-              <a:rPr lang="en-US" sz="1100" i="1" dirty="0">
-                <a:solidFill>
-                  <a:srgbClr val="CBD5E1"/>
-                </a:solidFill>
-                <a:latin typeface="Calibri" pitchFamily="34" charset="0"/>
-                <a:ea typeface="Calibri" pitchFamily="34" charset="-122"/>
-                <a:cs typeface="Calibri" pitchFamily="34" charset="-120"/>
-              </a:rPr>
-              <a:t>Write here...</a:t>
-            </a:r>
-            <a:endParaRPr lang="en-US" sz="1100" dirty="0"/>
-          </a:p>
-        </p:txBody>
-      </p:sp>
-      <p:sp>
-        <p:nvSpPr>
-          <p:cNvPr id="29" name="Shape 27"/>
-          <p:cNvSpPr/>
-          <p:nvPr/>
-        </p:nvSpPr>
-        <p:spPr>
-          <a:xfrm>
-            <a:off x="365760" y="4096512"/>
-            <a:ext cx="1371600" cy="804672"/>
+          <p:cNvPr id="28" name="Shape 26"/>
+          <p:cNvSpPr/>
+          <p:nvPr/>
+        </p:nvSpPr>
+        <p:spPr>
+          <a:xfrm>
+            <a:off x="1874520" y="4096512"/>
+            <a:ext cx="6903720" cy="804672"/>
           </a:xfrm>
           <a:prstGeom prst="rect">
             <a:avLst>
@@ -23852,85 +24490,19 @@
             </a:avLst>
           </a:prstGeom>
           <a:solidFill>
-            <a:srgbClr val="E2E8F0"/>
+            <a:srgbClr val="F8FAFC"/>
           </a:solidFill>
           <a:ln w="12700">
             <a:solidFill>
               <a:srgbClr val="E2E8F0"/>
             </a:solidFill>
-            <a:prstDash val="solid"/>
-          </a:ln>
-        </p:spPr>
-      </p:sp>
-      <p:sp>
-        <p:nvSpPr>
-          <p:cNvPr id="30" name="Text 28"/>
-          <p:cNvSpPr/>
-          <p:nvPr/>
-        </p:nvSpPr>
-        <p:spPr>
-          <a:xfrm>
-            <a:off x="365760" y="4096512"/>
-            <a:ext cx="1371600" cy="804672"/>
-          </a:xfrm>
-          <a:prstGeom prst="rect">
-            <a:avLst/>
-          </a:prstGeom>
-          <a:noFill/>
-          <a:ln/>
-        </p:spPr>
-        <p:txBody>
-          <a:bodyPr wrap="square" lIns="0" tIns="0" rIns="0" bIns="0" rtlCol="0" anchor="ctr"/>
-          <a:lstStyle/>
-          <a:p>
-            <a:pPr algn="ctr" indent="0" marL="0">
-              <a:buNone/>
-            </a:pPr>
-            <a:r>
-              <a:rPr lang="en-US" sz="1100" b="1" dirty="0">
-                <a:solidFill>
-                  <a:srgbClr val="475569"/>
-                </a:solidFill>
-                <a:latin typeface="Trebuchet MS" pitchFamily="34" charset="0"/>
-                <a:ea typeface="Trebuchet MS" pitchFamily="34" charset="-122"/>
-                <a:cs typeface="Trebuchet MS" pitchFamily="34" charset="-120"/>
-              </a:rPr>
-              <a:t>Phonemes</a:t>
-            </a:r>
-            <a:endParaRPr lang="en-US" sz="1100" dirty="0"/>
-          </a:p>
-        </p:txBody>
-      </p:sp>
-      <p:sp>
-        <p:nvSpPr>
-          <p:cNvPr id="31" name="Shape 29"/>
-          <p:cNvSpPr/>
-          <p:nvPr/>
-        </p:nvSpPr>
-        <p:spPr>
-          <a:xfrm>
-            <a:off x="1874520" y="4096512"/>
-            <a:ext cx="6903720" cy="804672"/>
-          </a:xfrm>
-          <a:prstGeom prst="rect">
-            <a:avLst>
-              <a:gd name="adj" fmla="val 6818"/>
-            </a:avLst>
-          </a:prstGeom>
-          <a:solidFill>
-            <a:srgbClr val="F8FAFC"/>
-          </a:solidFill>
-          <a:ln w="12700">
-            <a:solidFill>
-              <a:srgbClr val="E2E8F0"/>
-            </a:solidFill>
             <a:prstDash val="dash"/>
           </a:ln>
         </p:spPr>
       </p:sp>
       <p:sp>
         <p:nvSpPr>
-          <p:cNvPr id="32" name="Text 30"/>
+          <p:cNvPr id="29" name="Text 27"/>
           <p:cNvSpPr/>
           <p:nvPr/>
         </p:nvSpPr>
@@ -24253,7 +24825,7 @@
                 <a:ea typeface="Calibri" pitchFamily="34" charset="-122"/>
                 <a:cs typeface="Calibri" pitchFamily="34" charset="-120"/>
               </a:rPr>
-              <a:t>Word Labs  •  wordlabs.app  •  Root: 'work' = to do effort or labour</a:t>
+              <a:t>Word Labs  •  wordlabs.app  •  Root: 'work' = to do or make effort</a:t>
             </a:r>
             <a:endParaRPr lang="en-US" sz="800" dirty="0"/>
           </a:p>
@@ -24326,7 +24898,7 @@
                 <a:ea typeface="Trebuchet MS" pitchFamily="34" charset="-122"/>
                 <a:cs typeface="Trebuchet MS" pitchFamily="34" charset="-120"/>
               </a:rPr>
-              <a:t>We are learning that the root 'work' means 'to do effort or labour'.</a:t>
+              <a:t>We are learning that the root 'work' means 'to do or make effort'.</a:t>
             </a:r>
             <a:endParaRPr lang="en-US" sz="2000" dirty="0"/>
           </a:p>
@@ -24972,7 +25544,7 @@
                 <a:ea typeface="Calibri" pitchFamily="34" charset="-122"/>
                 <a:cs typeface="Calibri" pitchFamily="34" charset="-120"/>
               </a:rPr>
-              <a:t>Word Labs  •  wordlabs.app  •  Root: 'work' = to do effort or labour</a:t>
+              <a:t>Word Labs  •  wordlabs.app  •  Root: 'work' = to do or make effort</a:t>
             </a:r>
             <a:endParaRPr lang="en-US" sz="800" dirty="0"/>
           </a:p>
@@ -25111,7 +25683,7 @@
                 <a:ea typeface="Trebuchet MS" pitchFamily="34" charset="-122"/>
                 <a:cs typeface="Trebuchet MS" pitchFamily="34" charset="-120"/>
               </a:rPr>
-              <a:t>overworked</a:t>
+              <a:t>network</a:t>
             </a:r>
             <a:endParaRPr lang="en-US" sz="2800" dirty="0"/>
           </a:p>
@@ -25191,7 +25763,7 @@
         </p:nvSpPr>
         <p:spPr>
           <a:xfrm>
-            <a:off x="2221992" y="2258568"/>
+            <a:off x="2938272" y="2258568"/>
             <a:ext cx="1828800" cy="292608"/>
           </a:xfrm>
           <a:prstGeom prst="rect">
@@ -25225,7 +25797,7 @@
         </p:nvSpPr>
         <p:spPr>
           <a:xfrm>
-            <a:off x="2221992" y="2258568"/>
+            <a:off x="2938272" y="2258568"/>
             <a:ext cx="1828800" cy="292608"/>
           </a:xfrm>
           <a:prstGeom prst="rect">
@@ -25250,7 +25822,7 @@
                 <a:ea typeface="Trebuchet MS" pitchFamily="34" charset="-122"/>
                 <a:cs typeface="Trebuchet MS" pitchFamily="34" charset="-120"/>
               </a:rPr>
-              <a:t>over</a:t>
+              <a:t>net</a:t>
             </a:r>
             <a:endParaRPr lang="en-US" sz="1300" dirty="0"/>
           </a:p>
@@ -25264,7 +25836,7 @@
         </p:nvSpPr>
         <p:spPr>
           <a:xfrm>
-            <a:off x="2221992" y="2569464"/>
+            <a:off x="2938272" y="2569464"/>
             <a:ext cx="1828800" cy="201168"/>
           </a:xfrm>
           <a:prstGeom prst="rect">
@@ -25289,7 +25861,7 @@
                 <a:ea typeface="Calibri" pitchFamily="34" charset="-122"/>
                 <a:cs typeface="Calibri" pitchFamily="34" charset="-120"/>
               </a:rPr>
-              <a:t>too much</a:t>
+              <a:t>a connected mesh or system</a:t>
             </a:r>
             <a:endParaRPr lang="en-US" sz="850" dirty="0"/>
           </a:p>
@@ -25303,7 +25875,7 @@
         </p:nvSpPr>
         <p:spPr>
           <a:xfrm>
-            <a:off x="4370832" y="2258568"/>
+            <a:off x="5803392" y="2258568"/>
             <a:ext cx="1828800" cy="292608"/>
           </a:xfrm>
           <a:prstGeom prst="rect">
@@ -25337,7 +25909,7 @@
         </p:nvSpPr>
         <p:spPr>
           <a:xfrm>
-            <a:off x="4370832" y="2258568"/>
+            <a:off x="5803392" y="2258568"/>
             <a:ext cx="1828800" cy="292608"/>
           </a:xfrm>
           <a:prstGeom prst="rect">
@@ -25376,7 +25948,7 @@
         </p:nvSpPr>
         <p:spPr>
           <a:xfrm>
-            <a:off x="4370832" y="2569464"/>
+            <a:off x="5803392" y="2569464"/>
             <a:ext cx="1828800" cy="201168"/>
           </a:xfrm>
           <a:prstGeom prst="rect">
@@ -25401,7 +25973,7 @@
                 <a:ea typeface="Calibri" pitchFamily="34" charset="-122"/>
                 <a:cs typeface="Calibri" pitchFamily="34" charset="-120"/>
               </a:rPr>
-              <a:t>effort or labour</a:t>
+              <a:t>to do or make effort</a:t>
             </a:r>
             <a:endParaRPr lang="en-US" sz="850" dirty="0"/>
           </a:p>
@@ -25415,30 +25987,23 @@
         </p:nvSpPr>
         <p:spPr>
           <a:xfrm>
-            <a:off x="6519672" y="2258568"/>
-            <a:ext cx="1828800" cy="292608"/>
+            <a:off x="365760" y="3273552"/>
+            <a:ext cx="1371600" cy="658368"/>
           </a:xfrm>
           <a:prstGeom prst="rect">
             <a:avLst>
-              <a:gd name="adj" fmla="val 25000"/>
+              <a:gd name="adj" fmla="val 8333"/>
             </a:avLst>
           </a:prstGeom>
           <a:solidFill>
-            <a:srgbClr val="FCE7F3"/>
-          </a:solidFill>
-          <a:ln w="19050">
-            <a:solidFill>
-              <a:srgbClr val="DB2777"/>
-            </a:solidFill>
-            <a:prstDash val="solid"/>
-          </a:ln>
-          <a:effectLst>
-            <a:outerShdw sx="100000" sy="100000" kx="0" ky="0" algn="bl" rotWithShape="0" blurRad="101600" dist="38100" dir="8100000">
-              <a:srgbClr val="000000">
-                <a:alpha val="12000"/>
-              </a:srgbClr>
-            </a:outerShdw>
-          </a:effectLst>
+            <a:srgbClr val="E2E8F0"/>
+          </a:solidFill>
+          <a:ln w="12700">
+            <a:solidFill>
+              <a:srgbClr val="E2E8F0"/>
+            </a:solidFill>
+            <a:prstDash val="solid"/>
+          </a:ln>
         </p:spPr>
       </p:sp>
       <p:sp>
@@ -25449,8 +26014,8 @@
         </p:nvSpPr>
         <p:spPr>
           <a:xfrm>
-            <a:off x="6519672" y="2258568"/>
-            <a:ext cx="1828800" cy="292608"/>
+            <a:off x="365760" y="3273552"/>
+            <a:ext cx="1371600" cy="658368"/>
           </a:xfrm>
           <a:prstGeom prst="rect">
             <a:avLst/>
@@ -25466,69 +26031,30 @@
               <a:buNone/>
             </a:pPr>
             <a:r>
-              <a:rPr lang="en-US" sz="1300" b="1" dirty="0">
-                <a:solidFill>
-                  <a:srgbClr val="9D174D"/>
+              <a:rPr lang="en-US" sz="1100" b="1" dirty="0">
+                <a:solidFill>
+                  <a:srgbClr val="475569"/>
                 </a:solidFill>
                 <a:latin typeface="Trebuchet MS" pitchFamily="34" charset="0"/>
                 <a:ea typeface="Trebuchet MS" pitchFamily="34" charset="-122"/>
                 <a:cs typeface="Trebuchet MS" pitchFamily="34" charset="-120"/>
               </a:rPr>
-              <a:t>ed</a:t>
-            </a:r>
-            <a:endParaRPr lang="en-US" sz="1300" dirty="0"/>
-          </a:p>
-        </p:txBody>
-      </p:sp>
-      <p:sp>
-        <p:nvSpPr>
-          <p:cNvPr id="24" name="Text 22"/>
-          <p:cNvSpPr/>
-          <p:nvPr/>
-        </p:nvSpPr>
-        <p:spPr>
-          <a:xfrm>
-            <a:off x="6519672" y="2569464"/>
-            <a:ext cx="1828800" cy="201168"/>
-          </a:xfrm>
-          <a:prstGeom prst="rect">
-            <a:avLst/>
-          </a:prstGeom>
-          <a:noFill/>
-          <a:ln/>
-        </p:spPr>
-        <p:txBody>
-          <a:bodyPr wrap="square" lIns="0" tIns="0" rIns="0" bIns="0" rtlCol="0" anchor="t"/>
-          <a:lstStyle/>
-          <a:p>
-            <a:pPr algn="ctr" indent="0" marL="0">
-              <a:buNone/>
-            </a:pPr>
-            <a:r>
-              <a:rPr lang="en-US" sz="850" dirty="0">
-                <a:solidFill>
-                  <a:srgbClr val="475569"/>
-                </a:solidFill>
-                <a:latin typeface="Calibri" pitchFamily="34" charset="0"/>
-                <a:ea typeface="Calibri" pitchFamily="34" charset="-122"/>
-                <a:cs typeface="Calibri" pitchFamily="34" charset="-120"/>
-              </a:rPr>
-              <a:t>in the past</a:t>
-            </a:r>
-            <a:endParaRPr lang="en-US" sz="850" dirty="0"/>
-          </a:p>
-        </p:txBody>
-      </p:sp>
-      <p:sp>
-        <p:nvSpPr>
-          <p:cNvPr id="25" name="Shape 23"/>
-          <p:cNvSpPr/>
-          <p:nvPr/>
-        </p:nvSpPr>
-        <p:spPr>
-          <a:xfrm>
-            <a:off x="365760" y="3273552"/>
-            <a:ext cx="1371600" cy="658368"/>
+              <a:t>Syllables</a:t>
+            </a:r>
+            <a:endParaRPr lang="en-US" sz="1100" dirty="0"/>
+          </a:p>
+        </p:txBody>
+      </p:sp>
+      <p:sp>
+        <p:nvSpPr>
+          <p:cNvPr id="24" name="Shape 22"/>
+          <p:cNvSpPr/>
+          <p:nvPr/>
+        </p:nvSpPr>
+        <p:spPr>
+          <a:xfrm>
+            <a:off x="1874520" y="3273552"/>
+            <a:ext cx="6903720" cy="658368"/>
           </a:xfrm>
           <a:prstGeom prst="rect">
             <a:avLst>
@@ -25536,11 +26062,38 @@
             </a:avLst>
           </a:prstGeom>
           <a:solidFill>
-            <a:srgbClr val="E2E8F0"/>
-          </a:solidFill>
-          <a:ln w="12700">
-            <a:solidFill>
-              <a:srgbClr val="E2E8F0"/>
+            <a:srgbClr val="CCFBF1"/>
+          </a:solidFill>
+          <a:ln w="12700">
+            <a:solidFill>
+              <a:srgbClr val="0D9488"/>
+            </a:solidFill>
+            <a:prstDash val="solid"/>
+          </a:ln>
+        </p:spPr>
+      </p:sp>
+      <p:sp>
+        <p:nvSpPr>
+          <p:cNvPr id="25" name="Shape 23"/>
+          <p:cNvSpPr/>
+          <p:nvPr/>
+        </p:nvSpPr>
+        <p:spPr>
+          <a:xfrm>
+            <a:off x="2999232" y="3364992"/>
+            <a:ext cx="1645920" cy="475488"/>
+          </a:xfrm>
+          <a:prstGeom prst="rect">
+            <a:avLst>
+              <a:gd name="adj" fmla="val 9615"/>
+            </a:avLst>
+          </a:prstGeom>
+          <a:solidFill>
+            <a:srgbClr val="FFFFFF"/>
+          </a:solidFill>
+          <a:ln w="12700">
+            <a:solidFill>
+              <a:srgbClr val="0D9488"/>
             </a:solidFill>
             <a:prstDash val="solid"/>
           </a:ln>
@@ -25554,8 +26107,8 @@
         </p:nvSpPr>
         <p:spPr>
           <a:xfrm>
-            <a:off x="365760" y="3273552"/>
-            <a:ext cx="1371600" cy="658368"/>
+            <a:off x="2999232" y="3364992"/>
+            <a:ext cx="1645920" cy="475488"/>
           </a:xfrm>
           <a:prstGeom prst="rect">
             <a:avLst/>
@@ -25571,46 +26124,58 @@
               <a:buNone/>
             </a:pPr>
             <a:r>
-              <a:rPr lang="en-US" sz="1100" b="1" dirty="0">
-                <a:solidFill>
-                  <a:srgbClr val="475569"/>
+              <a:rPr lang="en-US" sz="1400" b="1" dirty="0">
+                <a:solidFill>
+                  <a:srgbClr val="0D9488"/>
                 </a:solidFill>
                 <a:latin typeface="Trebuchet MS" pitchFamily="34" charset="0"/>
                 <a:ea typeface="Trebuchet MS" pitchFamily="34" charset="-122"/>
                 <a:cs typeface="Trebuchet MS" pitchFamily="34" charset="-120"/>
               </a:rPr>
-              <a:t>Syllables</a:t>
-            </a:r>
-            <a:endParaRPr lang="en-US" sz="1100" dirty="0"/>
-          </a:p>
-        </p:txBody>
-      </p:sp>
-      <p:sp>
-        <p:nvSpPr>
-          <p:cNvPr id="27" name="Shape 25"/>
-          <p:cNvSpPr/>
-          <p:nvPr/>
-        </p:nvSpPr>
-        <p:spPr>
-          <a:xfrm>
-            <a:off x="1874520" y="3273552"/>
-            <a:ext cx="6903720" cy="658368"/>
-          </a:xfrm>
-          <a:prstGeom prst="rect">
-            <a:avLst>
-              <a:gd name="adj" fmla="val 8333"/>
-            </a:avLst>
-          </a:prstGeom>
-          <a:solidFill>
-            <a:srgbClr val="CCFBF1"/>
-          </a:solidFill>
-          <a:ln w="12700">
-            <a:solidFill>
-              <a:srgbClr val="0D9488"/>
-            </a:solidFill>
-            <a:prstDash val="solid"/>
-          </a:ln>
-        </p:spPr>
+              <a:t>net</a:t>
+            </a:r>
+            <a:endParaRPr lang="en-US" sz="1400" dirty="0"/>
+          </a:p>
+        </p:txBody>
+      </p:sp>
+      <p:sp>
+        <p:nvSpPr>
+          <p:cNvPr id="27" name="Text 25"/>
+          <p:cNvSpPr/>
+          <p:nvPr/>
+        </p:nvSpPr>
+        <p:spPr>
+          <a:xfrm>
+            <a:off x="4645152" y="3364992"/>
+            <a:ext cx="1097280" cy="475488"/>
+          </a:xfrm>
+          <a:prstGeom prst="rect">
+            <a:avLst/>
+          </a:prstGeom>
+          <a:noFill/>
+          <a:ln/>
+        </p:spPr>
+        <p:txBody>
+          <a:bodyPr wrap="square" lIns="0" tIns="0" rIns="0" bIns="0" rtlCol="0" anchor="ctr"/>
+          <a:lstStyle/>
+          <a:p>
+            <a:pPr algn="ctr" indent="0" marL="0">
+              <a:buNone/>
+            </a:pPr>
+            <a:r>
+              <a:rPr lang="en-US" sz="1600" b="1" dirty="0">
+                <a:solidFill>
+                  <a:srgbClr val="0D9488"/>
+                </a:solidFill>
+                <a:latin typeface="Trebuchet MS" pitchFamily="34" charset="0"/>
+                <a:ea typeface="Trebuchet MS" pitchFamily="34" charset="-122"/>
+                <a:cs typeface="Trebuchet MS" pitchFamily="34" charset="-120"/>
+              </a:rPr>
+              <a:t>·</a:t>
+            </a:r>
+            <a:endParaRPr lang="en-US" sz="1600" dirty="0"/>
+          </a:p>
+        </p:txBody>
       </p:sp>
       <p:sp>
         <p:nvSpPr>
@@ -25620,7 +26185,7 @@
         </p:nvSpPr>
         <p:spPr>
           <a:xfrm>
-            <a:off x="2313432" y="3364992"/>
+            <a:off x="5742432" y="3364992"/>
             <a:ext cx="1645920" cy="475488"/>
           </a:xfrm>
           <a:prstGeom prst="rect">
@@ -25647,7 +26212,7 @@
         </p:nvSpPr>
         <p:spPr>
           <a:xfrm>
-            <a:off x="2313432" y="3364992"/>
+            <a:off x="5742432" y="3364992"/>
             <a:ext cx="1645920" cy="475488"/>
           </a:xfrm>
           <a:prstGeom prst="rect">
@@ -25672,7 +26237,7 @@
                 <a:ea typeface="Trebuchet MS" pitchFamily="34" charset="-122"/>
                 <a:cs typeface="Trebuchet MS" pitchFamily="34" charset="-120"/>
               </a:rPr>
-              <a:t>o</a:t>
+              <a:t>work</a:t>
             </a:r>
             <a:endParaRPr lang="en-US" sz="1400" dirty="0"/>
           </a:p>
@@ -25680,14 +26245,41 @@
       </p:sp>
       <p:sp>
         <p:nvSpPr>
-          <p:cNvPr id="30" name="Text 28"/>
-          <p:cNvSpPr/>
-          <p:nvPr/>
-        </p:nvSpPr>
-        <p:spPr>
-          <a:xfrm>
-            <a:off x="3959352" y="3364992"/>
-            <a:ext cx="411480" cy="475488"/>
+          <p:cNvPr id="30" name="Shape 28"/>
+          <p:cNvSpPr/>
+          <p:nvPr/>
+        </p:nvSpPr>
+        <p:spPr>
+          <a:xfrm>
+            <a:off x="365760" y="4096512"/>
+            <a:ext cx="1371600" cy="804672"/>
+          </a:xfrm>
+          <a:prstGeom prst="rect">
+            <a:avLst>
+              <a:gd name="adj" fmla="val 6818"/>
+            </a:avLst>
+          </a:prstGeom>
+          <a:solidFill>
+            <a:srgbClr val="E2E8F0"/>
+          </a:solidFill>
+          <a:ln w="12700">
+            <a:solidFill>
+              <a:srgbClr val="E2E8F0"/>
+            </a:solidFill>
+            <a:prstDash val="solid"/>
+          </a:ln>
+        </p:spPr>
+      </p:sp>
+      <p:sp>
+        <p:nvSpPr>
+          <p:cNvPr id="31" name="Text 29"/>
+          <p:cNvSpPr/>
+          <p:nvPr/>
+        </p:nvSpPr>
+        <p:spPr>
+          <a:xfrm>
+            <a:off x="365760" y="4096512"/>
+            <a:ext cx="1371600" cy="804672"/>
           </a:xfrm>
           <a:prstGeom prst="rect">
             <a:avLst/>
@@ -25703,201 +26295,30 @@
               <a:buNone/>
             </a:pPr>
             <a:r>
-              <a:rPr lang="en-US" sz="1600" b="1" dirty="0">
-                <a:solidFill>
-                  <a:srgbClr val="0D9488"/>
+              <a:rPr lang="en-US" sz="1100" b="1" dirty="0">
+                <a:solidFill>
+                  <a:srgbClr val="475569"/>
                 </a:solidFill>
                 <a:latin typeface="Trebuchet MS" pitchFamily="34" charset="0"/>
                 <a:ea typeface="Trebuchet MS" pitchFamily="34" charset="-122"/>
                 <a:cs typeface="Trebuchet MS" pitchFamily="34" charset="-120"/>
               </a:rPr>
-              <a:t>·</a:t>
-            </a:r>
-            <a:endParaRPr lang="en-US" sz="1600" dirty="0"/>
-          </a:p>
-        </p:txBody>
-      </p:sp>
-      <p:sp>
-        <p:nvSpPr>
-          <p:cNvPr id="31" name="Shape 29"/>
-          <p:cNvSpPr/>
-          <p:nvPr/>
-        </p:nvSpPr>
-        <p:spPr>
-          <a:xfrm>
-            <a:off x="4370832" y="3364992"/>
-            <a:ext cx="1645920" cy="475488"/>
-          </a:xfrm>
-          <a:prstGeom prst="rect">
-            <a:avLst>
-              <a:gd name="adj" fmla="val 9615"/>
-            </a:avLst>
-          </a:prstGeom>
-          <a:solidFill>
-            <a:srgbClr val="FFFFFF"/>
-          </a:solidFill>
-          <a:ln w="12700">
-            <a:solidFill>
-              <a:srgbClr val="0D9488"/>
-            </a:solidFill>
-            <a:prstDash val="solid"/>
-          </a:ln>
-        </p:spPr>
-      </p:sp>
-      <p:sp>
-        <p:nvSpPr>
-          <p:cNvPr id="32" name="Text 30"/>
-          <p:cNvSpPr/>
-          <p:nvPr/>
-        </p:nvSpPr>
-        <p:spPr>
-          <a:xfrm>
-            <a:off x="4370832" y="3364992"/>
-            <a:ext cx="1645920" cy="475488"/>
-          </a:xfrm>
-          <a:prstGeom prst="rect">
-            <a:avLst/>
-          </a:prstGeom>
-          <a:noFill/>
-          <a:ln/>
-        </p:spPr>
-        <p:txBody>
-          <a:bodyPr wrap="square" lIns="0" tIns="0" rIns="0" bIns="0" rtlCol="0" anchor="ctr"/>
-          <a:lstStyle/>
-          <a:p>
-            <a:pPr algn="ctr" indent="0" marL="0">
-              <a:buNone/>
-            </a:pPr>
-            <a:r>
-              <a:rPr lang="en-US" sz="1400" b="1" dirty="0">
-                <a:solidFill>
-                  <a:srgbClr val="0D9488"/>
-                </a:solidFill>
-                <a:latin typeface="Trebuchet MS" pitchFamily="34" charset="0"/>
-                <a:ea typeface="Trebuchet MS" pitchFamily="34" charset="-122"/>
-                <a:cs typeface="Trebuchet MS" pitchFamily="34" charset="-120"/>
-              </a:rPr>
-              <a:t>ver</a:t>
-            </a:r>
-            <a:endParaRPr lang="en-US" sz="1400" dirty="0"/>
-          </a:p>
-        </p:txBody>
-      </p:sp>
-      <p:sp>
-        <p:nvSpPr>
-          <p:cNvPr id="33" name="Text 31"/>
-          <p:cNvSpPr/>
-          <p:nvPr/>
-        </p:nvSpPr>
-        <p:spPr>
-          <a:xfrm>
-            <a:off x="6016752" y="3364992"/>
-            <a:ext cx="411480" cy="475488"/>
-          </a:xfrm>
-          <a:prstGeom prst="rect">
-            <a:avLst/>
-          </a:prstGeom>
-          <a:noFill/>
-          <a:ln/>
-        </p:spPr>
-        <p:txBody>
-          <a:bodyPr wrap="square" lIns="0" tIns="0" rIns="0" bIns="0" rtlCol="0" anchor="ctr"/>
-          <a:lstStyle/>
-          <a:p>
-            <a:pPr algn="ctr" indent="0" marL="0">
-              <a:buNone/>
-            </a:pPr>
-            <a:r>
-              <a:rPr lang="en-US" sz="1600" b="1" dirty="0">
-                <a:solidFill>
-                  <a:srgbClr val="0D9488"/>
-                </a:solidFill>
-                <a:latin typeface="Trebuchet MS" pitchFamily="34" charset="0"/>
-                <a:ea typeface="Trebuchet MS" pitchFamily="34" charset="-122"/>
-                <a:cs typeface="Trebuchet MS" pitchFamily="34" charset="-120"/>
-              </a:rPr>
-              <a:t>·</a:t>
-            </a:r>
-            <a:endParaRPr lang="en-US" sz="1600" dirty="0"/>
-          </a:p>
-        </p:txBody>
-      </p:sp>
-      <p:sp>
-        <p:nvSpPr>
-          <p:cNvPr id="34" name="Shape 32"/>
-          <p:cNvSpPr/>
-          <p:nvPr/>
-        </p:nvSpPr>
-        <p:spPr>
-          <a:xfrm>
-            <a:off x="6428232" y="3364992"/>
-            <a:ext cx="1645920" cy="475488"/>
-          </a:xfrm>
-          <a:prstGeom prst="rect">
-            <a:avLst>
-              <a:gd name="adj" fmla="val 9615"/>
-            </a:avLst>
-          </a:prstGeom>
-          <a:solidFill>
-            <a:srgbClr val="FFFFFF"/>
-          </a:solidFill>
-          <a:ln w="12700">
-            <a:solidFill>
-              <a:srgbClr val="0D9488"/>
-            </a:solidFill>
-            <a:prstDash val="solid"/>
-          </a:ln>
-        </p:spPr>
-      </p:sp>
-      <p:sp>
-        <p:nvSpPr>
-          <p:cNvPr id="35" name="Text 33"/>
-          <p:cNvSpPr/>
-          <p:nvPr/>
-        </p:nvSpPr>
-        <p:spPr>
-          <a:xfrm>
-            <a:off x="6428232" y="3364992"/>
-            <a:ext cx="1645920" cy="475488"/>
-          </a:xfrm>
-          <a:prstGeom prst="rect">
-            <a:avLst/>
-          </a:prstGeom>
-          <a:noFill/>
-          <a:ln/>
-        </p:spPr>
-        <p:txBody>
-          <a:bodyPr wrap="square" lIns="0" tIns="0" rIns="0" bIns="0" rtlCol="0" anchor="ctr"/>
-          <a:lstStyle/>
-          <a:p>
-            <a:pPr algn="ctr" indent="0" marL="0">
-              <a:buNone/>
-            </a:pPr>
-            <a:r>
-              <a:rPr lang="en-US" sz="1400" b="1" dirty="0">
-                <a:solidFill>
-                  <a:srgbClr val="0D9488"/>
-                </a:solidFill>
-                <a:latin typeface="Trebuchet MS" pitchFamily="34" charset="0"/>
-                <a:ea typeface="Trebuchet MS" pitchFamily="34" charset="-122"/>
-                <a:cs typeface="Trebuchet MS" pitchFamily="34" charset="-120"/>
-              </a:rPr>
-              <a:t>worked</a:t>
-            </a:r>
-            <a:endParaRPr lang="en-US" sz="1400" dirty="0"/>
-          </a:p>
-        </p:txBody>
-      </p:sp>
-      <p:sp>
-        <p:nvSpPr>
-          <p:cNvPr id="36" name="Shape 34"/>
-          <p:cNvSpPr/>
-          <p:nvPr/>
-        </p:nvSpPr>
-        <p:spPr>
-          <a:xfrm>
-            <a:off x="365760" y="4096512"/>
-            <a:ext cx="1371600" cy="804672"/>
+              <a:t>Phonemes</a:t>
+            </a:r>
+            <a:endParaRPr lang="en-US" sz="1100" dirty="0"/>
+          </a:p>
+        </p:txBody>
+      </p:sp>
+      <p:sp>
+        <p:nvSpPr>
+          <p:cNvPr id="32" name="Shape 30"/>
+          <p:cNvSpPr/>
+          <p:nvPr/>
+        </p:nvSpPr>
+        <p:spPr>
+          <a:xfrm>
+            <a:off x="1874520" y="4096512"/>
+            <a:ext cx="6903720" cy="804672"/>
           </a:xfrm>
           <a:prstGeom prst="rect">
             <a:avLst>
@@ -25905,85 +26326,19 @@
             </a:avLst>
           </a:prstGeom>
           <a:solidFill>
-            <a:srgbClr val="E2E8F0"/>
+            <a:srgbClr val="F8FAFC"/>
           </a:solidFill>
           <a:ln w="12700">
             <a:solidFill>
               <a:srgbClr val="E2E8F0"/>
             </a:solidFill>
-            <a:prstDash val="solid"/>
-          </a:ln>
-        </p:spPr>
-      </p:sp>
-      <p:sp>
-        <p:nvSpPr>
-          <p:cNvPr id="37" name="Text 35"/>
-          <p:cNvSpPr/>
-          <p:nvPr/>
-        </p:nvSpPr>
-        <p:spPr>
-          <a:xfrm>
-            <a:off x="365760" y="4096512"/>
-            <a:ext cx="1371600" cy="804672"/>
-          </a:xfrm>
-          <a:prstGeom prst="rect">
-            <a:avLst/>
-          </a:prstGeom>
-          <a:noFill/>
-          <a:ln/>
-        </p:spPr>
-        <p:txBody>
-          <a:bodyPr wrap="square" lIns="0" tIns="0" rIns="0" bIns="0" rtlCol="0" anchor="ctr"/>
-          <a:lstStyle/>
-          <a:p>
-            <a:pPr algn="ctr" indent="0" marL="0">
-              <a:buNone/>
-            </a:pPr>
-            <a:r>
-              <a:rPr lang="en-US" sz="1100" b="1" dirty="0">
-                <a:solidFill>
-                  <a:srgbClr val="475569"/>
-                </a:solidFill>
-                <a:latin typeface="Trebuchet MS" pitchFamily="34" charset="0"/>
-                <a:ea typeface="Trebuchet MS" pitchFamily="34" charset="-122"/>
-                <a:cs typeface="Trebuchet MS" pitchFamily="34" charset="-120"/>
-              </a:rPr>
-              <a:t>Phonemes</a:t>
-            </a:r>
-            <a:endParaRPr lang="en-US" sz="1100" dirty="0"/>
-          </a:p>
-        </p:txBody>
-      </p:sp>
-      <p:sp>
-        <p:nvSpPr>
-          <p:cNvPr id="38" name="Shape 36"/>
-          <p:cNvSpPr/>
-          <p:nvPr/>
-        </p:nvSpPr>
-        <p:spPr>
-          <a:xfrm>
-            <a:off x="1874520" y="4096512"/>
-            <a:ext cx="6903720" cy="804672"/>
-          </a:xfrm>
-          <a:prstGeom prst="rect">
-            <a:avLst>
-              <a:gd name="adj" fmla="val 6818"/>
-            </a:avLst>
-          </a:prstGeom>
-          <a:solidFill>
-            <a:srgbClr val="F8FAFC"/>
-          </a:solidFill>
-          <a:ln w="12700">
-            <a:solidFill>
-              <a:srgbClr val="E2E8F0"/>
-            </a:solidFill>
             <a:prstDash val="dash"/>
           </a:ln>
         </p:spPr>
       </p:sp>
       <p:sp>
         <p:nvSpPr>
-          <p:cNvPr id="39" name="Text 37"/>
+          <p:cNvPr id="33" name="Text 31"/>
           <p:cNvSpPr/>
           <p:nvPr/>
         </p:nvSpPr>
@@ -26306,7 +26661,7 @@
                 <a:ea typeface="Calibri" pitchFamily="34" charset="-122"/>
                 <a:cs typeface="Calibri" pitchFamily="34" charset="-120"/>
               </a:rPr>
-              <a:t>Word Labs  •  wordlabs.app  •  Root: 'work' = to do effort or labour</a:t>
+              <a:t>Word Labs  •  wordlabs.app  •  Root: 'work' = to do or make effort</a:t>
             </a:r>
             <a:endParaRPr lang="en-US" sz="800" dirty="0"/>
           </a:p>
@@ -26445,7 +26800,7 @@
                 <a:ea typeface="Trebuchet MS" pitchFamily="34" charset="-122"/>
                 <a:cs typeface="Trebuchet MS" pitchFamily="34" charset="-120"/>
               </a:rPr>
-              <a:t>overworked</a:t>
+              <a:t>network</a:t>
             </a:r>
             <a:endParaRPr lang="en-US" sz="2800" dirty="0"/>
           </a:p>
@@ -26525,7 +26880,7 @@
         </p:nvSpPr>
         <p:spPr>
           <a:xfrm>
-            <a:off x="2221992" y="2258568"/>
+            <a:off x="2938272" y="2258568"/>
             <a:ext cx="1828800" cy="292608"/>
           </a:xfrm>
           <a:prstGeom prst="rect">
@@ -26559,7 +26914,7 @@
         </p:nvSpPr>
         <p:spPr>
           <a:xfrm>
-            <a:off x="2221992" y="2258568"/>
+            <a:off x="2938272" y="2258568"/>
             <a:ext cx="1828800" cy="292608"/>
           </a:xfrm>
           <a:prstGeom prst="rect">
@@ -26584,7 +26939,7 @@
                 <a:ea typeface="Trebuchet MS" pitchFamily="34" charset="-122"/>
                 <a:cs typeface="Trebuchet MS" pitchFamily="34" charset="-120"/>
               </a:rPr>
-              <a:t>over</a:t>
+              <a:t>net</a:t>
             </a:r>
             <a:endParaRPr lang="en-US" sz="1300" dirty="0"/>
           </a:p>
@@ -26598,7 +26953,7 @@
         </p:nvSpPr>
         <p:spPr>
           <a:xfrm>
-            <a:off x="2221992" y="2569464"/>
+            <a:off x="2938272" y="2569464"/>
             <a:ext cx="1828800" cy="201168"/>
           </a:xfrm>
           <a:prstGeom prst="rect">
@@ -26623,7 +26978,7 @@
                 <a:ea typeface="Calibri" pitchFamily="34" charset="-122"/>
                 <a:cs typeface="Calibri" pitchFamily="34" charset="-120"/>
               </a:rPr>
-              <a:t>too much</a:t>
+              <a:t>a connected mesh or system</a:t>
             </a:r>
             <a:endParaRPr lang="en-US" sz="850" dirty="0"/>
           </a:p>
@@ -26637,7 +26992,7 @@
         </p:nvSpPr>
         <p:spPr>
           <a:xfrm>
-            <a:off x="4370832" y="2258568"/>
+            <a:off x="5803392" y="2258568"/>
             <a:ext cx="1828800" cy="292608"/>
           </a:xfrm>
           <a:prstGeom prst="rect">
@@ -26671,7 +27026,7 @@
         </p:nvSpPr>
         <p:spPr>
           <a:xfrm>
-            <a:off x="4370832" y="2258568"/>
+            <a:off x="5803392" y="2258568"/>
             <a:ext cx="1828800" cy="292608"/>
           </a:xfrm>
           <a:prstGeom prst="rect">
@@ -26710,7 +27065,7 @@
         </p:nvSpPr>
         <p:spPr>
           <a:xfrm>
-            <a:off x="4370832" y="2569464"/>
+            <a:off x="5803392" y="2569464"/>
             <a:ext cx="1828800" cy="201168"/>
           </a:xfrm>
           <a:prstGeom prst="rect">
@@ -26735,7 +27090,7 @@
                 <a:ea typeface="Calibri" pitchFamily="34" charset="-122"/>
                 <a:cs typeface="Calibri" pitchFamily="34" charset="-120"/>
               </a:rPr>
-              <a:t>effort or labour</a:t>
+              <a:t>to do or make effort</a:t>
             </a:r>
             <a:endParaRPr lang="en-US" sz="850" dirty="0"/>
           </a:p>
@@ -26749,30 +27104,23 @@
         </p:nvSpPr>
         <p:spPr>
           <a:xfrm>
-            <a:off x="6519672" y="2258568"/>
-            <a:ext cx="1828800" cy="292608"/>
+            <a:off x="365760" y="3273552"/>
+            <a:ext cx="1371600" cy="658368"/>
           </a:xfrm>
           <a:prstGeom prst="rect">
             <a:avLst>
-              <a:gd name="adj" fmla="val 25000"/>
+              <a:gd name="adj" fmla="val 8333"/>
             </a:avLst>
           </a:prstGeom>
           <a:solidFill>
-            <a:srgbClr val="FCE7F3"/>
-          </a:solidFill>
-          <a:ln w="19050">
-            <a:solidFill>
-              <a:srgbClr val="DB2777"/>
-            </a:solidFill>
-            <a:prstDash val="solid"/>
-          </a:ln>
-          <a:effectLst>
-            <a:outerShdw sx="100000" sy="100000" kx="0" ky="0" algn="bl" rotWithShape="0" blurRad="101600" dist="38100" dir="8100000">
-              <a:srgbClr val="000000">
-                <a:alpha val="12000"/>
-              </a:srgbClr>
-            </a:outerShdw>
-          </a:effectLst>
+            <a:srgbClr val="E2E8F0"/>
+          </a:solidFill>
+          <a:ln w="12700">
+            <a:solidFill>
+              <a:srgbClr val="E2E8F0"/>
+            </a:solidFill>
+            <a:prstDash val="solid"/>
+          </a:ln>
         </p:spPr>
       </p:sp>
       <p:sp>
@@ -26783,8 +27131,8 @@
         </p:nvSpPr>
         <p:spPr>
           <a:xfrm>
-            <a:off x="6519672" y="2258568"/>
-            <a:ext cx="1828800" cy="292608"/>
+            <a:off x="365760" y="3273552"/>
+            <a:ext cx="1371600" cy="658368"/>
           </a:xfrm>
           <a:prstGeom prst="rect">
             <a:avLst/>
@@ -26800,69 +27148,30 @@
               <a:buNone/>
             </a:pPr>
             <a:r>
-              <a:rPr lang="en-US" sz="1300" b="1" dirty="0">
-                <a:solidFill>
-                  <a:srgbClr val="9D174D"/>
+              <a:rPr lang="en-US" sz="1100" b="1" dirty="0">
+                <a:solidFill>
+                  <a:srgbClr val="475569"/>
                 </a:solidFill>
                 <a:latin typeface="Trebuchet MS" pitchFamily="34" charset="0"/>
                 <a:ea typeface="Trebuchet MS" pitchFamily="34" charset="-122"/>
                 <a:cs typeface="Trebuchet MS" pitchFamily="34" charset="-120"/>
               </a:rPr>
-              <a:t>ed</a:t>
-            </a:r>
-            <a:endParaRPr lang="en-US" sz="1300" dirty="0"/>
-          </a:p>
-        </p:txBody>
-      </p:sp>
-      <p:sp>
-        <p:nvSpPr>
-          <p:cNvPr id="24" name="Text 22"/>
-          <p:cNvSpPr/>
-          <p:nvPr/>
-        </p:nvSpPr>
-        <p:spPr>
-          <a:xfrm>
-            <a:off x="6519672" y="2569464"/>
-            <a:ext cx="1828800" cy="201168"/>
-          </a:xfrm>
-          <a:prstGeom prst="rect">
-            <a:avLst/>
-          </a:prstGeom>
-          <a:noFill/>
-          <a:ln/>
-        </p:spPr>
-        <p:txBody>
-          <a:bodyPr wrap="square" lIns="0" tIns="0" rIns="0" bIns="0" rtlCol="0" anchor="t"/>
-          <a:lstStyle/>
-          <a:p>
-            <a:pPr algn="ctr" indent="0" marL="0">
-              <a:buNone/>
-            </a:pPr>
-            <a:r>
-              <a:rPr lang="en-US" sz="850" dirty="0">
-                <a:solidFill>
-                  <a:srgbClr val="475569"/>
-                </a:solidFill>
-                <a:latin typeface="Calibri" pitchFamily="34" charset="0"/>
-                <a:ea typeface="Calibri" pitchFamily="34" charset="-122"/>
-                <a:cs typeface="Calibri" pitchFamily="34" charset="-120"/>
-              </a:rPr>
-              <a:t>in the past</a:t>
-            </a:r>
-            <a:endParaRPr lang="en-US" sz="850" dirty="0"/>
-          </a:p>
-        </p:txBody>
-      </p:sp>
-      <p:sp>
-        <p:nvSpPr>
-          <p:cNvPr id="25" name="Shape 23"/>
-          <p:cNvSpPr/>
-          <p:nvPr/>
-        </p:nvSpPr>
-        <p:spPr>
-          <a:xfrm>
-            <a:off x="365760" y="3273552"/>
-            <a:ext cx="1371600" cy="658368"/>
+              <a:t>Syllables</a:t>
+            </a:r>
+            <a:endParaRPr lang="en-US" sz="1100" dirty="0"/>
+          </a:p>
+        </p:txBody>
+      </p:sp>
+      <p:sp>
+        <p:nvSpPr>
+          <p:cNvPr id="24" name="Shape 22"/>
+          <p:cNvSpPr/>
+          <p:nvPr/>
+        </p:nvSpPr>
+        <p:spPr>
+          <a:xfrm>
+            <a:off x="1874520" y="3273552"/>
+            <a:ext cx="6903720" cy="658368"/>
           </a:xfrm>
           <a:prstGeom prst="rect">
             <a:avLst>
@@ -26870,11 +27179,38 @@
             </a:avLst>
           </a:prstGeom>
           <a:solidFill>
-            <a:srgbClr val="E2E8F0"/>
-          </a:solidFill>
-          <a:ln w="12700">
-            <a:solidFill>
-              <a:srgbClr val="E2E8F0"/>
+            <a:srgbClr val="CCFBF1"/>
+          </a:solidFill>
+          <a:ln w="12700">
+            <a:solidFill>
+              <a:srgbClr val="0D9488"/>
+            </a:solidFill>
+            <a:prstDash val="solid"/>
+          </a:ln>
+        </p:spPr>
+      </p:sp>
+      <p:sp>
+        <p:nvSpPr>
+          <p:cNvPr id="25" name="Shape 23"/>
+          <p:cNvSpPr/>
+          <p:nvPr/>
+        </p:nvSpPr>
+        <p:spPr>
+          <a:xfrm>
+            <a:off x="2999232" y="3364992"/>
+            <a:ext cx="1645920" cy="475488"/>
+          </a:xfrm>
+          <a:prstGeom prst="rect">
+            <a:avLst>
+              <a:gd name="adj" fmla="val 9615"/>
+            </a:avLst>
+          </a:prstGeom>
+          <a:solidFill>
+            <a:srgbClr val="FFFFFF"/>
+          </a:solidFill>
+          <a:ln w="12700">
+            <a:solidFill>
+              <a:srgbClr val="0D9488"/>
             </a:solidFill>
             <a:prstDash val="solid"/>
           </a:ln>
@@ -26888,8 +27224,8 @@
         </p:nvSpPr>
         <p:spPr>
           <a:xfrm>
-            <a:off x="365760" y="3273552"/>
-            <a:ext cx="1371600" cy="658368"/>
+            <a:off x="2999232" y="3364992"/>
+            <a:ext cx="1645920" cy="475488"/>
           </a:xfrm>
           <a:prstGeom prst="rect">
             <a:avLst/>
@@ -26905,15 +27241,186 @@
               <a:buNone/>
             </a:pPr>
             <a:r>
-              <a:rPr lang="en-US" sz="1100" b="1" dirty="0">
-                <a:solidFill>
-                  <a:srgbClr val="475569"/>
+              <a:rPr lang="en-US" sz="1400" b="1" dirty="0">
+                <a:solidFill>
+                  <a:srgbClr val="0D9488"/>
                 </a:solidFill>
                 <a:latin typeface="Trebuchet MS" pitchFamily="34" charset="0"/>
                 <a:ea typeface="Trebuchet MS" pitchFamily="34" charset="-122"/>
                 <a:cs typeface="Trebuchet MS" pitchFamily="34" charset="-120"/>
               </a:rPr>
-              <a:t>Syllables</a:t>
+              <a:t>net</a:t>
+            </a:r>
+            <a:endParaRPr lang="en-US" sz="1400" dirty="0"/>
+          </a:p>
+        </p:txBody>
+      </p:sp>
+      <p:sp>
+        <p:nvSpPr>
+          <p:cNvPr id="27" name="Text 25"/>
+          <p:cNvSpPr/>
+          <p:nvPr/>
+        </p:nvSpPr>
+        <p:spPr>
+          <a:xfrm>
+            <a:off x="4645152" y="3364992"/>
+            <a:ext cx="1097280" cy="475488"/>
+          </a:xfrm>
+          <a:prstGeom prst="rect">
+            <a:avLst/>
+          </a:prstGeom>
+          <a:noFill/>
+          <a:ln/>
+        </p:spPr>
+        <p:txBody>
+          <a:bodyPr wrap="square" lIns="0" tIns="0" rIns="0" bIns="0" rtlCol="0" anchor="ctr"/>
+          <a:lstStyle/>
+          <a:p>
+            <a:pPr algn="ctr" indent="0" marL="0">
+              <a:buNone/>
+            </a:pPr>
+            <a:r>
+              <a:rPr lang="en-US" sz="1600" b="1" dirty="0">
+                <a:solidFill>
+                  <a:srgbClr val="0D9488"/>
+                </a:solidFill>
+                <a:latin typeface="Trebuchet MS" pitchFamily="34" charset="0"/>
+                <a:ea typeface="Trebuchet MS" pitchFamily="34" charset="-122"/>
+                <a:cs typeface="Trebuchet MS" pitchFamily="34" charset="-120"/>
+              </a:rPr>
+              <a:t>·</a:t>
+            </a:r>
+            <a:endParaRPr lang="en-US" sz="1600" dirty="0"/>
+          </a:p>
+        </p:txBody>
+      </p:sp>
+      <p:sp>
+        <p:nvSpPr>
+          <p:cNvPr id="28" name="Shape 26"/>
+          <p:cNvSpPr/>
+          <p:nvPr/>
+        </p:nvSpPr>
+        <p:spPr>
+          <a:xfrm>
+            <a:off x="5742432" y="3364992"/>
+            <a:ext cx="1645920" cy="475488"/>
+          </a:xfrm>
+          <a:prstGeom prst="rect">
+            <a:avLst>
+              <a:gd name="adj" fmla="val 9615"/>
+            </a:avLst>
+          </a:prstGeom>
+          <a:solidFill>
+            <a:srgbClr val="FFFFFF"/>
+          </a:solidFill>
+          <a:ln w="12700">
+            <a:solidFill>
+              <a:srgbClr val="0D9488"/>
+            </a:solidFill>
+            <a:prstDash val="solid"/>
+          </a:ln>
+        </p:spPr>
+      </p:sp>
+      <p:sp>
+        <p:nvSpPr>
+          <p:cNvPr id="29" name="Text 27"/>
+          <p:cNvSpPr/>
+          <p:nvPr/>
+        </p:nvSpPr>
+        <p:spPr>
+          <a:xfrm>
+            <a:off x="5742432" y="3364992"/>
+            <a:ext cx="1645920" cy="475488"/>
+          </a:xfrm>
+          <a:prstGeom prst="rect">
+            <a:avLst/>
+          </a:prstGeom>
+          <a:noFill/>
+          <a:ln/>
+        </p:spPr>
+        <p:txBody>
+          <a:bodyPr wrap="square" lIns="0" tIns="0" rIns="0" bIns="0" rtlCol="0" anchor="ctr"/>
+          <a:lstStyle/>
+          <a:p>
+            <a:pPr algn="ctr" indent="0" marL="0">
+              <a:buNone/>
+            </a:pPr>
+            <a:r>
+              <a:rPr lang="en-US" sz="1400" b="1" dirty="0">
+                <a:solidFill>
+                  <a:srgbClr val="0D9488"/>
+                </a:solidFill>
+                <a:latin typeface="Trebuchet MS" pitchFamily="34" charset="0"/>
+                <a:ea typeface="Trebuchet MS" pitchFamily="34" charset="-122"/>
+                <a:cs typeface="Trebuchet MS" pitchFamily="34" charset="-120"/>
+              </a:rPr>
+              <a:t>work</a:t>
+            </a:r>
+            <a:endParaRPr lang="en-US" sz="1400" dirty="0"/>
+          </a:p>
+        </p:txBody>
+      </p:sp>
+      <p:sp>
+        <p:nvSpPr>
+          <p:cNvPr id="30" name="Shape 28"/>
+          <p:cNvSpPr/>
+          <p:nvPr/>
+        </p:nvSpPr>
+        <p:spPr>
+          <a:xfrm>
+            <a:off x="365760" y="4096512"/>
+            <a:ext cx="1371600" cy="804672"/>
+          </a:xfrm>
+          <a:prstGeom prst="rect">
+            <a:avLst>
+              <a:gd name="adj" fmla="val 6818"/>
+            </a:avLst>
+          </a:prstGeom>
+          <a:solidFill>
+            <a:srgbClr val="E2E8F0"/>
+          </a:solidFill>
+          <a:ln w="12700">
+            <a:solidFill>
+              <a:srgbClr val="E2E8F0"/>
+            </a:solidFill>
+            <a:prstDash val="solid"/>
+          </a:ln>
+        </p:spPr>
+      </p:sp>
+      <p:sp>
+        <p:nvSpPr>
+          <p:cNvPr id="31" name="Text 29"/>
+          <p:cNvSpPr/>
+          <p:nvPr/>
+        </p:nvSpPr>
+        <p:spPr>
+          <a:xfrm>
+            <a:off x="365760" y="4096512"/>
+            <a:ext cx="1371600" cy="804672"/>
+          </a:xfrm>
+          <a:prstGeom prst="rect">
+            <a:avLst/>
+          </a:prstGeom>
+          <a:noFill/>
+          <a:ln/>
+        </p:spPr>
+        <p:txBody>
+          <a:bodyPr wrap="square" lIns="0" tIns="0" rIns="0" bIns="0" rtlCol="0" anchor="ctr"/>
+          <a:lstStyle/>
+          <a:p>
+            <a:pPr algn="ctr" indent="0" marL="0">
+              <a:buNone/>
+            </a:pPr>
+            <a:r>
+              <a:rPr lang="en-US" sz="1100" b="1" dirty="0">
+                <a:solidFill>
+                  <a:srgbClr val="475569"/>
+                </a:solidFill>
+                <a:latin typeface="Trebuchet MS" pitchFamily="34" charset="0"/>
+                <a:ea typeface="Trebuchet MS" pitchFamily="34" charset="-122"/>
+                <a:cs typeface="Trebuchet MS" pitchFamily="34" charset="-120"/>
+              </a:rPr>
+              <a:t>Phonemes</a:t>
             </a:r>
             <a:endParaRPr lang="en-US" sz="1100" dirty="0"/>
           </a:p>
@@ -26921,13 +27428,13 @@
       </p:sp>
       <p:sp>
         <p:nvSpPr>
-          <p:cNvPr id="27" name="Shape 25"/>
-          <p:cNvSpPr/>
-          <p:nvPr/>
-        </p:nvSpPr>
-        <p:spPr>
-          <a:xfrm>
-            <a:off x="1874520" y="3273552"/>
+          <p:cNvPr id="32" name="Shape 30"/>
+          <p:cNvSpPr/>
+          <p:nvPr/>
+        </p:nvSpPr>
+        <p:spPr>
+          <a:xfrm>
+            <a:off x="1874520" y="4096512"/>
             <a:ext cx="6903720" cy="658368"/>
           </a:xfrm>
           <a:prstGeom prst="rect">
@@ -26936,30 +27443,30 @@
             </a:avLst>
           </a:prstGeom>
           <a:solidFill>
-            <a:srgbClr val="CCFBF1"/>
-          </a:solidFill>
-          <a:ln w="12700">
-            <a:solidFill>
-              <a:srgbClr val="0D9488"/>
-            </a:solidFill>
-            <a:prstDash val="solid"/>
-          </a:ln>
-        </p:spPr>
-      </p:sp>
-      <p:sp>
-        <p:nvSpPr>
-          <p:cNvPr id="28" name="Shape 26"/>
-          <p:cNvSpPr/>
-          <p:nvPr/>
-        </p:nvSpPr>
-        <p:spPr>
-          <a:xfrm>
-            <a:off x="2313432" y="3364992"/>
-            <a:ext cx="1645920" cy="475488"/>
+            <a:srgbClr val="FCE7F3"/>
+          </a:solidFill>
+          <a:ln w="12700">
+            <a:solidFill>
+              <a:srgbClr val="DB2777"/>
+            </a:solidFill>
+            <a:prstDash val="solid"/>
+          </a:ln>
+        </p:spPr>
+      </p:sp>
+      <p:sp>
+        <p:nvSpPr>
+          <p:cNvPr id="33" name="Shape 31"/>
+          <p:cNvSpPr/>
+          <p:nvPr/>
+        </p:nvSpPr>
+        <p:spPr>
+          <a:xfrm>
+            <a:off x="2254649" y="4169664"/>
+            <a:ext cx="685800" cy="475488"/>
           </a:xfrm>
           <a:prstGeom prst="rect">
             <a:avLst>
-              <a:gd name="adj" fmla="val 9615"/>
+              <a:gd name="adj" fmla="val 7692"/>
             </a:avLst>
           </a:prstGeom>
           <a:solidFill>
@@ -26967,22 +27474,22 @@
           </a:solidFill>
           <a:ln w="12700">
             <a:solidFill>
-              <a:srgbClr val="0D9488"/>
-            </a:solidFill>
-            <a:prstDash val="solid"/>
-          </a:ln>
-        </p:spPr>
-      </p:sp>
-      <p:sp>
-        <p:nvSpPr>
-          <p:cNvPr id="29" name="Text 27"/>
-          <p:cNvSpPr/>
-          <p:nvPr/>
-        </p:nvSpPr>
-        <p:spPr>
-          <a:xfrm>
-            <a:off x="2313432" y="3364992"/>
-            <a:ext cx="1645920" cy="475488"/>
+              <a:srgbClr val="DB2777"/>
+            </a:solidFill>
+            <a:prstDash val="solid"/>
+          </a:ln>
+        </p:spPr>
+      </p:sp>
+      <p:sp>
+        <p:nvSpPr>
+          <p:cNvPr id="34" name="Text 32"/>
+          <p:cNvSpPr/>
+          <p:nvPr/>
+        </p:nvSpPr>
+        <p:spPr>
+          <a:xfrm>
+            <a:off x="2254649" y="4169664"/>
+            <a:ext cx="685800" cy="475488"/>
           </a:xfrm>
           <a:prstGeom prst="rect">
             <a:avLst/>
@@ -26998,30 +27505,57 @@
               <a:buNone/>
             </a:pPr>
             <a:r>
-              <a:rPr lang="en-US" sz="1400" b="1" dirty="0">
-                <a:solidFill>
-                  <a:srgbClr val="0D9488"/>
+              <a:rPr lang="en-US" sz="900" b="1" dirty="0">
+                <a:solidFill>
+                  <a:srgbClr val="9D174D"/>
                 </a:solidFill>
                 <a:latin typeface="Trebuchet MS" pitchFamily="34" charset="0"/>
                 <a:ea typeface="Trebuchet MS" pitchFamily="34" charset="-122"/>
                 <a:cs typeface="Trebuchet MS" pitchFamily="34" charset="-120"/>
               </a:rPr>
-              <a:t>o</a:t>
-            </a:r>
-            <a:endParaRPr lang="en-US" sz="1400" dirty="0"/>
-          </a:p>
-        </p:txBody>
-      </p:sp>
-      <p:sp>
-        <p:nvSpPr>
-          <p:cNvPr id="30" name="Text 28"/>
-          <p:cNvSpPr/>
-          <p:nvPr/>
-        </p:nvSpPr>
-        <p:spPr>
-          <a:xfrm>
-            <a:off x="3959352" y="3364992"/>
-            <a:ext cx="411480" cy="475488"/>
+              <a:t>n</a:t>
+            </a:r>
+            <a:endParaRPr lang="en-US" sz="900" dirty="0"/>
+          </a:p>
+        </p:txBody>
+      </p:sp>
+      <p:sp>
+        <p:nvSpPr>
+          <p:cNvPr id="35" name="Shape 33"/>
+          <p:cNvSpPr/>
+          <p:nvPr/>
+        </p:nvSpPr>
+        <p:spPr>
+          <a:xfrm>
+            <a:off x="3293146" y="4169664"/>
+            <a:ext cx="685800" cy="475488"/>
+          </a:xfrm>
+          <a:prstGeom prst="rect">
+            <a:avLst>
+              <a:gd name="adj" fmla="val 7692"/>
+            </a:avLst>
+          </a:prstGeom>
+          <a:solidFill>
+            <a:srgbClr val="FFFFFF"/>
+          </a:solidFill>
+          <a:ln w="12700">
+            <a:solidFill>
+              <a:srgbClr val="DB2777"/>
+            </a:solidFill>
+            <a:prstDash val="solid"/>
+          </a:ln>
+        </p:spPr>
+      </p:sp>
+      <p:sp>
+        <p:nvSpPr>
+          <p:cNvPr id="36" name="Text 34"/>
+          <p:cNvSpPr/>
+          <p:nvPr/>
+        </p:nvSpPr>
+        <p:spPr>
+          <a:xfrm>
+            <a:off x="3293146" y="4169664"/>
+            <a:ext cx="685800" cy="475488"/>
           </a:xfrm>
           <a:prstGeom prst="rect">
             <a:avLst/>
@@ -27037,34 +27571,34 @@
               <a:buNone/>
             </a:pPr>
             <a:r>
-              <a:rPr lang="en-US" sz="1600" b="1" dirty="0">
-                <a:solidFill>
-                  <a:srgbClr val="0D9488"/>
+              <a:rPr lang="en-US" sz="900" b="1" dirty="0">
+                <a:solidFill>
+                  <a:srgbClr val="9D174D"/>
                 </a:solidFill>
                 <a:latin typeface="Trebuchet MS" pitchFamily="34" charset="0"/>
                 <a:ea typeface="Trebuchet MS" pitchFamily="34" charset="-122"/>
                 <a:cs typeface="Trebuchet MS" pitchFamily="34" charset="-120"/>
               </a:rPr>
-              <a:t>·</a:t>
-            </a:r>
-            <a:endParaRPr lang="en-US" sz="1600" dirty="0"/>
-          </a:p>
-        </p:txBody>
-      </p:sp>
-      <p:sp>
-        <p:nvSpPr>
-          <p:cNvPr id="31" name="Shape 29"/>
-          <p:cNvSpPr/>
-          <p:nvPr/>
-        </p:nvSpPr>
-        <p:spPr>
-          <a:xfrm>
-            <a:off x="4370832" y="3364992"/>
-            <a:ext cx="1645920" cy="475488"/>
+              <a:t>e</a:t>
+            </a:r>
+            <a:endParaRPr lang="en-US" sz="900" dirty="0"/>
+          </a:p>
+        </p:txBody>
+      </p:sp>
+      <p:sp>
+        <p:nvSpPr>
+          <p:cNvPr id="37" name="Shape 35"/>
+          <p:cNvSpPr/>
+          <p:nvPr/>
+        </p:nvSpPr>
+        <p:spPr>
+          <a:xfrm>
+            <a:off x="4331643" y="4169664"/>
+            <a:ext cx="685800" cy="475488"/>
           </a:xfrm>
           <a:prstGeom prst="rect">
             <a:avLst>
-              <a:gd name="adj" fmla="val 9615"/>
+              <a:gd name="adj" fmla="val 7692"/>
             </a:avLst>
           </a:prstGeom>
           <a:solidFill>
@@ -27072,22 +27606,22 @@
           </a:solidFill>
           <a:ln w="12700">
             <a:solidFill>
-              <a:srgbClr val="0D9488"/>
-            </a:solidFill>
-            <a:prstDash val="solid"/>
-          </a:ln>
-        </p:spPr>
-      </p:sp>
-      <p:sp>
-        <p:nvSpPr>
-          <p:cNvPr id="32" name="Text 30"/>
-          <p:cNvSpPr/>
-          <p:nvPr/>
-        </p:nvSpPr>
-        <p:spPr>
-          <a:xfrm>
-            <a:off x="4370832" y="3364992"/>
-            <a:ext cx="1645920" cy="475488"/>
+              <a:srgbClr val="DB2777"/>
+            </a:solidFill>
+            <a:prstDash val="solid"/>
+          </a:ln>
+        </p:spPr>
+      </p:sp>
+      <p:sp>
+        <p:nvSpPr>
+          <p:cNvPr id="38" name="Text 36"/>
+          <p:cNvSpPr/>
+          <p:nvPr/>
+        </p:nvSpPr>
+        <p:spPr>
+          <a:xfrm>
+            <a:off x="4331643" y="4169664"/>
+            <a:ext cx="685800" cy="475488"/>
           </a:xfrm>
           <a:prstGeom prst="rect">
             <a:avLst/>
@@ -27103,30 +27637,57 @@
               <a:buNone/>
             </a:pPr>
             <a:r>
-              <a:rPr lang="en-US" sz="1400" b="1" dirty="0">
-                <a:solidFill>
-                  <a:srgbClr val="0D9488"/>
+              <a:rPr lang="en-US" sz="900" b="1" dirty="0">
+                <a:solidFill>
+                  <a:srgbClr val="9D174D"/>
                 </a:solidFill>
                 <a:latin typeface="Trebuchet MS" pitchFamily="34" charset="0"/>
                 <a:ea typeface="Trebuchet MS" pitchFamily="34" charset="-122"/>
                 <a:cs typeface="Trebuchet MS" pitchFamily="34" charset="-120"/>
               </a:rPr>
-              <a:t>ver</a:t>
-            </a:r>
-            <a:endParaRPr lang="en-US" sz="1400" dirty="0"/>
-          </a:p>
-        </p:txBody>
-      </p:sp>
-      <p:sp>
-        <p:nvSpPr>
-          <p:cNvPr id="33" name="Text 31"/>
-          <p:cNvSpPr/>
-          <p:nvPr/>
-        </p:nvSpPr>
-        <p:spPr>
-          <a:xfrm>
-            <a:off x="6016752" y="3364992"/>
-            <a:ext cx="411480" cy="475488"/>
+              <a:t>t</a:t>
+            </a:r>
+            <a:endParaRPr lang="en-US" sz="900" dirty="0"/>
+          </a:p>
+        </p:txBody>
+      </p:sp>
+      <p:sp>
+        <p:nvSpPr>
+          <p:cNvPr id="39" name="Shape 37"/>
+          <p:cNvSpPr/>
+          <p:nvPr/>
+        </p:nvSpPr>
+        <p:spPr>
+          <a:xfrm>
+            <a:off x="5370141" y="4169664"/>
+            <a:ext cx="685800" cy="475488"/>
+          </a:xfrm>
+          <a:prstGeom prst="rect">
+            <a:avLst>
+              <a:gd name="adj" fmla="val 7692"/>
+            </a:avLst>
+          </a:prstGeom>
+          <a:solidFill>
+            <a:srgbClr val="FFFFFF"/>
+          </a:solidFill>
+          <a:ln w="12700">
+            <a:solidFill>
+              <a:srgbClr val="DB2777"/>
+            </a:solidFill>
+            <a:prstDash val="solid"/>
+          </a:ln>
+        </p:spPr>
+      </p:sp>
+      <p:sp>
+        <p:nvSpPr>
+          <p:cNvPr id="40" name="Text 38"/>
+          <p:cNvSpPr/>
+          <p:nvPr/>
+        </p:nvSpPr>
+        <p:spPr>
+          <a:xfrm>
+            <a:off x="5370141" y="4169664"/>
+            <a:ext cx="685800" cy="475488"/>
           </a:xfrm>
           <a:prstGeom prst="rect">
             <a:avLst/>
@@ -27142,34 +27703,34 @@
               <a:buNone/>
             </a:pPr>
             <a:r>
-              <a:rPr lang="en-US" sz="1600" b="1" dirty="0">
-                <a:solidFill>
-                  <a:srgbClr val="0D9488"/>
+              <a:rPr lang="en-US" sz="900" b="1" dirty="0">
+                <a:solidFill>
+                  <a:srgbClr val="9D174D"/>
                 </a:solidFill>
                 <a:latin typeface="Trebuchet MS" pitchFamily="34" charset="0"/>
                 <a:ea typeface="Trebuchet MS" pitchFamily="34" charset="-122"/>
                 <a:cs typeface="Trebuchet MS" pitchFamily="34" charset="-120"/>
               </a:rPr>
-              <a:t>·</a:t>
-            </a:r>
-            <a:endParaRPr lang="en-US" sz="1600" dirty="0"/>
-          </a:p>
-        </p:txBody>
-      </p:sp>
-      <p:sp>
-        <p:nvSpPr>
-          <p:cNvPr id="34" name="Shape 32"/>
-          <p:cNvSpPr/>
-          <p:nvPr/>
-        </p:nvSpPr>
-        <p:spPr>
-          <a:xfrm>
-            <a:off x="6428232" y="3364992"/>
-            <a:ext cx="1645920" cy="475488"/>
+              <a:t>w</a:t>
+            </a:r>
+            <a:endParaRPr lang="en-US" sz="900" dirty="0"/>
+          </a:p>
+        </p:txBody>
+      </p:sp>
+      <p:sp>
+        <p:nvSpPr>
+          <p:cNvPr id="41" name="Shape 39"/>
+          <p:cNvSpPr/>
+          <p:nvPr/>
+        </p:nvSpPr>
+        <p:spPr>
+          <a:xfrm>
+            <a:off x="6408638" y="4169664"/>
+            <a:ext cx="685800" cy="475488"/>
           </a:xfrm>
           <a:prstGeom prst="rect">
             <a:avLst>
-              <a:gd name="adj" fmla="val 9615"/>
+              <a:gd name="adj" fmla="val 7692"/>
             </a:avLst>
           </a:prstGeom>
           <a:solidFill>
@@ -27177,22 +27738,22 @@
           </a:solidFill>
           <a:ln w="12700">
             <a:solidFill>
-              <a:srgbClr val="0D9488"/>
-            </a:solidFill>
-            <a:prstDash val="solid"/>
-          </a:ln>
-        </p:spPr>
-      </p:sp>
-      <p:sp>
-        <p:nvSpPr>
-          <p:cNvPr id="35" name="Text 33"/>
-          <p:cNvSpPr/>
-          <p:nvPr/>
-        </p:nvSpPr>
-        <p:spPr>
-          <a:xfrm>
-            <a:off x="6428232" y="3364992"/>
-            <a:ext cx="1645920" cy="475488"/>
+              <a:srgbClr val="DB2777"/>
+            </a:solidFill>
+            <a:prstDash val="solid"/>
+          </a:ln>
+        </p:spPr>
+      </p:sp>
+      <p:sp>
+        <p:nvSpPr>
+          <p:cNvPr id="42" name="Text 40"/>
+          <p:cNvSpPr/>
+          <p:nvPr/>
+        </p:nvSpPr>
+        <p:spPr>
+          <a:xfrm>
+            <a:off x="6408638" y="4169664"/>
+            <a:ext cx="685800" cy="475488"/>
           </a:xfrm>
           <a:prstGeom prst="rect">
             <a:avLst/>
@@ -27208,57 +27769,57 @@
               <a:buNone/>
             </a:pPr>
             <a:r>
-              <a:rPr lang="en-US" sz="1400" b="1" dirty="0">
-                <a:solidFill>
-                  <a:srgbClr val="0D9488"/>
+              <a:rPr lang="en-US" sz="900" b="1" dirty="0">
+                <a:solidFill>
+                  <a:srgbClr val="9D174D"/>
                 </a:solidFill>
                 <a:latin typeface="Trebuchet MS" pitchFamily="34" charset="0"/>
                 <a:ea typeface="Trebuchet MS" pitchFamily="34" charset="-122"/>
                 <a:cs typeface="Trebuchet MS" pitchFamily="34" charset="-120"/>
               </a:rPr>
-              <a:t>worked</a:t>
-            </a:r>
-            <a:endParaRPr lang="en-US" sz="1400" dirty="0"/>
-          </a:p>
-        </p:txBody>
-      </p:sp>
-      <p:sp>
-        <p:nvSpPr>
-          <p:cNvPr id="36" name="Shape 34"/>
-          <p:cNvSpPr/>
-          <p:nvPr/>
-        </p:nvSpPr>
-        <p:spPr>
-          <a:xfrm>
-            <a:off x="365760" y="4096512"/>
-            <a:ext cx="1371600" cy="804672"/>
+              <a:t>or</a:t>
+            </a:r>
+            <a:endParaRPr lang="en-US" sz="900" dirty="0"/>
+          </a:p>
+        </p:txBody>
+      </p:sp>
+      <p:sp>
+        <p:nvSpPr>
+          <p:cNvPr id="43" name="Shape 41"/>
+          <p:cNvSpPr/>
+          <p:nvPr/>
+        </p:nvSpPr>
+        <p:spPr>
+          <a:xfrm>
+            <a:off x="7447135" y="4169664"/>
+            <a:ext cx="685800" cy="475488"/>
           </a:xfrm>
           <a:prstGeom prst="rect">
             <a:avLst>
-              <a:gd name="adj" fmla="val 6818"/>
+              <a:gd name="adj" fmla="val 7692"/>
             </a:avLst>
           </a:prstGeom>
           <a:solidFill>
-            <a:srgbClr val="E2E8F0"/>
-          </a:solidFill>
-          <a:ln w="12700">
-            <a:solidFill>
-              <a:srgbClr val="E2E8F0"/>
-            </a:solidFill>
-            <a:prstDash val="solid"/>
-          </a:ln>
-        </p:spPr>
-      </p:sp>
-      <p:sp>
-        <p:nvSpPr>
-          <p:cNvPr id="37" name="Text 35"/>
-          <p:cNvSpPr/>
-          <p:nvPr/>
-        </p:nvSpPr>
-        <p:spPr>
-          <a:xfrm>
-            <a:off x="365760" y="4096512"/>
-            <a:ext cx="1371600" cy="804672"/>
+            <a:srgbClr val="FFFFFF"/>
+          </a:solidFill>
+          <a:ln w="12700">
+            <a:solidFill>
+              <a:srgbClr val="DB2777"/>
+            </a:solidFill>
+            <a:prstDash val="solid"/>
+          </a:ln>
+        </p:spPr>
+      </p:sp>
+      <p:sp>
+        <p:nvSpPr>
+          <p:cNvPr id="44" name="Text 42"/>
+          <p:cNvSpPr/>
+          <p:nvPr/>
+        </p:nvSpPr>
+        <p:spPr>
+          <a:xfrm>
+            <a:off x="7447135" y="4169664"/>
+            <a:ext cx="685800" cy="475488"/>
           </a:xfrm>
           <a:prstGeom prst="rect">
             <a:avLst/>
@@ -27274,545 +27835,17 @@
               <a:buNone/>
             </a:pPr>
             <a:r>
-              <a:rPr lang="en-US" sz="1100" b="1" dirty="0">
-                <a:solidFill>
-                  <a:srgbClr val="475569"/>
+              <a:rPr lang="en-US" sz="900" b="1" dirty="0">
+                <a:solidFill>
+                  <a:srgbClr val="9D174D"/>
                 </a:solidFill>
                 <a:latin typeface="Trebuchet MS" pitchFamily="34" charset="0"/>
                 <a:ea typeface="Trebuchet MS" pitchFamily="34" charset="-122"/>
                 <a:cs typeface="Trebuchet MS" pitchFamily="34" charset="-120"/>
               </a:rPr>
-              <a:t>Phonemes</a:t>
-            </a:r>
-            <a:endParaRPr lang="en-US" sz="1100" dirty="0"/>
-          </a:p>
-        </p:txBody>
-      </p:sp>
-      <p:sp>
-        <p:nvSpPr>
-          <p:cNvPr id="38" name="Shape 36"/>
-          <p:cNvSpPr/>
-          <p:nvPr/>
-        </p:nvSpPr>
-        <p:spPr>
-          <a:xfrm>
-            <a:off x="1874520" y="4096512"/>
-            <a:ext cx="6903720" cy="804672"/>
-          </a:xfrm>
-          <a:prstGeom prst="rect">
-            <a:avLst>
-              <a:gd name="adj" fmla="val 6818"/>
-            </a:avLst>
-          </a:prstGeom>
-          <a:solidFill>
-            <a:srgbClr val="FCE7F3"/>
-          </a:solidFill>
-          <a:ln w="12700">
-            <a:solidFill>
-              <a:srgbClr val="DB2777"/>
-            </a:solidFill>
-            <a:prstDash val="solid"/>
-          </a:ln>
-        </p:spPr>
-      </p:sp>
-      <p:sp>
-        <p:nvSpPr>
-          <p:cNvPr id="39" name="Shape 37"/>
-          <p:cNvSpPr/>
-          <p:nvPr/>
-        </p:nvSpPr>
-        <p:spPr>
-          <a:xfrm>
-            <a:off x="2124837" y="4169664"/>
-            <a:ext cx="685800" cy="384048"/>
-          </a:xfrm>
-          <a:prstGeom prst="rect">
-            <a:avLst>
-              <a:gd name="adj" fmla="val 9524"/>
-            </a:avLst>
-          </a:prstGeom>
-          <a:solidFill>
-            <a:srgbClr val="FFFFFF"/>
-          </a:solidFill>
-          <a:ln w="12700">
-            <a:solidFill>
-              <a:srgbClr val="DB2777"/>
-            </a:solidFill>
-            <a:prstDash val="solid"/>
-          </a:ln>
-        </p:spPr>
-      </p:sp>
-      <p:sp>
-        <p:nvSpPr>
-          <p:cNvPr id="40" name="Text 38"/>
-          <p:cNvSpPr/>
-          <p:nvPr/>
-        </p:nvSpPr>
-        <p:spPr>
-          <a:xfrm>
-            <a:off x="2124837" y="4169664"/>
-            <a:ext cx="685800" cy="384048"/>
-          </a:xfrm>
-          <a:prstGeom prst="rect">
-            <a:avLst/>
-          </a:prstGeom>
-          <a:noFill/>
-          <a:ln/>
-        </p:spPr>
-        <p:txBody>
-          <a:bodyPr wrap="square" lIns="0" tIns="0" rIns="0" bIns="0" rtlCol="0" anchor="ctr"/>
-          <a:lstStyle/>
-          <a:p>
-            <a:pPr algn="ctr" indent="0" marL="0">
-              <a:buNone/>
-            </a:pPr>
-            <a:r>
-              <a:rPr lang="en-US" sz="900" b="1" dirty="0">
-                <a:solidFill>
-                  <a:srgbClr val="9D174D"/>
-                </a:solidFill>
-                <a:latin typeface="Trebuchet MS" pitchFamily="34" charset="0"/>
-                <a:ea typeface="Trebuchet MS" pitchFamily="34" charset="-122"/>
-                <a:cs typeface="Trebuchet MS" pitchFamily="34" charset="-120"/>
-              </a:rPr>
-              <a:t>o</a:t>
+              <a:t>k</a:t>
             </a:r>
             <a:endParaRPr lang="en-US" sz="900" dirty="0"/>
-          </a:p>
-        </p:txBody>
-      </p:sp>
-      <p:sp>
-        <p:nvSpPr>
-          <p:cNvPr id="41" name="Shape 39"/>
-          <p:cNvSpPr/>
-          <p:nvPr/>
-        </p:nvSpPr>
-        <p:spPr>
-          <a:xfrm>
-            <a:off x="3033522" y="4169664"/>
-            <a:ext cx="685800" cy="384048"/>
-          </a:xfrm>
-          <a:prstGeom prst="rect">
-            <a:avLst>
-              <a:gd name="adj" fmla="val 9524"/>
-            </a:avLst>
-          </a:prstGeom>
-          <a:solidFill>
-            <a:srgbClr val="FFFFFF"/>
-          </a:solidFill>
-          <a:ln w="12700">
-            <a:solidFill>
-              <a:srgbClr val="DB2777"/>
-            </a:solidFill>
-            <a:prstDash val="solid"/>
-          </a:ln>
-        </p:spPr>
-      </p:sp>
-      <p:sp>
-        <p:nvSpPr>
-          <p:cNvPr id="42" name="Text 40"/>
-          <p:cNvSpPr/>
-          <p:nvPr/>
-        </p:nvSpPr>
-        <p:spPr>
-          <a:xfrm>
-            <a:off x="3033522" y="4169664"/>
-            <a:ext cx="685800" cy="384048"/>
-          </a:xfrm>
-          <a:prstGeom prst="rect">
-            <a:avLst/>
-          </a:prstGeom>
-          <a:noFill/>
-          <a:ln/>
-        </p:spPr>
-        <p:txBody>
-          <a:bodyPr wrap="square" lIns="0" tIns="0" rIns="0" bIns="0" rtlCol="0" anchor="ctr"/>
-          <a:lstStyle/>
-          <a:p>
-            <a:pPr algn="ctr" indent="0" marL="0">
-              <a:buNone/>
-            </a:pPr>
-            <a:r>
-              <a:rPr lang="en-US" sz="900" b="1" dirty="0">
-                <a:solidFill>
-                  <a:srgbClr val="9D174D"/>
-                </a:solidFill>
-                <a:latin typeface="Trebuchet MS" pitchFamily="34" charset="0"/>
-                <a:ea typeface="Trebuchet MS" pitchFamily="34" charset="-122"/>
-                <a:cs typeface="Trebuchet MS" pitchFamily="34" charset="-120"/>
-              </a:rPr>
-              <a:t>v</a:t>
-            </a:r>
-            <a:endParaRPr lang="en-US" sz="900" dirty="0"/>
-          </a:p>
-        </p:txBody>
-      </p:sp>
-      <p:sp>
-        <p:nvSpPr>
-          <p:cNvPr id="43" name="Shape 41"/>
-          <p:cNvSpPr/>
-          <p:nvPr/>
-        </p:nvSpPr>
-        <p:spPr>
-          <a:xfrm>
-            <a:off x="3942207" y="4169664"/>
-            <a:ext cx="685800" cy="384048"/>
-          </a:xfrm>
-          <a:prstGeom prst="rect">
-            <a:avLst>
-              <a:gd name="adj" fmla="val 9524"/>
-            </a:avLst>
-          </a:prstGeom>
-          <a:solidFill>
-            <a:srgbClr val="FFFFFF"/>
-          </a:solidFill>
-          <a:ln w="12700">
-            <a:solidFill>
-              <a:srgbClr val="DB2777"/>
-            </a:solidFill>
-            <a:prstDash val="solid"/>
-          </a:ln>
-        </p:spPr>
-      </p:sp>
-      <p:sp>
-        <p:nvSpPr>
-          <p:cNvPr id="44" name="Text 42"/>
-          <p:cNvSpPr/>
-          <p:nvPr/>
-        </p:nvSpPr>
-        <p:spPr>
-          <a:xfrm>
-            <a:off x="3942207" y="4169664"/>
-            <a:ext cx="685800" cy="384048"/>
-          </a:xfrm>
-          <a:prstGeom prst="rect">
-            <a:avLst/>
-          </a:prstGeom>
-          <a:noFill/>
-          <a:ln/>
-        </p:spPr>
-        <p:txBody>
-          <a:bodyPr wrap="square" lIns="0" tIns="0" rIns="0" bIns="0" rtlCol="0" anchor="ctr"/>
-          <a:lstStyle/>
-          <a:p>
-            <a:pPr algn="ctr" indent="0" marL="0">
-              <a:buNone/>
-            </a:pPr>
-            <a:r>
-              <a:rPr lang="en-US" sz="900" b="1" dirty="0">
-                <a:solidFill>
-                  <a:srgbClr val="9D174D"/>
-                </a:solidFill>
-                <a:latin typeface="Trebuchet MS" pitchFamily="34" charset="0"/>
-                <a:ea typeface="Trebuchet MS" pitchFamily="34" charset="-122"/>
-                <a:cs typeface="Trebuchet MS" pitchFamily="34" charset="-120"/>
-              </a:rPr>
-              <a:t>er</a:t>
-            </a:r>
-            <a:endParaRPr lang="en-US" sz="900" dirty="0"/>
-          </a:p>
-        </p:txBody>
-      </p:sp>
-      <p:sp>
-        <p:nvSpPr>
-          <p:cNvPr id="45" name="Shape 43"/>
-          <p:cNvSpPr/>
-          <p:nvPr/>
-        </p:nvSpPr>
-        <p:spPr>
-          <a:xfrm>
-            <a:off x="4850892" y="4169664"/>
-            <a:ext cx="685800" cy="384048"/>
-          </a:xfrm>
-          <a:prstGeom prst="rect">
-            <a:avLst>
-              <a:gd name="adj" fmla="val 9524"/>
-            </a:avLst>
-          </a:prstGeom>
-          <a:solidFill>
-            <a:srgbClr val="FFFFFF"/>
-          </a:solidFill>
-          <a:ln w="12700">
-            <a:solidFill>
-              <a:srgbClr val="DB2777"/>
-            </a:solidFill>
-            <a:prstDash val="solid"/>
-          </a:ln>
-        </p:spPr>
-      </p:sp>
-      <p:sp>
-        <p:nvSpPr>
-          <p:cNvPr id="46" name="Text 44"/>
-          <p:cNvSpPr/>
-          <p:nvPr/>
-        </p:nvSpPr>
-        <p:spPr>
-          <a:xfrm>
-            <a:off x="4850892" y="4169664"/>
-            <a:ext cx="685800" cy="384048"/>
-          </a:xfrm>
-          <a:prstGeom prst="rect">
-            <a:avLst/>
-          </a:prstGeom>
-          <a:noFill/>
-          <a:ln/>
-        </p:spPr>
-        <p:txBody>
-          <a:bodyPr wrap="square" lIns="0" tIns="0" rIns="0" bIns="0" rtlCol="0" anchor="ctr"/>
-          <a:lstStyle/>
-          <a:p>
-            <a:pPr algn="ctr" indent="0" marL="0">
-              <a:buNone/>
-            </a:pPr>
-            <a:r>
-              <a:rPr lang="en-US" sz="900" b="1" dirty="0">
-                <a:solidFill>
-                  <a:srgbClr val="9D174D"/>
-                </a:solidFill>
-                <a:latin typeface="Trebuchet MS" pitchFamily="34" charset="0"/>
-                <a:ea typeface="Trebuchet MS" pitchFamily="34" charset="-122"/>
-                <a:cs typeface="Trebuchet MS" pitchFamily="34" charset="-120"/>
-              </a:rPr>
-              <a:t>w</a:t>
-            </a:r>
-            <a:endParaRPr lang="en-US" sz="900" dirty="0"/>
-          </a:p>
-        </p:txBody>
-      </p:sp>
-      <p:sp>
-        <p:nvSpPr>
-          <p:cNvPr id="47" name="Shape 45"/>
-          <p:cNvSpPr/>
-          <p:nvPr/>
-        </p:nvSpPr>
-        <p:spPr>
-          <a:xfrm>
-            <a:off x="5759577" y="4169664"/>
-            <a:ext cx="685800" cy="384048"/>
-          </a:xfrm>
-          <a:prstGeom prst="rect">
-            <a:avLst>
-              <a:gd name="adj" fmla="val 9524"/>
-            </a:avLst>
-          </a:prstGeom>
-          <a:solidFill>
-            <a:srgbClr val="FFFFFF"/>
-          </a:solidFill>
-          <a:ln w="12700">
-            <a:solidFill>
-              <a:srgbClr val="DB2777"/>
-            </a:solidFill>
-            <a:prstDash val="solid"/>
-          </a:ln>
-        </p:spPr>
-      </p:sp>
-      <p:sp>
-        <p:nvSpPr>
-          <p:cNvPr id="48" name="Text 46"/>
-          <p:cNvSpPr/>
-          <p:nvPr/>
-        </p:nvSpPr>
-        <p:spPr>
-          <a:xfrm>
-            <a:off x="5759577" y="4169664"/>
-            <a:ext cx="685800" cy="384048"/>
-          </a:xfrm>
-          <a:prstGeom prst="rect">
-            <a:avLst/>
-          </a:prstGeom>
-          <a:noFill/>
-          <a:ln/>
-        </p:spPr>
-        <p:txBody>
-          <a:bodyPr wrap="square" lIns="0" tIns="0" rIns="0" bIns="0" rtlCol="0" anchor="ctr"/>
-          <a:lstStyle/>
-          <a:p>
-            <a:pPr algn="ctr" indent="0" marL="0">
-              <a:buNone/>
-            </a:pPr>
-            <a:r>
-              <a:rPr lang="en-US" sz="900" b="1" dirty="0">
-                <a:solidFill>
-                  <a:srgbClr val="9D174D"/>
-                </a:solidFill>
-                <a:latin typeface="Trebuchet MS" pitchFamily="34" charset="0"/>
-                <a:ea typeface="Trebuchet MS" pitchFamily="34" charset="-122"/>
-                <a:cs typeface="Trebuchet MS" pitchFamily="34" charset="-120"/>
-              </a:rPr>
-              <a:t>or</a:t>
-            </a:r>
-            <a:endParaRPr lang="en-US" sz="900" dirty="0"/>
-          </a:p>
-        </p:txBody>
-      </p:sp>
-      <p:sp>
-        <p:nvSpPr>
-          <p:cNvPr id="49" name="Shape 47"/>
-          <p:cNvSpPr/>
-          <p:nvPr/>
-        </p:nvSpPr>
-        <p:spPr>
-          <a:xfrm>
-            <a:off x="6668262" y="4169664"/>
-            <a:ext cx="685800" cy="384048"/>
-          </a:xfrm>
-          <a:prstGeom prst="rect">
-            <a:avLst>
-              <a:gd name="adj" fmla="val 9524"/>
-            </a:avLst>
-          </a:prstGeom>
-          <a:solidFill>
-            <a:srgbClr val="FFFFFF"/>
-          </a:solidFill>
-          <a:ln w="12700">
-            <a:solidFill>
-              <a:srgbClr val="DB2777"/>
-            </a:solidFill>
-            <a:prstDash val="solid"/>
-          </a:ln>
-        </p:spPr>
-      </p:sp>
-      <p:sp>
-        <p:nvSpPr>
-          <p:cNvPr id="50" name="Text 48"/>
-          <p:cNvSpPr/>
-          <p:nvPr/>
-        </p:nvSpPr>
-        <p:spPr>
-          <a:xfrm>
-            <a:off x="6668262" y="4169664"/>
-            <a:ext cx="685800" cy="384048"/>
-          </a:xfrm>
-          <a:prstGeom prst="rect">
-            <a:avLst/>
-          </a:prstGeom>
-          <a:noFill/>
-          <a:ln/>
-        </p:spPr>
-        <p:txBody>
-          <a:bodyPr wrap="square" lIns="0" tIns="0" rIns="0" bIns="0" rtlCol="0" anchor="ctr"/>
-          <a:lstStyle/>
-          <a:p>
-            <a:pPr algn="ctr" indent="0" marL="0">
-              <a:buNone/>
-            </a:pPr>
-            <a:r>
-              <a:rPr lang="en-US" sz="900" b="1" dirty="0">
-                <a:solidFill>
-                  <a:srgbClr val="9D174D"/>
-                </a:solidFill>
-                <a:latin typeface="Trebuchet MS" pitchFamily="34" charset="0"/>
-                <a:ea typeface="Trebuchet MS" pitchFamily="34" charset="-122"/>
-                <a:cs typeface="Trebuchet MS" pitchFamily="34" charset="-120"/>
-              </a:rPr>
-              <a:t>k</a:t>
-            </a:r>
-            <a:endParaRPr lang="en-US" sz="900" dirty="0"/>
-          </a:p>
-        </p:txBody>
-      </p:sp>
-      <p:sp>
-        <p:nvSpPr>
-          <p:cNvPr id="51" name="Shape 49"/>
-          <p:cNvSpPr/>
-          <p:nvPr/>
-        </p:nvSpPr>
-        <p:spPr>
-          <a:xfrm>
-            <a:off x="7576947" y="4169664"/>
-            <a:ext cx="685800" cy="384048"/>
-          </a:xfrm>
-          <a:prstGeom prst="rect">
-            <a:avLst>
-              <a:gd name="adj" fmla="val 9524"/>
-            </a:avLst>
-          </a:prstGeom>
-          <a:solidFill>
-            <a:srgbClr val="FFFFFF"/>
-          </a:solidFill>
-          <a:ln w="12700">
-            <a:solidFill>
-              <a:srgbClr val="DB2777"/>
-            </a:solidFill>
-            <a:prstDash val="solid"/>
-          </a:ln>
-        </p:spPr>
-      </p:sp>
-      <p:sp>
-        <p:nvSpPr>
-          <p:cNvPr id="52" name="Text 50"/>
-          <p:cNvSpPr/>
-          <p:nvPr/>
-        </p:nvSpPr>
-        <p:spPr>
-          <a:xfrm>
-            <a:off x="7576947" y="4169664"/>
-            <a:ext cx="685800" cy="384048"/>
-          </a:xfrm>
-          <a:prstGeom prst="rect">
-            <a:avLst/>
-          </a:prstGeom>
-          <a:noFill/>
-          <a:ln/>
-        </p:spPr>
-        <p:txBody>
-          <a:bodyPr wrap="square" lIns="0" tIns="0" rIns="0" bIns="0" rtlCol="0" anchor="ctr"/>
-          <a:lstStyle/>
-          <a:p>
-            <a:pPr algn="ctr" indent="0" marL="0">
-              <a:buNone/>
-            </a:pPr>
-            <a:r>
-              <a:rPr lang="en-US" sz="900" b="1" dirty="0">
-                <a:solidFill>
-                  <a:srgbClr val="9D174D"/>
-                </a:solidFill>
-                <a:latin typeface="Trebuchet MS" pitchFamily="34" charset="0"/>
-                <a:ea typeface="Trebuchet MS" pitchFamily="34" charset="-122"/>
-                <a:cs typeface="Trebuchet MS" pitchFamily="34" charset="-120"/>
-              </a:rPr>
-              <a:t>t</a:t>
-            </a:r>
-            <a:endParaRPr lang="en-US" sz="900" dirty="0"/>
-          </a:p>
-        </p:txBody>
-      </p:sp>
-      <p:sp>
-        <p:nvSpPr>
-          <p:cNvPr id="53" name="Text 51"/>
-          <p:cNvSpPr/>
-          <p:nvPr/>
-        </p:nvSpPr>
-        <p:spPr>
-          <a:xfrm>
-            <a:off x="7576947" y="4572000"/>
-            <a:ext cx="685800" cy="219456"/>
-          </a:xfrm>
-          <a:prstGeom prst="rect">
-            <a:avLst/>
-          </a:prstGeom>
-          <a:noFill/>
-          <a:ln/>
-        </p:spPr>
-        <p:txBody>
-          <a:bodyPr wrap="square" lIns="0" tIns="0" rIns="0" bIns="0" rtlCol="0" anchor="t"/>
-          <a:lstStyle/>
-          <a:p>
-            <a:pPr algn="ctr" indent="0" marL="0">
-              <a:buNone/>
-            </a:pPr>
-            <a:r>
-              <a:rPr lang="en-US" sz="750" i="1" dirty="0">
-                <a:solidFill>
-                  <a:srgbClr val="94A3B8"/>
-                </a:solidFill>
-                <a:latin typeface="Calibri" pitchFamily="34" charset="0"/>
-                <a:ea typeface="Calibri" pitchFamily="34" charset="-122"/>
-                <a:cs typeface="Calibri" pitchFamily="34" charset="-120"/>
-              </a:rPr>
-              <a:t>/t/</a:t>
-            </a:r>
-            <a:endParaRPr lang="en-US" sz="750" dirty="0"/>
           </a:p>
         </p:txBody>
       </p:sp>
@@ -28102,7 +28135,7 @@
                 <a:ea typeface="Calibri" pitchFamily="34" charset="-122"/>
                 <a:cs typeface="Calibri" pitchFamily="34" charset="-120"/>
               </a:rPr>
-              <a:t>Word Labs  •  wordlabs.app  •  Root: 'work' = to do effort or labour</a:t>
+              <a:t>Word Labs  •  wordlabs.app  •  Root: 'work' = to do or make effort</a:t>
             </a:r>
             <a:endParaRPr lang="en-US" sz="800" dirty="0"/>
           </a:p>
@@ -28241,7 +28274,7 @@
                 <a:ea typeface="Trebuchet MS" pitchFamily="34" charset="-122"/>
                 <a:cs typeface="Trebuchet MS" pitchFamily="34" charset="-120"/>
               </a:rPr>
-              <a:t>rework</a:t>
+              <a:t>workload</a:t>
             </a:r>
             <a:endParaRPr lang="en-US" sz="2800" dirty="0"/>
           </a:p>
@@ -28929,7 +28962,7 @@
                 <a:ea typeface="Calibri" pitchFamily="34" charset="-122"/>
                 <a:cs typeface="Calibri" pitchFamily="34" charset="-120"/>
               </a:rPr>
-              <a:t>Word Labs  •  wordlabs.app  •  Root: 'work' = to do effort or labour</a:t>
+              <a:t>Word Labs  •  wordlabs.app  •  Root: 'work' = to do or make effort</a:t>
             </a:r>
             <a:endParaRPr lang="en-US" sz="800" dirty="0"/>
           </a:p>
@@ -29068,7 +29101,7 @@
                 <a:ea typeface="Trebuchet MS" pitchFamily="34" charset="-122"/>
                 <a:cs typeface="Trebuchet MS" pitchFamily="34" charset="-120"/>
               </a:rPr>
-              <a:t>rework</a:t>
+              <a:t>workload</a:t>
             </a:r>
             <a:endParaRPr lang="en-US" sz="2800" dirty="0"/>
           </a:p>
@@ -29157,11 +29190,11 @@
             </a:avLst>
           </a:prstGeom>
           <a:solidFill>
-            <a:srgbClr val="DDD6FE"/>
+            <a:srgbClr val="CCFBF1"/>
           </a:solidFill>
           <a:ln w="19050">
             <a:solidFill>
-              <a:srgbClr val="7C3AED"/>
+              <a:srgbClr val="0D9488"/>
             </a:solidFill>
             <a:prstDash val="solid"/>
           </a:ln>
@@ -29201,13 +29234,13 @@
             <a:r>
               <a:rPr lang="en-US" sz="1300" b="1" dirty="0">
                 <a:solidFill>
-                  <a:srgbClr val="4C1D95"/>
+                  <a:srgbClr val="0F766E"/>
                 </a:solidFill>
                 <a:latin typeface="Trebuchet MS" pitchFamily="34" charset="0"/>
                 <a:ea typeface="Trebuchet MS" pitchFamily="34" charset="-122"/>
                 <a:cs typeface="Trebuchet MS" pitchFamily="34" charset="-120"/>
               </a:rPr>
-              <a:t>re</a:t>
+              <a:t>work</a:t>
             </a:r>
             <a:endParaRPr lang="en-US" sz="1300" dirty="0"/>
           </a:p>
@@ -29246,7 +29279,7 @@
                 <a:ea typeface="Calibri" pitchFamily="34" charset="-122"/>
                 <a:cs typeface="Calibri" pitchFamily="34" charset="-120"/>
               </a:rPr>
-              <a:t>again</a:t>
+              <a:t>to do or make effort</a:t>
             </a:r>
             <a:endParaRPr lang="en-US" sz="850" dirty="0"/>
           </a:p>
@@ -29269,11 +29302,11 @@
             </a:avLst>
           </a:prstGeom>
           <a:solidFill>
-            <a:srgbClr val="CCFBF1"/>
+            <a:srgbClr val="FCE7F3"/>
           </a:solidFill>
           <a:ln w="19050">
             <a:solidFill>
-              <a:srgbClr val="0D9488"/>
+              <a:srgbClr val="DB2777"/>
             </a:solidFill>
             <a:prstDash val="solid"/>
           </a:ln>
@@ -29313,13 +29346,13 @@
             <a:r>
               <a:rPr lang="en-US" sz="1300" b="1" dirty="0">
                 <a:solidFill>
-                  <a:srgbClr val="0F766E"/>
+                  <a:srgbClr val="9D174D"/>
                 </a:solidFill>
                 <a:latin typeface="Trebuchet MS" pitchFamily="34" charset="0"/>
                 <a:ea typeface="Trebuchet MS" pitchFamily="34" charset="-122"/>
                 <a:cs typeface="Trebuchet MS" pitchFamily="34" charset="-120"/>
               </a:rPr>
-              <a:t>work</a:t>
+              <a:t>load</a:t>
             </a:r>
             <a:endParaRPr lang="en-US" sz="1300" dirty="0"/>
           </a:p>
@@ -29358,7 +29391,7 @@
                 <a:ea typeface="Calibri" pitchFamily="34" charset="-122"/>
                 <a:cs typeface="Calibri" pitchFamily="34" charset="-120"/>
               </a:rPr>
-              <a:t>effort or labour</a:t>
+              <a:t>an amount carried or held</a:t>
             </a:r>
             <a:endParaRPr lang="en-US" sz="850" dirty="0"/>
           </a:p>
@@ -29914,7 +29947,7 @@
                 <a:ea typeface="Calibri" pitchFamily="34" charset="-122"/>
                 <a:cs typeface="Calibri" pitchFamily="34" charset="-120"/>
               </a:rPr>
-              <a:t>Word Labs  •  wordlabs.app  •  Root: 'work' = to do effort or labour</a:t>
+              <a:t>Word Labs  •  wordlabs.app  •  Root: 'work' = to do or make effort</a:t>
             </a:r>
             <a:endParaRPr lang="en-US" sz="800" dirty="0"/>
           </a:p>
@@ -30053,7 +30086,7 @@
                 <a:ea typeface="Trebuchet MS" pitchFamily="34" charset="-122"/>
                 <a:cs typeface="Trebuchet MS" pitchFamily="34" charset="-120"/>
               </a:rPr>
-              <a:t>rework</a:t>
+              <a:t>workload</a:t>
             </a:r>
             <a:endParaRPr lang="en-US" sz="2800" dirty="0"/>
           </a:p>
@@ -30142,11 +30175,11 @@
             </a:avLst>
           </a:prstGeom>
           <a:solidFill>
-            <a:srgbClr val="DDD6FE"/>
+            <a:srgbClr val="CCFBF1"/>
           </a:solidFill>
           <a:ln w="19050">
             <a:solidFill>
-              <a:srgbClr val="7C3AED"/>
+              <a:srgbClr val="0D9488"/>
             </a:solidFill>
             <a:prstDash val="solid"/>
           </a:ln>
@@ -30186,13 +30219,13 @@
             <a:r>
               <a:rPr lang="en-US" sz="1300" b="1" dirty="0">
                 <a:solidFill>
-                  <a:srgbClr val="4C1D95"/>
+                  <a:srgbClr val="0F766E"/>
                 </a:solidFill>
                 <a:latin typeface="Trebuchet MS" pitchFamily="34" charset="0"/>
                 <a:ea typeface="Trebuchet MS" pitchFamily="34" charset="-122"/>
                 <a:cs typeface="Trebuchet MS" pitchFamily="34" charset="-120"/>
               </a:rPr>
-              <a:t>re</a:t>
+              <a:t>work</a:t>
             </a:r>
             <a:endParaRPr lang="en-US" sz="1300" dirty="0"/>
           </a:p>
@@ -30231,7 +30264,7 @@
                 <a:ea typeface="Calibri" pitchFamily="34" charset="-122"/>
                 <a:cs typeface="Calibri" pitchFamily="34" charset="-120"/>
               </a:rPr>
-              <a:t>again</a:t>
+              <a:t>to do or make effort</a:t>
             </a:r>
             <a:endParaRPr lang="en-US" sz="850" dirty="0"/>
           </a:p>
@@ -30254,11 +30287,11 @@
             </a:avLst>
           </a:prstGeom>
           <a:solidFill>
-            <a:srgbClr val="CCFBF1"/>
+            <a:srgbClr val="FCE7F3"/>
           </a:solidFill>
           <a:ln w="19050">
             <a:solidFill>
-              <a:srgbClr val="0D9488"/>
+              <a:srgbClr val="DB2777"/>
             </a:solidFill>
             <a:prstDash val="solid"/>
           </a:ln>
@@ -30298,13 +30331,13 @@
             <a:r>
               <a:rPr lang="en-US" sz="1300" b="1" dirty="0">
                 <a:solidFill>
-                  <a:srgbClr val="0F766E"/>
+                  <a:srgbClr val="9D174D"/>
                 </a:solidFill>
                 <a:latin typeface="Trebuchet MS" pitchFamily="34" charset="0"/>
                 <a:ea typeface="Trebuchet MS" pitchFamily="34" charset="-122"/>
                 <a:cs typeface="Trebuchet MS" pitchFamily="34" charset="-120"/>
               </a:rPr>
-              <a:t>work</a:t>
+              <a:t>load</a:t>
             </a:r>
             <a:endParaRPr lang="en-US" sz="1300" dirty="0"/>
           </a:p>
@@ -30343,7 +30376,7 @@
                 <a:ea typeface="Calibri" pitchFamily="34" charset="-122"/>
                 <a:cs typeface="Calibri" pitchFamily="34" charset="-120"/>
               </a:rPr>
-              <a:t>effort or labour</a:t>
+              <a:t>an amount carried or held</a:t>
             </a:r>
             <a:endParaRPr lang="en-US" sz="850" dirty="0"/>
           </a:p>
@@ -30502,7 +30535,7 @@
                 <a:ea typeface="Trebuchet MS" pitchFamily="34" charset="-122"/>
                 <a:cs typeface="Trebuchet MS" pitchFamily="34" charset="-120"/>
               </a:rPr>
-              <a:t>re</a:t>
+              <a:t>work</a:t>
             </a:r>
             <a:endParaRPr lang="en-US" sz="1400" dirty="0"/>
           </a:p>
@@ -30607,7 +30640,7 @@
                 <a:ea typeface="Trebuchet MS" pitchFamily="34" charset="-122"/>
                 <a:cs typeface="Trebuchet MS" pitchFamily="34" charset="-120"/>
               </a:rPr>
-              <a:t>work</a:t>
+              <a:t>load</a:t>
             </a:r>
             <a:endParaRPr lang="en-US" sz="1400" dirty="0"/>
           </a:p>
@@ -31031,7 +31064,7 @@
                 <a:ea typeface="Calibri" pitchFamily="34" charset="-122"/>
                 <a:cs typeface="Calibri" pitchFamily="34" charset="-120"/>
               </a:rPr>
-              <a:t>Word Labs  •  wordlabs.app  •  Root: 'work' = to do effort or labour</a:t>
+              <a:t>Word Labs  •  wordlabs.app  •  Root: 'work' = to do or make effort</a:t>
             </a:r>
             <a:endParaRPr lang="en-US" sz="800" dirty="0"/>
           </a:p>
@@ -31170,7 +31203,7 @@
                 <a:ea typeface="Trebuchet MS" pitchFamily="34" charset="-122"/>
                 <a:cs typeface="Trebuchet MS" pitchFamily="34" charset="-120"/>
               </a:rPr>
-              <a:t>rework</a:t>
+              <a:t>workload</a:t>
             </a:r>
             <a:endParaRPr lang="en-US" sz="2800" dirty="0"/>
           </a:p>
@@ -31259,11 +31292,11 @@
             </a:avLst>
           </a:prstGeom>
           <a:solidFill>
-            <a:srgbClr val="DDD6FE"/>
+            <a:srgbClr val="CCFBF1"/>
           </a:solidFill>
           <a:ln w="19050">
             <a:solidFill>
-              <a:srgbClr val="7C3AED"/>
+              <a:srgbClr val="0D9488"/>
             </a:solidFill>
             <a:prstDash val="solid"/>
           </a:ln>
@@ -31303,13 +31336,13 @@
             <a:r>
               <a:rPr lang="en-US" sz="1300" b="1" dirty="0">
                 <a:solidFill>
-                  <a:srgbClr val="4C1D95"/>
+                  <a:srgbClr val="0F766E"/>
                 </a:solidFill>
                 <a:latin typeface="Trebuchet MS" pitchFamily="34" charset="0"/>
                 <a:ea typeface="Trebuchet MS" pitchFamily="34" charset="-122"/>
                 <a:cs typeface="Trebuchet MS" pitchFamily="34" charset="-120"/>
               </a:rPr>
-              <a:t>re</a:t>
+              <a:t>work</a:t>
             </a:r>
             <a:endParaRPr lang="en-US" sz="1300" dirty="0"/>
           </a:p>
@@ -31348,7 +31381,7 @@
                 <a:ea typeface="Calibri" pitchFamily="34" charset="-122"/>
                 <a:cs typeface="Calibri" pitchFamily="34" charset="-120"/>
               </a:rPr>
-              <a:t>again</a:t>
+              <a:t>to do or make effort</a:t>
             </a:r>
             <a:endParaRPr lang="en-US" sz="850" dirty="0"/>
           </a:p>
@@ -31371,11 +31404,11 @@
             </a:avLst>
           </a:prstGeom>
           <a:solidFill>
-            <a:srgbClr val="CCFBF1"/>
+            <a:srgbClr val="FCE7F3"/>
           </a:solidFill>
           <a:ln w="19050">
             <a:solidFill>
-              <a:srgbClr val="0D9488"/>
+              <a:srgbClr val="DB2777"/>
             </a:solidFill>
             <a:prstDash val="solid"/>
           </a:ln>
@@ -31415,13 +31448,13 @@
             <a:r>
               <a:rPr lang="en-US" sz="1300" b="1" dirty="0">
                 <a:solidFill>
-                  <a:srgbClr val="0F766E"/>
+                  <a:srgbClr val="9D174D"/>
                 </a:solidFill>
                 <a:latin typeface="Trebuchet MS" pitchFamily="34" charset="0"/>
                 <a:ea typeface="Trebuchet MS" pitchFamily="34" charset="-122"/>
                 <a:cs typeface="Trebuchet MS" pitchFamily="34" charset="-120"/>
               </a:rPr>
-              <a:t>work</a:t>
+              <a:t>load</a:t>
             </a:r>
             <a:endParaRPr lang="en-US" sz="1300" dirty="0"/>
           </a:p>
@@ -31460,7 +31493,7 @@
                 <a:ea typeface="Calibri" pitchFamily="34" charset="-122"/>
                 <a:cs typeface="Calibri" pitchFamily="34" charset="-120"/>
               </a:rPr>
-              <a:t>effort or labour</a:t>
+              <a:t>an amount carried or held</a:t>
             </a:r>
             <a:endParaRPr lang="en-US" sz="850" dirty="0"/>
           </a:p>
@@ -31619,7 +31652,7 @@
                 <a:ea typeface="Trebuchet MS" pitchFamily="34" charset="-122"/>
                 <a:cs typeface="Trebuchet MS" pitchFamily="34" charset="-120"/>
               </a:rPr>
-              <a:t>re</a:t>
+              <a:t>work</a:t>
             </a:r>
             <a:endParaRPr lang="en-US" sz="1400" dirty="0"/>
           </a:p>
@@ -31724,7 +31757,7 @@
                 <a:ea typeface="Trebuchet MS" pitchFamily="34" charset="-122"/>
                 <a:cs typeface="Trebuchet MS" pitchFamily="34" charset="-120"/>
               </a:rPr>
-              <a:t>work</a:t>
+              <a:t>load</a:t>
             </a:r>
             <a:endParaRPr lang="en-US" sz="1400" dirty="0"/>
           </a:p>
@@ -31831,7 +31864,7 @@
         </p:nvSpPr>
         <p:spPr>
           <a:xfrm>
-            <a:off x="2427732" y="4169664"/>
+            <a:off x="2254649" y="4169664"/>
             <a:ext cx="685800" cy="475488"/>
           </a:xfrm>
           <a:prstGeom prst="rect">
@@ -31858,7 +31891,7 @@
         </p:nvSpPr>
         <p:spPr>
           <a:xfrm>
-            <a:off x="2427732" y="4169664"/>
+            <a:off x="2254649" y="4169664"/>
             <a:ext cx="685800" cy="475488"/>
           </a:xfrm>
           <a:prstGeom prst="rect">
@@ -31883,7 +31916,7 @@
                 <a:ea typeface="Trebuchet MS" pitchFamily="34" charset="-122"/>
                 <a:cs typeface="Trebuchet MS" pitchFamily="34" charset="-120"/>
               </a:rPr>
-              <a:t>r</a:t>
+              <a:t>w</a:t>
             </a:r>
             <a:endParaRPr lang="en-US" sz="900" dirty="0"/>
           </a:p>
@@ -31897,7 +31930,7 @@
         </p:nvSpPr>
         <p:spPr>
           <a:xfrm>
-            <a:off x="3639312" y="4169664"/>
+            <a:off x="3293146" y="4169664"/>
             <a:ext cx="685800" cy="475488"/>
           </a:xfrm>
           <a:prstGeom prst="rect">
@@ -31924,7 +31957,7 @@
         </p:nvSpPr>
         <p:spPr>
           <a:xfrm>
-            <a:off x="3639312" y="4169664"/>
+            <a:off x="3293146" y="4169664"/>
             <a:ext cx="685800" cy="475488"/>
           </a:xfrm>
           <a:prstGeom prst="rect">
@@ -31949,7 +31982,7 @@
                 <a:ea typeface="Trebuchet MS" pitchFamily="34" charset="-122"/>
                 <a:cs typeface="Trebuchet MS" pitchFamily="34" charset="-120"/>
               </a:rPr>
-              <a:t>e</a:t>
+              <a:t>or</a:t>
             </a:r>
             <a:endParaRPr lang="en-US" sz="900" dirty="0"/>
           </a:p>
@@ -31963,7 +31996,7 @@
         </p:nvSpPr>
         <p:spPr>
           <a:xfrm>
-            <a:off x="4850892" y="4169664"/>
+            <a:off x="4331643" y="4169664"/>
             <a:ext cx="685800" cy="475488"/>
           </a:xfrm>
           <a:prstGeom prst="rect">
@@ -31990,7 +32023,7 @@
         </p:nvSpPr>
         <p:spPr>
           <a:xfrm>
-            <a:off x="4850892" y="4169664"/>
+            <a:off x="4331643" y="4169664"/>
             <a:ext cx="685800" cy="475488"/>
           </a:xfrm>
           <a:prstGeom prst="rect">
@@ -32015,7 +32048,7 @@
                 <a:ea typeface="Trebuchet MS" pitchFamily="34" charset="-122"/>
                 <a:cs typeface="Trebuchet MS" pitchFamily="34" charset="-120"/>
               </a:rPr>
-              <a:t>w</a:t>
+              <a:t>k</a:t>
             </a:r>
             <a:endParaRPr lang="en-US" sz="900" dirty="0"/>
           </a:p>
@@ -32029,7 +32062,7 @@
         </p:nvSpPr>
         <p:spPr>
           <a:xfrm>
-            <a:off x="6062472" y="4169664"/>
+            <a:off x="5370141" y="4169664"/>
             <a:ext cx="685800" cy="475488"/>
           </a:xfrm>
           <a:prstGeom prst="rect">
@@ -32056,7 +32089,7 @@
         </p:nvSpPr>
         <p:spPr>
           <a:xfrm>
-            <a:off x="6062472" y="4169664"/>
+            <a:off x="5370141" y="4169664"/>
             <a:ext cx="685800" cy="475488"/>
           </a:xfrm>
           <a:prstGeom prst="rect">
@@ -32081,7 +32114,7 @@
                 <a:ea typeface="Trebuchet MS" pitchFamily="34" charset="-122"/>
                 <a:cs typeface="Trebuchet MS" pitchFamily="34" charset="-120"/>
               </a:rPr>
-              <a:t>or</a:t>
+              <a:t>l</a:t>
             </a:r>
             <a:endParaRPr lang="en-US" sz="900" dirty="0"/>
           </a:p>
@@ -32095,7 +32128,7 @@
         </p:nvSpPr>
         <p:spPr>
           <a:xfrm>
-            <a:off x="7274052" y="4169664"/>
+            <a:off x="6408638" y="4169664"/>
             <a:ext cx="685800" cy="475488"/>
           </a:xfrm>
           <a:prstGeom prst="rect">
@@ -32122,7 +32155,7 @@
         </p:nvSpPr>
         <p:spPr>
           <a:xfrm>
-            <a:off x="7274052" y="4169664"/>
+            <a:off x="6408638" y="4169664"/>
             <a:ext cx="685800" cy="475488"/>
           </a:xfrm>
           <a:prstGeom prst="rect">
@@ -32147,7 +32180,73 @@
                 <a:ea typeface="Trebuchet MS" pitchFamily="34" charset="-122"/>
                 <a:cs typeface="Trebuchet MS" pitchFamily="34" charset="-120"/>
               </a:rPr>
-              <a:t>k</a:t>
+              <a:t>oa</a:t>
+            </a:r>
+            <a:endParaRPr lang="en-US" sz="900" dirty="0"/>
+          </a:p>
+        </p:txBody>
+      </p:sp>
+      <p:sp>
+        <p:nvSpPr>
+          <p:cNvPr id="43" name="Shape 41"/>
+          <p:cNvSpPr/>
+          <p:nvPr/>
+        </p:nvSpPr>
+        <p:spPr>
+          <a:xfrm>
+            <a:off x="7447135" y="4169664"/>
+            <a:ext cx="685800" cy="475488"/>
+          </a:xfrm>
+          <a:prstGeom prst="rect">
+            <a:avLst>
+              <a:gd name="adj" fmla="val 7692"/>
+            </a:avLst>
+          </a:prstGeom>
+          <a:solidFill>
+            <a:srgbClr val="FFFFFF"/>
+          </a:solidFill>
+          <a:ln w="12700">
+            <a:solidFill>
+              <a:srgbClr val="DB2777"/>
+            </a:solidFill>
+            <a:prstDash val="solid"/>
+          </a:ln>
+        </p:spPr>
+      </p:sp>
+      <p:sp>
+        <p:nvSpPr>
+          <p:cNvPr id="44" name="Text 42"/>
+          <p:cNvSpPr/>
+          <p:nvPr/>
+        </p:nvSpPr>
+        <p:spPr>
+          <a:xfrm>
+            <a:off x="7447135" y="4169664"/>
+            <a:ext cx="685800" cy="475488"/>
+          </a:xfrm>
+          <a:prstGeom prst="rect">
+            <a:avLst/>
+          </a:prstGeom>
+          <a:noFill/>
+          <a:ln/>
+        </p:spPr>
+        <p:txBody>
+          <a:bodyPr wrap="square" lIns="0" tIns="0" rIns="0" bIns="0" rtlCol="0" anchor="ctr"/>
+          <a:lstStyle/>
+          <a:p>
+            <a:pPr algn="ctr" indent="0" marL="0">
+              <a:buNone/>
+            </a:pPr>
+            <a:r>
+              <a:rPr lang="en-US" sz="900" b="1" dirty="0">
+                <a:solidFill>
+                  <a:srgbClr val="9D174D"/>
+                </a:solidFill>
+                <a:latin typeface="Trebuchet MS" pitchFamily="34" charset="0"/>
+                <a:ea typeface="Trebuchet MS" pitchFamily="34" charset="-122"/>
+                <a:cs typeface="Trebuchet MS" pitchFamily="34" charset="-120"/>
+              </a:rPr>
+              <a:t>d</a:t>
             </a:r>
             <a:endParaRPr lang="en-US" sz="900" dirty="0"/>
           </a:p>
@@ -32439,7 +32538,7 @@
                 <a:ea typeface="Calibri" pitchFamily="34" charset="-122"/>
                 <a:cs typeface="Calibri" pitchFamily="34" charset="-120"/>
               </a:rPr>
-              <a:t>Word Labs  •  wordlabs.app  •  Root: 'work' = to do effort or labour</a:t>
+              <a:t>Word Labs  •  wordlabs.app  •  Root: 'work' = to do or make effort</a:t>
             </a:r>
             <a:endParaRPr lang="en-US" sz="800" dirty="0"/>
           </a:p>
@@ -33608,7 +33707,7 @@
                 <a:ea typeface="Calibri" pitchFamily="34" charset="-122"/>
                 <a:cs typeface="Calibri" pitchFamily="34" charset="-120"/>
               </a:rPr>
-              <a:t>Word Labs  •  wordlabs.app  •  Root: 'work' = to do effort or labour</a:t>
+              <a:t>Word Labs  •  wordlabs.app  •  Root: 'work' = to do or make effort</a:t>
             </a:r>
             <a:endParaRPr lang="en-US" sz="800" dirty="0"/>
           </a:p>
@@ -33909,7 +34008,7 @@
                 <a:ea typeface="Trebuchet MS" pitchFamily="34" charset="-122"/>
                 <a:cs typeface="Trebuchet MS" pitchFamily="34" charset="-120"/>
               </a:rPr>
-              <a:t>out-</a:t>
+              <a:t>net-</a:t>
             </a:r>
             <a:endParaRPr lang="en-US" sz="1300" dirty="0"/>
           </a:p>
@@ -34101,7 +34200,7 @@
                 <a:ea typeface="Trebuchet MS" pitchFamily="34" charset="-122"/>
                 <a:cs typeface="Trebuchet MS" pitchFamily="34" charset="-120"/>
               </a:rPr>
-              <a:t>over-</a:t>
+              <a:t>team-</a:t>
             </a:r>
             <a:endParaRPr lang="en-US" sz="1300" dirty="0"/>
           </a:p>
@@ -34254,7 +34353,7 @@
                 <a:ea typeface="Trebuchet MS" pitchFamily="34" charset="-122"/>
                 <a:cs typeface="Trebuchet MS" pitchFamily="34" charset="-120"/>
               </a:rPr>
-              <a:t>under-</a:t>
+              <a:t>frame-</a:t>
             </a:r>
             <a:endParaRPr lang="en-US" sz="1300" dirty="0"/>
           </a:p>
@@ -34407,7 +34506,7 @@
                 <a:ea typeface="Trebuchet MS" pitchFamily="34" charset="-122"/>
                 <a:cs typeface="Trebuchet MS" pitchFamily="34" charset="-120"/>
               </a:rPr>
-              <a:t>net-</a:t>
+              <a:t>over-</a:t>
             </a:r>
             <a:endParaRPr lang="en-US" sz="1300" dirty="0"/>
           </a:p>
@@ -34560,7 +34659,7 @@
                 <a:ea typeface="Trebuchet MS" pitchFamily="34" charset="-122"/>
                 <a:cs typeface="Trebuchet MS" pitchFamily="34" charset="-120"/>
               </a:rPr>
-              <a:t>frame-</a:t>
+              <a:t>out-</a:t>
             </a:r>
             <a:endParaRPr lang="en-US" sz="1300" dirty="0"/>
           </a:p>
@@ -34754,7 +34853,7 @@
                 <a:ea typeface="Trebuchet MS" pitchFamily="34" charset="-122"/>
                 <a:cs typeface="Trebuchet MS" pitchFamily="34" charset="-120"/>
               </a:rPr>
-              <a:t>worker</a:t>
+              <a:t>network</a:t>
             </a:r>
             <a:endParaRPr lang="en-US" sz="1200" dirty="0"/>
           </a:p>
@@ -34820,7 +34919,7 @@
                 <a:ea typeface="Trebuchet MS" pitchFamily="34" charset="-122"/>
                 <a:cs typeface="Trebuchet MS" pitchFamily="34" charset="-120"/>
               </a:rPr>
-              <a:t>rework</a:t>
+              <a:t>teamwork</a:t>
             </a:r>
             <a:endParaRPr lang="en-US" sz="1200" dirty="0"/>
           </a:p>
@@ -34886,7 +34985,7 @@
                 <a:ea typeface="Trebuchet MS" pitchFamily="34" charset="-122"/>
                 <a:cs typeface="Trebuchet MS" pitchFamily="34" charset="-120"/>
               </a:rPr>
-              <a:t>overwork</a:t>
+              <a:t>framework</a:t>
             </a:r>
             <a:endParaRPr lang="en-US" sz="1200" dirty="0"/>
           </a:p>
@@ -34952,7 +35051,7 @@
                 <a:ea typeface="Trebuchet MS" pitchFamily="34" charset="-122"/>
                 <a:cs typeface="Trebuchet MS" pitchFamily="34" charset="-120"/>
               </a:rPr>
-              <a:t>teamwork</a:t>
+              <a:t>overworked</a:t>
             </a:r>
             <a:endParaRPr lang="en-US" sz="1200" dirty="0"/>
           </a:p>
@@ -35018,7 +35117,7 @@
                 <a:ea typeface="Trebuchet MS" pitchFamily="34" charset="-122"/>
                 <a:cs typeface="Trebuchet MS" pitchFamily="34" charset="-120"/>
               </a:rPr>
-              <a:t>homework</a:t>
+              <a:t>workshop</a:t>
             </a:r>
             <a:endParaRPr lang="en-US" sz="1200" dirty="0"/>
           </a:p>
@@ -35084,7 +35183,7 @@
                 <a:ea typeface="Trebuchet MS" pitchFamily="34" charset="-122"/>
                 <a:cs typeface="Trebuchet MS" pitchFamily="34" charset="-120"/>
               </a:rPr>
-              <a:t>network</a:t>
+              <a:t>workload</a:t>
             </a:r>
             <a:endParaRPr lang="en-US" sz="1200" dirty="0"/>
           </a:p>
@@ -35216,7 +35315,7 @@
                 <a:ea typeface="Trebuchet MS" pitchFamily="34" charset="-122"/>
                 <a:cs typeface="Trebuchet MS" pitchFamily="34" charset="-120"/>
               </a:rPr>
-              <a:t>workshop</a:t>
+              <a:t>worker</a:t>
             </a:r>
             <a:endParaRPr lang="en-US" sz="1200" dirty="0"/>
           </a:p>
@@ -35508,7 +35607,7 @@
                 <a:ea typeface="Calibri" pitchFamily="34" charset="-122"/>
                 <a:cs typeface="Calibri" pitchFamily="34" charset="-120"/>
               </a:rPr>
-              <a:t>Word Labs  •  wordlabs.app  •  Root: 'work' = to do effort or labour</a:t>
+              <a:t>Word Labs  •  wordlabs.app  •  Root: 'work' = to do or make effort</a:t>
             </a:r>
             <a:endParaRPr lang="en-US" sz="800" dirty="0"/>
           </a:p>
@@ -35672,7 +35771,7 @@
                 <a:ea typeface="Calibri" pitchFamily="34" charset="-122"/>
                 <a:cs typeface="Calibri" pitchFamily="34" charset="-120"/>
               </a:rPr>
-              <a:t>The core part of a word carrying its basic meaning. For example, 'work' means 'to do effort or labour'.</a:t>
+              <a:t>The core part of a word carrying its basic meaning. For example, 'work' means 'to do or make effort'.</a:t>
             </a:r>
             <a:endParaRPr lang="en-US" sz="1350" dirty="0"/>
           </a:p>
@@ -36292,7 +36391,7 @@
                 <a:ea typeface="Calibri" pitchFamily="34" charset="-122"/>
                 <a:cs typeface="Calibri" pitchFamily="34" charset="-120"/>
               </a:rPr>
-              <a:t>Word Labs  •  wordlabs.app  •  Root: 'work' = to do effort or labour</a:t>
+              <a:t>Word Labs  •  wordlabs.app  •  Root: 'work' = to do or make effort</a:t>
             </a:r>
             <a:endParaRPr lang="en-US" sz="800" dirty="0"/>
           </a:p>
@@ -36404,7 +36503,7 @@
                 <a:ea typeface="Calibri" pitchFamily="34" charset="-122"/>
                 <a:cs typeface="Calibri" pitchFamily="34" charset="-120"/>
               </a:rPr>
-              <a:t>1.  The word 'homework' contains the root 'work'.</a:t>
+              <a:t>1.  The root 'work' comes from the Latin language.</a:t>
             </a:r>
             <a:endParaRPr lang="en-US" sz="1300" dirty="0"/>
           </a:p>
@@ -36427,11 +36526,11 @@
             </a:avLst>
           </a:prstGeom>
           <a:solidFill>
-            <a:srgbClr val="DCFCE7"/>
-          </a:solidFill>
-          <a:ln w="12700">
-            <a:solidFill>
-              <a:srgbClr val="16A34A"/>
+            <a:srgbClr val="FEE2E2"/>
+          </a:solidFill>
+          <a:ln w="12700">
+            <a:solidFill>
+              <a:srgbClr val="DC2626"/>
             </a:solidFill>
             <a:prstDash val="solid"/>
           </a:ln>
@@ -36464,13 +36563,13 @@
             <a:r>
               <a:rPr lang="en-US" sz="1100" b="1" dirty="0">
                 <a:solidFill>
-                  <a:srgbClr val="16A34A"/>
+                  <a:srgbClr val="DC2626"/>
                 </a:solidFill>
                 <a:latin typeface="Trebuchet MS" pitchFamily="34" charset="0"/>
                 <a:ea typeface="Trebuchet MS" pitchFamily="34" charset="-122"/>
                 <a:cs typeface="Trebuchet MS" pitchFamily="34" charset="-120"/>
               </a:rPr>
-              <a:t>TRUE</a:t>
+              <a:t>FALSE</a:t>
             </a:r>
             <a:endParaRPr lang="en-US" sz="1100" dirty="0"/>
           </a:p>
@@ -36543,7 +36642,7 @@
                 <a:ea typeface="Calibri" pitchFamily="34" charset="-122"/>
                 <a:cs typeface="Calibri" pitchFamily="34" charset="-120"/>
               </a:rPr>
-              <a:t>2.  The root 'work' comes from the Latin language.</a:t>
+              <a:t>2.  'Overworked' means a person has been given too much work.</a:t>
             </a:r>
             <a:endParaRPr lang="en-US" sz="1300" dirty="0"/>
           </a:p>
@@ -36566,11 +36665,11 @@
             </a:avLst>
           </a:prstGeom>
           <a:solidFill>
-            <a:srgbClr val="FEE2E2"/>
-          </a:solidFill>
-          <a:ln w="12700">
-            <a:solidFill>
-              <a:srgbClr val="DC2626"/>
+            <a:srgbClr val="DCFCE7"/>
+          </a:solidFill>
+          <a:ln w="12700">
+            <a:solidFill>
+              <a:srgbClr val="16A34A"/>
             </a:solidFill>
             <a:prstDash val="solid"/>
           </a:ln>
@@ -36603,13 +36702,13 @@
             <a:r>
               <a:rPr lang="en-US" sz="1100" b="1" dirty="0">
                 <a:solidFill>
-                  <a:srgbClr val="DC2626"/>
+                  <a:srgbClr val="16A34A"/>
                 </a:solidFill>
                 <a:latin typeface="Trebuchet MS" pitchFamily="34" charset="0"/>
                 <a:ea typeface="Trebuchet MS" pitchFamily="34" charset="-122"/>
                 <a:cs typeface="Trebuchet MS" pitchFamily="34" charset="-120"/>
               </a:rPr>
-              <a:t>FALSE</a:t>
+              <a:t>TRUE</a:t>
             </a:r>
             <a:endParaRPr lang="en-US" sz="1100" dirty="0"/>
           </a:p>
@@ -36682,7 +36781,7 @@
                 <a:ea typeface="Calibri" pitchFamily="34" charset="-122"/>
                 <a:cs typeface="Calibri" pitchFamily="34" charset="-120"/>
               </a:rPr>
-              <a:t>3.  A 'worker' is a person who does a job.</a:t>
+              <a:t>3.  The root 'work' means to rest or do nothing.</a:t>
             </a:r>
             <a:endParaRPr lang="en-US" sz="1300" dirty="0"/>
           </a:p>
@@ -36705,11 +36804,11 @@
             </a:avLst>
           </a:prstGeom>
           <a:solidFill>
-            <a:srgbClr val="DCFCE7"/>
-          </a:solidFill>
-          <a:ln w="12700">
-            <a:solidFill>
-              <a:srgbClr val="16A34A"/>
+            <a:srgbClr val="FEE2E2"/>
+          </a:solidFill>
+          <a:ln w="12700">
+            <a:solidFill>
+              <a:srgbClr val="DC2626"/>
             </a:solidFill>
             <a:prstDash val="solid"/>
           </a:ln>
@@ -36742,13 +36841,13 @@
             <a:r>
               <a:rPr lang="en-US" sz="1100" b="1" dirty="0">
                 <a:solidFill>
-                  <a:srgbClr val="16A34A"/>
+                  <a:srgbClr val="DC2626"/>
                 </a:solidFill>
                 <a:latin typeface="Trebuchet MS" pitchFamily="34" charset="0"/>
                 <a:ea typeface="Trebuchet MS" pitchFamily="34" charset="-122"/>
                 <a:cs typeface="Trebuchet MS" pitchFamily="34" charset="-120"/>
               </a:rPr>
-              <a:t>TRUE</a:t>
+              <a:t>FALSE</a:t>
             </a:r>
             <a:endParaRPr lang="en-US" sz="1100" dirty="0"/>
           </a:p>
@@ -36821,7 +36920,7 @@
                 <a:ea typeface="Calibri" pitchFamily="34" charset="-122"/>
                 <a:cs typeface="Calibri" pitchFamily="34" charset="-120"/>
               </a:rPr>
-              <a:t>4.  'Teamwork' means people working together towards a goal.</a:t>
+              <a:t>4.  The word 'teamwork' contains the root 'work'.</a:t>
             </a:r>
             <a:endParaRPr lang="en-US" sz="1300" dirty="0"/>
           </a:p>
@@ -36960,7 +37059,7 @@
                 <a:ea typeface="Calibri" pitchFamily="34" charset="-122"/>
                 <a:cs typeface="Calibri" pitchFamily="34" charset="-120"/>
               </a:rPr>
-              <a:t>5.  'Overwork' means you haven't done enough work.</a:t>
+              <a:t>5.  A 'workshop' is a place where people learn by doing activities.</a:t>
             </a:r>
             <a:endParaRPr lang="en-US" sz="1300" dirty="0"/>
           </a:p>
@@ -36983,11 +37082,11 @@
             </a:avLst>
           </a:prstGeom>
           <a:solidFill>
-            <a:srgbClr val="FEE2E2"/>
-          </a:solidFill>
-          <a:ln w="12700">
-            <a:solidFill>
-              <a:srgbClr val="DC2626"/>
+            <a:srgbClr val="DCFCE7"/>
+          </a:solidFill>
+          <a:ln w="12700">
+            <a:solidFill>
+              <a:srgbClr val="16A34A"/>
             </a:solidFill>
             <a:prstDash val="solid"/>
           </a:ln>
@@ -37020,13 +37119,13 @@
             <a:r>
               <a:rPr lang="en-US" sz="1100" b="1" dirty="0">
                 <a:solidFill>
-                  <a:srgbClr val="DC2626"/>
+                  <a:srgbClr val="16A34A"/>
                 </a:solidFill>
                 <a:latin typeface="Trebuchet MS" pitchFamily="34" charset="0"/>
                 <a:ea typeface="Trebuchet MS" pitchFamily="34" charset="-122"/>
                 <a:cs typeface="Trebuchet MS" pitchFamily="34" charset="-120"/>
               </a:rPr>
-              <a:t>FALSE</a:t>
+              <a:t>TRUE</a:t>
             </a:r>
             <a:endParaRPr lang="en-US" sz="1100" dirty="0"/>
           </a:p>
@@ -37318,7 +37417,7 @@
                 <a:ea typeface="Calibri" pitchFamily="34" charset="-122"/>
                 <a:cs typeface="Calibri" pitchFamily="34" charset="-120"/>
               </a:rPr>
-              <a:t>Word Labs  •  wordlabs.app  •  Root: 'work' = to do effort or labour</a:t>
+              <a:t>Word Labs  •  wordlabs.app  •  Root: 'work' = to do or make effort</a:t>
             </a:r>
             <a:endParaRPr lang="en-US" sz="800" dirty="0"/>
           </a:p>
@@ -37455,7 +37554,7 @@
                 <a:ea typeface="Trebuchet MS" pitchFamily="34" charset="-122"/>
                 <a:cs typeface="Trebuchet MS" pitchFamily="34" charset="-120"/>
               </a:rPr>
-              <a:t>to do effort or labour</a:t>
+              <a:t>to do or make effort</a:t>
             </a:r>
             <a:endParaRPr lang="en-US" sz="2000" dirty="0"/>
           </a:p>
@@ -37599,7 +37698,7 @@
                 <a:ea typeface="Trebuchet MS" pitchFamily="34" charset="-122"/>
                 <a:cs typeface="Trebuchet MS" pitchFamily="34" charset="-120"/>
               </a:rPr>
-              <a:t>worker</a:t>
+              <a:t>network</a:t>
             </a:r>
             <a:endParaRPr lang="en-US" sz="1300" dirty="0"/>
           </a:p>
@@ -37665,7 +37764,7 @@
                 <a:ea typeface="Trebuchet MS" pitchFamily="34" charset="-122"/>
                 <a:cs typeface="Trebuchet MS" pitchFamily="34" charset="-120"/>
               </a:rPr>
-              <a:t>rework</a:t>
+              <a:t>teamwork</a:t>
             </a:r>
             <a:endParaRPr lang="en-US" sz="1300" dirty="0"/>
           </a:p>
@@ -37731,7 +37830,7 @@
                 <a:ea typeface="Trebuchet MS" pitchFamily="34" charset="-122"/>
                 <a:cs typeface="Trebuchet MS" pitchFamily="34" charset="-120"/>
               </a:rPr>
-              <a:t>overwork</a:t>
+              <a:t>framework</a:t>
             </a:r>
             <a:endParaRPr lang="en-US" sz="1300" dirty="0"/>
           </a:p>
@@ -37797,7 +37896,7 @@
                 <a:ea typeface="Trebuchet MS" pitchFamily="34" charset="-122"/>
                 <a:cs typeface="Trebuchet MS" pitchFamily="34" charset="-120"/>
               </a:rPr>
-              <a:t>teamwork</a:t>
+              <a:t>overworked</a:t>
             </a:r>
             <a:endParaRPr lang="en-US" sz="1300" dirty="0"/>
           </a:p>
@@ -37863,7 +37962,7 @@
                 <a:ea typeface="Trebuchet MS" pitchFamily="34" charset="-122"/>
                 <a:cs typeface="Trebuchet MS" pitchFamily="34" charset="-120"/>
               </a:rPr>
-              <a:t>homework</a:t>
+              <a:t>workshop</a:t>
             </a:r>
             <a:endParaRPr lang="en-US" sz="1300" dirty="0"/>
           </a:p>
@@ -37929,7 +38028,7 @@
                 <a:ea typeface="Trebuchet MS" pitchFamily="34" charset="-122"/>
                 <a:cs typeface="Trebuchet MS" pitchFamily="34" charset="-120"/>
               </a:rPr>
-              <a:t>network</a:t>
+              <a:t>workload</a:t>
             </a:r>
             <a:endParaRPr lang="en-US" sz="1300" dirty="0"/>
           </a:p>
@@ -38287,7 +38386,7 @@
                 <a:ea typeface="Calibri" pitchFamily="34" charset="-122"/>
                 <a:cs typeface="Calibri" pitchFamily="34" charset="-120"/>
               </a:rPr>
-              <a:t>Word Labs  •  wordlabs.app  •  Root: 'work' = to do effort or labour</a:t>
+              <a:t>Word Labs  •  wordlabs.app  •  Root: 'work' = to do or make effort</a:t>
             </a:r>
             <a:endParaRPr lang="en-US" sz="800" dirty="0"/>
           </a:p>
@@ -38588,7 +38687,7 @@
                 <a:ea typeface="Trebuchet MS" pitchFamily="34" charset="-122"/>
                 <a:cs typeface="Trebuchet MS" pitchFamily="34" charset="-120"/>
               </a:rPr>
-              <a:t>out-</a:t>
+              <a:t>net-</a:t>
             </a:r>
             <a:endParaRPr lang="en-US" sz="1300" dirty="0"/>
           </a:p>
@@ -38780,7 +38879,7 @@
                 <a:ea typeface="Trebuchet MS" pitchFamily="34" charset="-122"/>
                 <a:cs typeface="Trebuchet MS" pitchFamily="34" charset="-120"/>
               </a:rPr>
-              <a:t>over-</a:t>
+              <a:t>team-</a:t>
             </a:r>
             <a:endParaRPr lang="en-US" sz="1300" dirty="0"/>
           </a:p>
@@ -38933,7 +39032,7 @@
                 <a:ea typeface="Trebuchet MS" pitchFamily="34" charset="-122"/>
                 <a:cs typeface="Trebuchet MS" pitchFamily="34" charset="-120"/>
               </a:rPr>
-              <a:t>under-</a:t>
+              <a:t>frame-</a:t>
             </a:r>
             <a:endParaRPr lang="en-US" sz="1300" dirty="0"/>
           </a:p>
@@ -39086,7 +39185,7 @@
                 <a:ea typeface="Trebuchet MS" pitchFamily="34" charset="-122"/>
                 <a:cs typeface="Trebuchet MS" pitchFamily="34" charset="-120"/>
               </a:rPr>
-              <a:t>net-</a:t>
+              <a:t>over-</a:t>
             </a:r>
             <a:endParaRPr lang="en-US" sz="1300" dirty="0"/>
           </a:p>
@@ -39239,7 +39338,7 @@
                 <a:ea typeface="Trebuchet MS" pitchFamily="34" charset="-122"/>
                 <a:cs typeface="Trebuchet MS" pitchFamily="34" charset="-120"/>
               </a:rPr>
-              <a:t>frame-</a:t>
+              <a:t>out-</a:t>
             </a:r>
             <a:endParaRPr lang="en-US" sz="1300" dirty="0"/>
           </a:p>
@@ -39440,7 +39539,7 @@
                 <a:ea typeface="Trebuchet MS" pitchFamily="34" charset="-122"/>
                 <a:cs typeface="Trebuchet MS" pitchFamily="34" charset="-120"/>
               </a:rPr>
-              <a:t>out-</a:t>
+              <a:t>net-</a:t>
             </a:r>
             <a:endParaRPr lang="en-US" sz="1300" dirty="0"/>
           </a:p>
@@ -39769,7 +39868,7 @@
                 <a:ea typeface="Trebuchet MS" pitchFamily="34" charset="-122"/>
                 <a:cs typeface="Trebuchet MS" pitchFamily="34" charset="-120"/>
               </a:rPr>
-              <a:t>worker</a:t>
+              <a:t>network</a:t>
             </a:r>
             <a:endParaRPr lang="en-US" sz="1400" dirty="0"/>
           </a:p>
@@ -40061,7 +40160,7 @@
                 <a:ea typeface="Calibri" pitchFamily="34" charset="-122"/>
                 <a:cs typeface="Calibri" pitchFamily="34" charset="-120"/>
               </a:rPr>
-              <a:t>Word Labs  •  wordlabs.app  •  Root: 'work' = to do effort or labour</a:t>
+              <a:t>Word Labs  •  wordlabs.app  •  Root: 'work' = to do or make effort</a:t>
             </a:r>
             <a:endParaRPr lang="en-US" sz="800" dirty="0"/>
           </a:p>
@@ -40173,7 +40272,7 @@
                 <a:ea typeface="Trebuchet MS" pitchFamily="34" charset="-122"/>
                 <a:cs typeface="Trebuchet MS" pitchFamily="34" charset="-120"/>
               </a:rPr>
-              <a:t>worker</a:t>
+              <a:t>network</a:t>
             </a:r>
             <a:endParaRPr lang="en-US" sz="1200" dirty="0"/>
           </a:p>
@@ -40239,7 +40338,7 @@
                 <a:ea typeface="Calibri" pitchFamily="34" charset="-122"/>
                 <a:cs typeface="Calibri" pitchFamily="34" charset="-120"/>
               </a:rPr>
-              <a:t>To work too hard or too much.</a:t>
+              <a:t>A basic structure or plan that supports how something is organised.</a:t>
             </a:r>
             <a:endParaRPr lang="en-US" sz="1200" dirty="0"/>
           </a:p>
@@ -40312,7 +40411,7 @@
                 <a:ea typeface="Trebuchet MS" pitchFamily="34" charset="-122"/>
                 <a:cs typeface="Trebuchet MS" pitchFamily="34" charset="-120"/>
               </a:rPr>
-              <a:t>rework</a:t>
+              <a:t>teamwork</a:t>
             </a:r>
             <a:endParaRPr lang="en-US" sz="1200" dirty="0"/>
           </a:p>
@@ -40378,7 +40477,7 @@
                 <a:ea typeface="Calibri" pitchFamily="34" charset="-122"/>
                 <a:cs typeface="Calibri" pitchFamily="34" charset="-120"/>
               </a:rPr>
-              <a:t>When a group of people work together to get something done.</a:t>
+              <a:t>When someone has been given too much work to do and is very tired.</a:t>
             </a:r>
             <a:endParaRPr lang="en-US" sz="1200" dirty="0"/>
           </a:p>
@@ -40451,7 +40550,7 @@
                 <a:ea typeface="Trebuchet MS" pitchFamily="34" charset="-122"/>
                 <a:cs typeface="Trebuchet MS" pitchFamily="34" charset="-120"/>
               </a:rPr>
-              <a:t>overwork</a:t>
+              <a:t>framework</a:t>
             </a:r>
             <a:endParaRPr lang="en-US" sz="1200" dirty="0"/>
           </a:p>
@@ -40517,7 +40616,7 @@
                 <a:ea typeface="Calibri" pitchFamily="34" charset="-122"/>
                 <a:cs typeface="Calibri" pitchFamily="34" charset="-120"/>
               </a:rPr>
-              <a:t>To work harder or faster than someone else.</a:t>
+              <a:t>To work harder or do more than someone else.</a:t>
             </a:r>
             <a:endParaRPr lang="en-US" sz="1200" dirty="0"/>
           </a:p>
@@ -40590,7 +40689,7 @@
                 <a:ea typeface="Trebuchet MS" pitchFamily="34" charset="-122"/>
                 <a:cs typeface="Trebuchet MS" pitchFamily="34" charset="-120"/>
               </a:rPr>
-              <a:t>teamwork</a:t>
+              <a:t>overworked</a:t>
             </a:r>
             <a:endParaRPr lang="en-US" sz="1200" dirty="0"/>
           </a:p>
@@ -40656,7 +40755,7 @@
                 <a:ea typeface="Calibri" pitchFamily="34" charset="-122"/>
                 <a:cs typeface="Calibri" pitchFamily="34" charset="-120"/>
               </a:rPr>
-              <a:t>A group of connected people or things that work together.</a:t>
+              <a:t>The amount of work a person has to do.</a:t>
             </a:r>
             <a:endParaRPr lang="en-US" sz="1200" dirty="0"/>
           </a:p>
@@ -40729,7 +40828,7 @@
                 <a:ea typeface="Trebuchet MS" pitchFamily="34" charset="-122"/>
                 <a:cs typeface="Trebuchet MS" pitchFamily="34" charset="-120"/>
               </a:rPr>
-              <a:t>homework</a:t>
+              <a:t>workshop</a:t>
             </a:r>
             <a:endParaRPr lang="en-US" sz="1200" dirty="0"/>
           </a:p>
@@ -40795,7 +40894,7 @@
                 <a:ea typeface="Calibri" pitchFamily="34" charset="-122"/>
                 <a:cs typeface="Calibri" pitchFamily="34" charset="-120"/>
               </a:rPr>
-              <a:t>A person who does a job or task.</a:t>
+              <a:t>A system of connected people or things that work together.</a:t>
             </a:r>
             <a:endParaRPr lang="en-US" sz="1200" dirty="0"/>
           </a:p>
@@ -40868,7 +40967,7 @@
                 <a:ea typeface="Trebuchet MS" pitchFamily="34" charset="-122"/>
                 <a:cs typeface="Trebuchet MS" pitchFamily="34" charset="-120"/>
               </a:rPr>
-              <a:t>network</a:t>
+              <a:t>workload</a:t>
             </a:r>
             <a:endParaRPr lang="en-US" sz="1200" dirty="0"/>
           </a:p>
@@ -40934,7 +41033,7 @@
                 <a:ea typeface="Calibri" pitchFamily="34" charset="-122"/>
                 <a:cs typeface="Calibri" pitchFamily="34" charset="-120"/>
               </a:rPr>
-              <a:t>School tasks you do at home.</a:t>
+              <a:t>A place or session where people learn by doing hands-on activities.</a:t>
             </a:r>
             <a:endParaRPr lang="en-US" sz="1200" dirty="0"/>
           </a:p>
@@ -41073,7 +41172,7 @@
                 <a:ea typeface="Calibri" pitchFamily="34" charset="-122"/>
                 <a:cs typeface="Calibri" pitchFamily="34" charset="-120"/>
               </a:rPr>
-              <a:t>To do something again to make it better.</a:t>
+              <a:t>When a group of people work together to get something done.</a:t>
             </a:r>
             <a:endParaRPr lang="en-US" sz="1200" dirty="0"/>
           </a:p>
@@ -41365,7 +41464,7 @@
                 <a:ea typeface="Calibri" pitchFamily="34" charset="-122"/>
                 <a:cs typeface="Calibri" pitchFamily="34" charset="-120"/>
               </a:rPr>
-              <a:t>Word Labs  •  wordlabs.app  •  Root: 'work' = to do effort or labour</a:t>
+              <a:t>Word Labs  •  wordlabs.app  •  Root: 'work' = to do or make effort</a:t>
             </a:r>
             <a:endParaRPr lang="en-US" sz="800" dirty="0"/>
           </a:p>
@@ -41568,7 +41667,7 @@
                 <a:ea typeface="Calibri" pitchFamily="34" charset="-122"/>
                 <a:cs typeface="Calibri" pitchFamily="34" charset="-120"/>
               </a:rPr>
-              <a:t>The students showed great teamwork when they built their model together.</a:t>
+              <a:t>The students showed great teamwork when they built their model bridge together.</a:t>
             </a:r>
             <a:endParaRPr lang="en-US" sz="1500" dirty="0"/>
           </a:p>
@@ -41732,7 +41831,7 @@
                 <a:ea typeface="Calibri" pitchFamily="34" charset="-122"/>
                 <a:cs typeface="Calibri" pitchFamily="34" charset="-120"/>
               </a:rPr>
-              <a:t>She had to rework her story because the ending didn't make sense.</a:t>
+              <a:t>Our teacher set up a framework so we knew exactly how to plan our assignment.</a:t>
             </a:r>
             <a:endParaRPr lang="en-US" sz="1500" dirty="0"/>
           </a:p>
@@ -41896,7 +41995,7 @@
                 <a:ea typeface="Calibri" pitchFamily="34" charset="-122"/>
                 <a:cs typeface="Calibri" pitchFamily="34" charset="-120"/>
               </a:rPr>
-              <a:t>The carpenter set up his workshop in the garage so he could build furniture.</a:t>
+              <a:t>The busy nurse felt overworked after a long shift at the hospital.</a:t>
             </a:r>
             <a:endParaRPr lang="en-US" sz="1500" dirty="0"/>
           </a:p>

--- a/output/wordlabs-work-3day.pptx
+++ b/output/wordlabs-work-3day.pptx
@@ -22037,11 +22037,11 @@
         <p:spPr>
           <a:xfrm>
             <a:off x="1874520" y="4096512"/>
-            <a:ext cx="6903720" cy="804672"/>
+            <a:ext cx="6903720" cy="658368"/>
           </a:xfrm>
           <a:prstGeom prst="rect">
             <a:avLst>
-              <a:gd name="adj" fmla="val 6818"/>
+              <a:gd name="adj" fmla="val 8333"/>
             </a:avLst>
           </a:prstGeom>
           <a:solidFill>
@@ -22063,12 +22063,12 @@
         </p:nvSpPr>
         <p:spPr>
           <a:xfrm>
-            <a:off x="1951330" y="4169664"/>
-            <a:ext cx="676656" cy="384048"/>
+            <a:off x="2023872" y="4169664"/>
+            <a:ext cx="685800" cy="475488"/>
           </a:xfrm>
           <a:prstGeom prst="rect">
             <a:avLst>
-              <a:gd name="adj" fmla="val 9524"/>
+              <a:gd name="adj" fmla="val 7692"/>
             </a:avLst>
           </a:prstGeom>
           <a:solidFill>
@@ -22090,8 +22090,8 @@
         </p:nvSpPr>
         <p:spPr>
           <a:xfrm>
-            <a:off x="1951330" y="4169664"/>
-            <a:ext cx="676656" cy="384048"/>
+            <a:off x="2023872" y="4169664"/>
+            <a:ext cx="685800" cy="475488"/>
           </a:xfrm>
           <a:prstGeom prst="rect">
             <a:avLst/>
@@ -22129,12 +22129,12 @@
         </p:nvSpPr>
         <p:spPr>
           <a:xfrm>
-            <a:off x="2677363" y="4169664"/>
-            <a:ext cx="676656" cy="384048"/>
+            <a:off x="2831592" y="4169664"/>
+            <a:ext cx="685800" cy="475488"/>
           </a:xfrm>
           <a:prstGeom prst="rect">
             <a:avLst>
-              <a:gd name="adj" fmla="val 9524"/>
+              <a:gd name="adj" fmla="val 7692"/>
             </a:avLst>
           </a:prstGeom>
           <a:solidFill>
@@ -22156,8 +22156,8 @@
         </p:nvSpPr>
         <p:spPr>
           <a:xfrm>
-            <a:off x="2677363" y="4169664"/>
-            <a:ext cx="676656" cy="384048"/>
+            <a:off x="2831592" y="4169664"/>
+            <a:ext cx="685800" cy="475488"/>
           </a:xfrm>
           <a:prstGeom prst="rect">
             <a:avLst/>
@@ -22195,12 +22195,12 @@
         </p:nvSpPr>
         <p:spPr>
           <a:xfrm>
-            <a:off x="3403397" y="4169664"/>
-            <a:ext cx="676656" cy="384048"/>
+            <a:off x="3639312" y="4169664"/>
+            <a:ext cx="685800" cy="475488"/>
           </a:xfrm>
           <a:prstGeom prst="rect">
             <a:avLst>
-              <a:gd name="adj" fmla="val 9524"/>
+              <a:gd name="adj" fmla="val 7692"/>
             </a:avLst>
           </a:prstGeom>
           <a:solidFill>
@@ -22222,8 +22222,8 @@
         </p:nvSpPr>
         <p:spPr>
           <a:xfrm>
-            <a:off x="3403397" y="4169664"/>
-            <a:ext cx="676656" cy="384048"/>
+            <a:off x="3639312" y="4169664"/>
+            <a:ext cx="685800" cy="475488"/>
           </a:xfrm>
           <a:prstGeom prst="rect">
             <a:avLst/>
@@ -22261,12 +22261,12 @@
         </p:nvSpPr>
         <p:spPr>
           <a:xfrm>
-            <a:off x="4129430" y="4169664"/>
-            <a:ext cx="676656" cy="384048"/>
+            <a:off x="4447032" y="4169664"/>
+            <a:ext cx="685800" cy="475488"/>
           </a:xfrm>
           <a:prstGeom prst="rect">
             <a:avLst>
-              <a:gd name="adj" fmla="val 9524"/>
+              <a:gd name="adj" fmla="val 7692"/>
             </a:avLst>
           </a:prstGeom>
           <a:solidFill>
@@ -22288,8 +22288,8 @@
         </p:nvSpPr>
         <p:spPr>
           <a:xfrm>
-            <a:off x="4129430" y="4169664"/>
-            <a:ext cx="676656" cy="384048"/>
+            <a:off x="4447032" y="4169664"/>
+            <a:ext cx="685800" cy="475488"/>
           </a:xfrm>
           <a:prstGeom prst="rect">
             <a:avLst/>
@@ -22327,12 +22327,12 @@
         </p:nvSpPr>
         <p:spPr>
           <a:xfrm>
-            <a:off x="4855464" y="4169664"/>
-            <a:ext cx="676656" cy="384048"/>
+            <a:off x="5254752" y="4169664"/>
+            <a:ext cx="685800" cy="475488"/>
           </a:xfrm>
           <a:prstGeom prst="rect">
             <a:avLst>
-              <a:gd name="adj" fmla="val 9524"/>
+              <a:gd name="adj" fmla="val 7692"/>
             </a:avLst>
           </a:prstGeom>
           <a:solidFill>
@@ -22354,8 +22354,8 @@
         </p:nvSpPr>
         <p:spPr>
           <a:xfrm>
-            <a:off x="4855464" y="4169664"/>
-            <a:ext cx="676656" cy="384048"/>
+            <a:off x="5254752" y="4169664"/>
+            <a:ext cx="685800" cy="475488"/>
           </a:xfrm>
           <a:prstGeom prst="rect">
             <a:avLst/>
@@ -22393,12 +22393,12 @@
         </p:nvSpPr>
         <p:spPr>
           <a:xfrm>
-            <a:off x="5581498" y="4169664"/>
-            <a:ext cx="676656" cy="384048"/>
+            <a:off x="6062472" y="4169664"/>
+            <a:ext cx="685800" cy="475488"/>
           </a:xfrm>
           <a:prstGeom prst="rect">
             <a:avLst>
-              <a:gd name="adj" fmla="val 9524"/>
+              <a:gd name="adj" fmla="val 7692"/>
             </a:avLst>
           </a:prstGeom>
           <a:solidFill>
@@ -22420,8 +22420,8 @@
         </p:nvSpPr>
         <p:spPr>
           <a:xfrm>
-            <a:off x="5581498" y="4169664"/>
-            <a:ext cx="676656" cy="384048"/>
+            <a:off x="6062472" y="4169664"/>
+            <a:ext cx="685800" cy="475488"/>
           </a:xfrm>
           <a:prstGeom prst="rect">
             <a:avLst/>
@@ -22459,12 +22459,12 @@
         </p:nvSpPr>
         <p:spPr>
           <a:xfrm>
-            <a:off x="6307531" y="4169664"/>
-            <a:ext cx="676656" cy="384048"/>
+            <a:off x="6870192" y="4169664"/>
+            <a:ext cx="685800" cy="475488"/>
           </a:xfrm>
           <a:prstGeom prst="rect">
             <a:avLst>
-              <a:gd name="adj" fmla="val 9524"/>
+              <a:gd name="adj" fmla="val 7692"/>
             </a:avLst>
           </a:prstGeom>
           <a:solidFill>
@@ -22486,8 +22486,8 @@
         </p:nvSpPr>
         <p:spPr>
           <a:xfrm>
-            <a:off x="6307531" y="4169664"/>
-            <a:ext cx="676656" cy="384048"/>
+            <a:off x="6870192" y="4169664"/>
+            <a:ext cx="685800" cy="475488"/>
           </a:xfrm>
           <a:prstGeom prst="rect">
             <a:avLst/>
@@ -22511,7 +22511,7 @@
                 <a:ea typeface="Trebuchet MS" pitchFamily="34" charset="-122"/>
                 <a:cs typeface="Trebuchet MS" pitchFamily="34" charset="-120"/>
               </a:rPr>
-              <a:t>t</a:t>
+              <a:t>e</a:t>
             </a:r>
             <a:endParaRPr lang="en-US" sz="900" dirty="0"/>
           </a:p>
@@ -22519,57 +22519,18 @@
       </p:sp>
       <p:sp>
         <p:nvSpPr>
-          <p:cNvPr id="53" name="Text 51"/>
-          <p:cNvSpPr/>
-          <p:nvPr/>
-        </p:nvSpPr>
-        <p:spPr>
-          <a:xfrm>
-            <a:off x="6307531" y="4572000"/>
-            <a:ext cx="676656" cy="219456"/>
-          </a:xfrm>
-          <a:prstGeom prst="rect">
-            <a:avLst/>
-          </a:prstGeom>
-          <a:noFill/>
-          <a:ln/>
-        </p:spPr>
-        <p:txBody>
-          <a:bodyPr wrap="square" lIns="0" tIns="0" rIns="0" bIns="0" rtlCol="0" anchor="t"/>
-          <a:lstStyle/>
-          <a:p>
-            <a:pPr algn="ctr" indent="0" marL="0">
-              <a:buNone/>
-            </a:pPr>
-            <a:r>
-              <a:rPr lang="en-US" sz="750" i="1" dirty="0">
-                <a:solidFill>
-                  <a:srgbClr val="94A3B8"/>
-                </a:solidFill>
-                <a:latin typeface="Calibri" pitchFamily="34" charset="0"/>
-                <a:ea typeface="Calibri" pitchFamily="34" charset="-122"/>
-                <a:cs typeface="Calibri" pitchFamily="34" charset="-120"/>
-              </a:rPr>
-              <a:t>/t/</a:t>
-            </a:r>
-            <a:endParaRPr lang="en-US" sz="750" dirty="0"/>
-          </a:p>
-        </p:txBody>
-      </p:sp>
-      <p:sp>
-        <p:nvSpPr>
-          <p:cNvPr id="54" name="Shape 52"/>
-          <p:cNvSpPr/>
-          <p:nvPr/>
-        </p:nvSpPr>
-        <p:spPr>
-          <a:xfrm>
-            <a:off x="7033565" y="4169664"/>
-            <a:ext cx="676656" cy="384048"/>
+          <p:cNvPr id="53" name="Shape 51"/>
+          <p:cNvSpPr/>
+          <p:nvPr/>
+        </p:nvSpPr>
+        <p:spPr>
+          <a:xfrm>
+            <a:off x="7677912" y="4169664"/>
+            <a:ext cx="685800" cy="475488"/>
           </a:xfrm>
           <a:prstGeom prst="rect">
             <a:avLst>
-              <a:gd name="adj" fmla="val 9524"/>
+              <a:gd name="adj" fmla="val 7692"/>
             </a:avLst>
           </a:prstGeom>
           <a:solidFill>
@@ -22585,14 +22546,14 @@
       </p:sp>
       <p:sp>
         <p:nvSpPr>
-          <p:cNvPr id="55" name="Text 53"/>
-          <p:cNvSpPr/>
-          <p:nvPr/>
-        </p:nvSpPr>
-        <p:spPr>
-          <a:xfrm>
-            <a:off x="7033565" y="4169664"/>
-            <a:ext cx="676656" cy="384048"/>
+          <p:cNvPr id="54" name="Text 52"/>
+          <p:cNvSpPr/>
+          <p:nvPr/>
+        </p:nvSpPr>
+        <p:spPr>
+          <a:xfrm>
+            <a:off x="7677912" y="4169664"/>
+            <a:ext cx="685800" cy="475488"/>
           </a:xfrm>
           <a:prstGeom prst="rect">
             <a:avLst/>
@@ -22616,114 +22577,9 @@
                 <a:ea typeface="Trebuchet MS" pitchFamily="34" charset="-122"/>
                 <a:cs typeface="Trebuchet MS" pitchFamily="34" charset="-120"/>
               </a:rPr>
-              <a:t>e</a:t>
+              <a:t>d</a:t>
             </a:r>
             <a:endParaRPr lang="en-US" sz="900" dirty="0"/>
-          </a:p>
-        </p:txBody>
-      </p:sp>
-      <p:sp>
-        <p:nvSpPr>
-          <p:cNvPr id="56" name="Shape 54"/>
-          <p:cNvSpPr/>
-          <p:nvPr/>
-        </p:nvSpPr>
-        <p:spPr>
-          <a:xfrm>
-            <a:off x="7759598" y="4169664"/>
-            <a:ext cx="676656" cy="384048"/>
-          </a:xfrm>
-          <a:prstGeom prst="rect">
-            <a:avLst>
-              <a:gd name="adj" fmla="val 9524"/>
-            </a:avLst>
-          </a:prstGeom>
-          <a:solidFill>
-            <a:srgbClr val="FFFFFF"/>
-          </a:solidFill>
-          <a:ln w="12700">
-            <a:solidFill>
-              <a:srgbClr val="DB2777"/>
-            </a:solidFill>
-            <a:prstDash val="solid"/>
-          </a:ln>
-        </p:spPr>
-      </p:sp>
-      <p:sp>
-        <p:nvSpPr>
-          <p:cNvPr id="57" name="Text 55"/>
-          <p:cNvSpPr/>
-          <p:nvPr/>
-        </p:nvSpPr>
-        <p:spPr>
-          <a:xfrm>
-            <a:off x="7759598" y="4169664"/>
-            <a:ext cx="676656" cy="384048"/>
-          </a:xfrm>
-          <a:prstGeom prst="rect">
-            <a:avLst/>
-          </a:prstGeom>
-          <a:noFill/>
-          <a:ln/>
-        </p:spPr>
-        <p:txBody>
-          <a:bodyPr wrap="square" lIns="0" tIns="0" rIns="0" bIns="0" rtlCol="0" anchor="ctr"/>
-          <a:lstStyle/>
-          <a:p>
-            <a:pPr algn="ctr" indent="0" marL="0">
-              <a:buNone/>
-            </a:pPr>
-            <a:r>
-              <a:rPr lang="en-US" sz="900" b="1" dirty="0">
-                <a:solidFill>
-                  <a:srgbClr val="9D174D"/>
-                </a:solidFill>
-                <a:latin typeface="Trebuchet MS" pitchFamily="34" charset="0"/>
-                <a:ea typeface="Trebuchet MS" pitchFamily="34" charset="-122"/>
-                <a:cs typeface="Trebuchet MS" pitchFamily="34" charset="-120"/>
-              </a:rPr>
-              <a:t>d</a:t>
-            </a:r>
-            <a:endParaRPr lang="en-US" sz="900" dirty="0"/>
-          </a:p>
-        </p:txBody>
-      </p:sp>
-      <p:sp>
-        <p:nvSpPr>
-          <p:cNvPr id="58" name="Text 56"/>
-          <p:cNvSpPr/>
-          <p:nvPr/>
-        </p:nvSpPr>
-        <p:spPr>
-          <a:xfrm>
-            <a:off x="7759598" y="4572000"/>
-            <a:ext cx="676656" cy="219456"/>
-          </a:xfrm>
-          <a:prstGeom prst="rect">
-            <a:avLst/>
-          </a:prstGeom>
-          <a:noFill/>
-          <a:ln/>
-        </p:spPr>
-        <p:txBody>
-          <a:bodyPr wrap="square" lIns="0" tIns="0" rIns="0" bIns="0" rtlCol="0" anchor="t"/>
-          <a:lstStyle/>
-          <a:p>
-            <a:pPr algn="ctr" indent="0" marL="0">
-              <a:buNone/>
-            </a:pPr>
-            <a:r>
-              <a:rPr lang="en-US" sz="750" i="1" dirty="0">
-                <a:solidFill>
-                  <a:srgbClr val="94A3B8"/>
-                </a:solidFill>
-                <a:latin typeface="Calibri" pitchFamily="34" charset="0"/>
-                <a:ea typeface="Calibri" pitchFamily="34" charset="-122"/>
-                <a:cs typeface="Calibri" pitchFamily="34" charset="-120"/>
-              </a:rPr>
-              <a:t>/d/</a:t>
-            </a:r>
-            <a:endParaRPr lang="en-US" sz="750" dirty="0"/>
           </a:p>
         </p:txBody>
       </p:sp>
@@ -36503,7 +36359,7 @@
                 <a:ea typeface="Calibri" pitchFamily="34" charset="-122"/>
                 <a:cs typeface="Calibri" pitchFamily="34" charset="-120"/>
               </a:rPr>
-              <a:t>1.  The root 'work' comes from the Latin language.</a:t>
+              <a:t>1.  'Overworked' means a person has been given too much work.</a:t>
             </a:r>
             <a:endParaRPr lang="en-US" sz="1300" dirty="0"/>
           </a:p>
@@ -36526,11 +36382,11 @@
             </a:avLst>
           </a:prstGeom>
           <a:solidFill>
-            <a:srgbClr val="FEE2E2"/>
-          </a:solidFill>
-          <a:ln w="12700">
-            <a:solidFill>
-              <a:srgbClr val="DC2626"/>
+            <a:srgbClr val="DCFCE7"/>
+          </a:solidFill>
+          <a:ln w="12700">
+            <a:solidFill>
+              <a:srgbClr val="16A34A"/>
             </a:solidFill>
             <a:prstDash val="solid"/>
           </a:ln>
@@ -36563,13 +36419,13 @@
             <a:r>
               <a:rPr lang="en-US" sz="1100" b="1" dirty="0">
                 <a:solidFill>
-                  <a:srgbClr val="DC2626"/>
+                  <a:srgbClr val="16A34A"/>
                 </a:solidFill>
                 <a:latin typeface="Trebuchet MS" pitchFamily="34" charset="0"/>
                 <a:ea typeface="Trebuchet MS" pitchFamily="34" charset="-122"/>
                 <a:cs typeface="Trebuchet MS" pitchFamily="34" charset="-120"/>
               </a:rPr>
-              <a:t>FALSE</a:t>
+              <a:t>TRUE</a:t>
             </a:r>
             <a:endParaRPr lang="en-US" sz="1100" dirty="0"/>
           </a:p>
@@ -36642,7 +36498,7 @@
                 <a:ea typeface="Calibri" pitchFamily="34" charset="-122"/>
                 <a:cs typeface="Calibri" pitchFamily="34" charset="-120"/>
               </a:rPr>
-              <a:t>2.  'Overworked' means a person has been given too much work.</a:t>
+              <a:t>2.  The word 'teamwork' contains the root 'work'.</a:t>
             </a:r>
             <a:endParaRPr lang="en-US" sz="1300" dirty="0"/>
           </a:p>
@@ -36920,7 +36776,7 @@
                 <a:ea typeface="Calibri" pitchFamily="34" charset="-122"/>
                 <a:cs typeface="Calibri" pitchFamily="34" charset="-120"/>
               </a:rPr>
-              <a:t>4.  The word 'teamwork' contains the root 'work'.</a:t>
+              <a:t>4.  A 'workshop' is a place where people learn by doing activities.</a:t>
             </a:r>
             <a:endParaRPr lang="en-US" sz="1300" dirty="0"/>
           </a:p>
@@ -37059,7 +36915,7 @@
                 <a:ea typeface="Calibri" pitchFamily="34" charset="-122"/>
                 <a:cs typeface="Calibri" pitchFamily="34" charset="-120"/>
               </a:rPr>
-              <a:t>5.  A 'workshop' is a place where people learn by doing activities.</a:t>
+              <a:t>5.  The root 'work' comes from the Latin language.</a:t>
             </a:r>
             <a:endParaRPr lang="en-US" sz="1300" dirty="0"/>
           </a:p>
@@ -37082,11 +36938,11 @@
             </a:avLst>
           </a:prstGeom>
           <a:solidFill>
-            <a:srgbClr val="DCFCE7"/>
-          </a:solidFill>
-          <a:ln w="12700">
-            <a:solidFill>
-              <a:srgbClr val="16A34A"/>
+            <a:srgbClr val="FEE2E2"/>
+          </a:solidFill>
+          <a:ln w="12700">
+            <a:solidFill>
+              <a:srgbClr val="DC2626"/>
             </a:solidFill>
             <a:prstDash val="solid"/>
           </a:ln>
@@ -37119,13 +36975,13 @@
             <a:r>
               <a:rPr lang="en-US" sz="1100" b="1" dirty="0">
                 <a:solidFill>
-                  <a:srgbClr val="16A34A"/>
+                  <a:srgbClr val="DC2626"/>
                 </a:solidFill>
                 <a:latin typeface="Trebuchet MS" pitchFamily="34" charset="0"/>
                 <a:ea typeface="Trebuchet MS" pitchFamily="34" charset="-122"/>
                 <a:cs typeface="Trebuchet MS" pitchFamily="34" charset="-120"/>
               </a:rPr>
-              <a:t>TRUE</a:t>
+              <a:t>FALSE</a:t>
             </a:r>
             <a:endParaRPr lang="en-US" sz="1100" dirty="0"/>
           </a:p>
